--- a/thesis/1150922.pptx
+++ b/thesis/1150922.pptx
@@ -13,13 +13,13 @@
     <p:sldId id="258" r:id="rId4"/>
     <p:sldId id="259" r:id="rId5"/>
     <p:sldId id="260" r:id="rId6"/>
-    <p:sldId id="263" r:id="rId9"/>
-    <p:sldId id="261" r:id="rId7"/>
-    <p:sldId id="262" r:id="rId8"/>
+    <p:sldId id="263" r:id="rId7"/>
+    <p:sldId id="261" r:id="rId8"/>
+    <p:sldId id="262" r:id="rId9"/>
     <p:sldId id="264" r:id="rId10"/>
     <p:sldId id="265" r:id="rId11"/>
-    <p:sldId id="267" r:id="rId13"/>
-    <p:sldId id="266" r:id="rId12"/>
+    <p:sldId id="267" r:id="rId12"/>
+    <p:sldId id="266" r:id="rId13"/>
     <p:sldId id="268" r:id="rId14"/>
     <p:sldId id="269" r:id="rId15"/>
     <p:sldId id="270" r:id="rId16"/>
@@ -30,16 +30,16 @@
     <p:sldId id="275" r:id="rId21"/>
     <p:sldId id="276" r:id="rId22"/>
     <p:sldId id="277" r:id="rId23"/>
-    <p:sldId id="279" r:id="rId25"/>
-    <p:sldId id="278" r:id="rId24"/>
+    <p:sldId id="279" r:id="rId24"/>
+    <p:sldId id="278" r:id="rId25"/>
     <p:sldId id="280" r:id="rId26"/>
     <p:sldId id="281" r:id="rId27"/>
-    <p:sldId id="287" r:id="rId33"/>
-    <p:sldId id="284" r:id="rId30"/>
-    <p:sldId id="283" r:id="rId29"/>
-    <p:sldId id="282" r:id="rId28"/>
-    <p:sldId id="285" r:id="rId31"/>
-    <p:sldId id="286" r:id="rId32"/>
+    <p:sldId id="287" r:id="rId28"/>
+    <p:sldId id="284" r:id="rId29"/>
+    <p:sldId id="283" r:id="rId30"/>
+    <p:sldId id="282" r:id="rId31"/>
+    <p:sldId id="285" r:id="rId32"/>
+    <p:sldId id="286" r:id="rId33"/>
   </p:sldIdLst>
   <p:sldSz cx="12192000" cy="6858000"/>
   <p:notesSz cx="6858000" cy="9144000"/>
@@ -1837,7 +1837,7 @@
           <a:lstStyle/>
           <a:p>
             <a:r>
-              <a:t>剛才消融裡的基準臂 v4 就是這個交易端，這張把它講清楚。</a:t>
+              <a:t>這是消融的設計。五條臂，唯一的差別就是動作空間。</a:t>
             </a:r>
           </a:p>
           <a:p>
@@ -1845,12 +1845,17 @@
           </a:p>
           <a:p>
             <a:r>
-              <a:t>我的交易端叫 DL-THR。它每期從九個動作裡選一個：SKIP 也就是拒絕交易，加上八組</a:t>
-            </a:r>
-          </a:p>
-          <a:p>
-            <a:r>
-              <a:t>進出場門檻的組合。狀態是 12 維的形成期特徵，全部在交易期開始前就算完了。</a:t>
+              <a:t>上面兩條是基準：Z-Score 每期零次決策，DL-THR 每期一次（DL-THR 是什麼，下一張細講）。下面三條是處理組，</a:t>
+            </a:r>
+          </a:p>
+          <a:p>
+            <a:r>
+              <a:t>三代逐日自由持倉的實作——原始的 LSTM-DQN、修掉訓練缺陷的修復版、還有批次</a:t>
+            </a:r>
+          </a:p>
+          <a:p>
+            <a:r>
+              <a:t>擬合 Q 的 FQI。</a:t>
             </a:r>
           </a:p>
           <a:p>
@@ -1858,12 +1863,12 @@
           </a:p>
           <a:p>
             <a:r>
-              <a:t>左邊是重點：它不是強化學習。原因是這九個動作的報酬全部可以精確反事實回算</a:t>
-            </a:r>
-          </a:p>
-          <a:p>
-            <a:r>
-              <a:t>——我只要拿該交易期的價格，把九組門檻各模擬一次就知道每個動作會賺多少。</a:t>
+              <a:t>右上是共用的部分：同一批 GICS-SDP 配對、同一個網格格點、同一種對沖口徑、</a:t>
+            </a:r>
+          </a:p>
+          <a:p>
+            <a:r>
+              <a:t>訓練預算一律 150 episodes、同一段期間。</a:t>
             </a:r>
           </a:p>
           <a:p>
@@ -1871,12 +1876,12 @@
           </a:p>
           <a:p>
             <a:r>
-              <a:t>既然每個動作的報酬都看得到，就不存在探索與利用的取捨。這是全資訊監督回歸，</a:t>
-            </a:r>
-          </a:p>
-          <a:p>
-            <a:r>
-              <a:t>不是部分回饋的強化學習。程式碼裡還叫 DRL 是歷史命名，論文一律稱 DL-THR。</a:t>
+              <a:t>訓練預算為什麼不能下修？因為一旦下修，「它表現差是因為訓練不足」就會變成</a:t>
+            </a:r>
+          </a:p>
+          <a:p>
+            <a:r>
+              <a:t>我無法排除的替代解釋。代價是單臂要跑三天。</a:t>
             </a:r>
           </a:p>
           <a:p>
@@ -1884,17 +1889,17 @@
           </a:p>
           <a:p>
             <a:r>
-              <a:t>右邊三項保證：選單包含靜態基準，所以策略空間必然涵蓋 Z-Score；樣本不足時自動</a:t>
-            </a:r>
-          </a:p>
-          <a:p>
-            <a:r>
-              <a:t>退回基準動作；還有 SKIP，讓代理人可以主動拒絕爛配對——這是固定規則沒有的</a:t>
-            </a:r>
-          </a:p>
-          <a:p>
-            <a:r>
-              <a:t>選擇性。</a:t>
+              <a:t>左下：五臂共同期 108 期。有個不對稱要說明——只有 v1 需要形成期的價格切片，</a:t>
+            </a:r>
+          </a:p>
+          <a:p>
+            <a:r>
+              <a:t>所以有 12 個左緣期只有 v1 算不了。我的處置是取五臂交集，而且這個不對稱是在</a:t>
+            </a:r>
+          </a:p>
+          <a:p>
+            <a:r>
+              <a:t>執行前就寫進預先登記的，不是事後發現才補說明。</a:t>
             </a:r>
           </a:p>
         </p:txBody>
@@ -1964,7 +1969,7 @@
           <a:lstStyle/>
           <a:p>
             <a:r>
-              <a:t>這是消融的設計。五條臂，唯一的差別就是動作空間。</a:t>
+              <a:t>剛才消融裡的基準臂 v4 就是這個交易端，這張把它講清楚。</a:t>
             </a:r>
           </a:p>
           <a:p>
@@ -1972,17 +1977,12 @@
           </a:p>
           <a:p>
             <a:r>
-              <a:t>上面兩條是基準：Z-Score 每期零次決策，DL-THR 每期一次（DL-THR 是什麼，下一張細講）。下面三條是處理組，</a:t>
-            </a:r>
-          </a:p>
-          <a:p>
-            <a:r>
-              <a:t>三代逐日自由持倉的實作——原始的 LSTM-DQN、修掉訓練缺陷的修復版、還有批次</a:t>
-            </a:r>
-          </a:p>
-          <a:p>
-            <a:r>
-              <a:t>擬合 Q 的 FQI。</a:t>
+              <a:t>我的交易端叫 DL-THR。它每期從九個動作裡選一個：SKIP 也就是拒絕交易，加上八組</a:t>
+            </a:r>
+          </a:p>
+          <a:p>
+            <a:r>
+              <a:t>進出場門檻的組合。狀態是 12 維的形成期特徵，全部在交易期開始前就算完了。</a:t>
             </a:r>
           </a:p>
           <a:p>
@@ -1990,12 +1990,12 @@
           </a:p>
           <a:p>
             <a:r>
-              <a:t>右上是共用的部分：同一批 GICS-SDP 配對、同一個網格格點、同一種對沖口徑、</a:t>
-            </a:r>
-          </a:p>
-          <a:p>
-            <a:r>
-              <a:t>訓練預算一律 150 episodes、同一段期間。</a:t>
+              <a:t>左邊是重點：它不是強化學習。原因是這九個動作的報酬全部可以精確反事實回算</a:t>
+            </a:r>
+          </a:p>
+          <a:p>
+            <a:r>
+              <a:t>——我只要拿該交易期的價格，把九組門檻各模擬一次就知道每個動作會賺多少。</a:t>
             </a:r>
           </a:p>
           <a:p>
@@ -2003,12 +2003,12 @@
           </a:p>
           <a:p>
             <a:r>
-              <a:t>訓練預算為什麼不能下修？因為一旦下修，「它表現差是因為訓練不足」就會變成</a:t>
-            </a:r>
-          </a:p>
-          <a:p>
-            <a:r>
-              <a:t>我無法排除的替代解釋。代價是單臂要跑三天。</a:t>
+              <a:t>既然每個動作的報酬都看得到，就不存在探索與利用的取捨。這是全資訊監督回歸，</a:t>
+            </a:r>
+          </a:p>
+          <a:p>
+            <a:r>
+              <a:t>不是部分回饋的強化學習。程式碼裡還叫 DRL 是歷史命名，論文一律稱 DL-THR。</a:t>
             </a:r>
           </a:p>
           <a:p>
@@ -2016,17 +2016,17 @@
           </a:p>
           <a:p>
             <a:r>
-              <a:t>左下：五臂共同期 108 期。有個不對稱要說明——只有 v1 需要形成期的價格切片，</a:t>
-            </a:r>
-          </a:p>
-          <a:p>
-            <a:r>
-              <a:t>所以有 12 個左緣期只有 v1 算不了。我的處置是取五臂交集，而且這個不對稱是在</a:t>
-            </a:r>
-          </a:p>
-          <a:p>
-            <a:r>
-              <a:t>執行前就寫進預先登記的，不是事後發現才補說明。</a:t>
+              <a:t>右邊三項保證：選單包含靜態基準，所以策略空間必然涵蓋 Z-Score；樣本不足時自動</a:t>
+            </a:r>
+          </a:p>
+          <a:p>
+            <a:r>
+              <a:t>退回基準動作；還有 SKIP，讓代理人可以主動拒絕爛配對——這是固定規則沒有的</a:t>
+            </a:r>
+          </a:p>
+          <a:p>
+            <a:r>
+              <a:t>選擇性。</a:t>
             </a:r>
           </a:p>
         </p:txBody>
@@ -3335,7 +3335,7 @@
           </a:p>
           <a:p>
             <a:r>
-              <a:t>第一道是絕對績效。最佳配置帳面年化 1.026%，rf 超額只有 0.375 個百分點，Sharpe</a:t>
+              <a:t>第一道是絕對績效。以 15 格等權的口徑，最佳的策略帳面年化 1.026%，rf 超額只有 0.375 個百分點，Sharpe</a:t>
             </a:r>
           </a:p>
           <a:p>
@@ -3459,7 +3459,7 @@
           <a:lstStyle/>
           <a:p>
             <a:r>
-              <a:t>總結成一句話。</a:t>
+              <a:t>研究限制，依對結論的影響程度排列。</a:t>
             </a:r>
           </a:p>
           <a:p>
@@ -3467,12 +3467,22 @@
           </a:p>
           <a:p>
             <a:r>
-              <a:t>門檻選擇的增益來自動作空間的「設計」，不來自逐對的「辨識能力」；而該增益的</a:t>
-            </a:r>
-          </a:p>
-          <a:p>
-            <a:r>
-              <a:t>量級不足以構成可交易的策略。</a:t>
+              <a:t>第一也是最重要的：消融只在單一配對來源、單一格點、單一對沖口徑、108 期上執行，</a:t>
+            </a:r>
+          </a:p>
+          <a:p>
+            <a:r>
+              <a:t>而且四條學習臂都沒固定隨機種子、每臂只跑一次。我測過同組態兩次執行的差異可以</a:t>
+            </a:r>
+          </a:p>
+          <a:p>
+            <a:r>
+              <a:t>到 2.0 到 2.8 倍，我的效果量 2.1 到 4.1 倍是大於這個雜訊的，兩條基準臂也是逐位</a:t>
+            </a:r>
+          </a:p>
+          <a:p>
+            <a:r>
+              <a:t>確定的，所以結論成立。但我無法排除在其他來源或格點上量級不同。</a:t>
             </a:r>
           </a:p>
           <a:p>
@@ -3480,12 +3490,12 @@
           </a:p>
           <a:p>
             <a:r>
-              <a:t>換個說法：在日頻配對交易上，決定學習式交易端成敗的是動作空間的形狀，不是</a:t>
-            </a:r>
-          </a:p>
-          <a:p>
-            <a:r>
-              <a:t>學習演算法的強弱，也不是模型能不能辨識每一組配對。</a:t>
+              <a:t>第二，母體限於大型股，而 Do &amp; Faff 指出報酬衰減在流動性高的大型股上更明顯</a:t>
+            </a:r>
+          </a:p>
+          <a:p>
+            <a:r>
+              <a:t>——也就是說我的母體恰好是衰減最嚴重的地方。</a:t>
             </a:r>
           </a:p>
           <a:p>
@@ -3493,7 +3503,22 @@
           </a:p>
           <a:p>
             <a:r>
-              <a:t>至於那個形狀所能帶來的增益——它是真的，方向一致，機制可歸因，但它不夠大。</a:t>
+              <a:t>第三這一條我要特別說。形成期層的比較，最小可偵測效果是 1.14 個百分點，而參照臂</a:t>
+            </a:r>
+          </a:p>
+          <a:p>
+            <a:r>
+              <a:t>自身的年化績效只有 0.461 個百分點。也就是說這個設計連參照臂自己那麼大的效果</a:t>
+            </a:r>
+          </a:p>
+          <a:p>
+            <a:r>
+              <a:t>都偵測不到。所以我對配對來源之間的優劣只作描述，不作檢定。把這一節從「結論」</a:t>
+            </a:r>
+          </a:p>
+          <a:p>
+            <a:r>
+              <a:t>降為「描述性觀察」，是我最不情願但最必要的決定。</a:t>
             </a:r>
           </a:p>
           <a:p>
@@ -3501,12 +3526,15 @@
           </a:p>
           <a:p>
             <a:r>
-              <a:t>這是一個關於設計的結論，不是關於獲利的結論。我認為這樣講比硬要宣稱賺錢誠實</a:t>
-            </a:r>
-          </a:p>
-          <a:p>
-            <a:r>
-              <a:t>得多。</a:t>
+              <a:t>第四，存活者偏誤沒完全消除，方向是高估絕對績效，所以我報的「不顯著」是偏保守的。</a:t>
+            </a:r>
+          </a:p>
+          <a:p>
+            <a:endParaRPr/>
+          </a:p>
+          <a:p>
+            <a:r>
+              <a:t>第五，entry_z 的下界 1.5 從來沒跑過，所以不能推論最適門檻的位置。</a:t>
             </a:r>
           </a:p>
         </p:txBody>
@@ -3576,7 +3604,7 @@
           <a:lstStyle/>
           <a:p>
             <a:r>
-              <a:t>研究限制，依對結論的影響程度排列。</a:t>
+              <a:t>總結成一句話。</a:t>
             </a:r>
           </a:p>
           <a:p>
@@ -3584,22 +3612,12 @@
           </a:p>
           <a:p>
             <a:r>
-              <a:t>第一也是最重要的：消融只在單一配對來源、單一格點、單一對沖口徑、108 期上執行，</a:t>
-            </a:r>
-          </a:p>
-          <a:p>
-            <a:r>
-              <a:t>而且四條學習臂都沒固定隨機種子、每臂只跑一次。我測過同組態兩次執行的差異可以</a:t>
-            </a:r>
-          </a:p>
-          <a:p>
-            <a:r>
-              <a:t>到 2.0 到 2.8 倍，我的效果量 2.1 到 4.1 倍是大於這個雜訊的，兩條基準臂也是逐位</a:t>
-            </a:r>
-          </a:p>
-          <a:p>
-            <a:r>
-              <a:t>確定的，所以結論成立。但我無法排除在其他來源或格點上量級不同。</a:t>
+              <a:t>門檻選擇的增益來自動作空間的「設計」，不來自逐對的「辨識能力」；而該增益的</a:t>
+            </a:r>
+          </a:p>
+          <a:p>
+            <a:r>
+              <a:t>量級不足以構成可交易的策略。</a:t>
             </a:r>
           </a:p>
           <a:p>
@@ -3607,12 +3625,12 @@
           </a:p>
           <a:p>
             <a:r>
-              <a:t>第二，母體限於大型股，而 Do &amp; Faff 指出報酬衰減在流動性高的大型股上更明顯</a:t>
-            </a:r>
-          </a:p>
-          <a:p>
-            <a:r>
-              <a:t>——也就是說我的母體恰好是衰減最嚴重的地方。</a:t>
+              <a:t>換個說法：在日頻配對交易上，決定學習式交易端成敗的是動作空間的形狀，不是</a:t>
+            </a:r>
+          </a:p>
+          <a:p>
+            <a:r>
+              <a:t>學習演算法的強弱，也不是模型能不能辨識每一組配對。</a:t>
             </a:r>
           </a:p>
           <a:p>
@@ -3620,22 +3638,7 @@
           </a:p>
           <a:p>
             <a:r>
-              <a:t>第三這一條我要特別說。形成期層的比較，最小可偵測效果是 1.14 個百分點，而參照臂</a:t>
-            </a:r>
-          </a:p>
-          <a:p>
-            <a:r>
-              <a:t>自身的年化績效只有 0.461 個百分點。也就是說這個設計連參照臂自己那麼大的效果</a:t>
-            </a:r>
-          </a:p>
-          <a:p>
-            <a:r>
-              <a:t>都偵測不到。所以我對配對來源之間的優劣只作描述，不作檢定。把這一節從「結論」</a:t>
-            </a:r>
-          </a:p>
-          <a:p>
-            <a:r>
-              <a:t>降為「描述性觀察」，是我最不情願但最必要的決定。</a:t>
+              <a:t>至於那個形狀所能帶來的增益——它是真的，方向一致，機制可歸因，但它不夠大。</a:t>
             </a:r>
           </a:p>
           <a:p>
@@ -3643,15 +3646,12 @@
           </a:p>
           <a:p>
             <a:r>
-              <a:t>第四，存活者偏誤沒完全消除，方向是高估絕對績效，所以我報的「不顯著」是偏保守的。</a:t>
-            </a:r>
-          </a:p>
-          <a:p>
-            <a:endParaRPr/>
-          </a:p>
-          <a:p>
-            <a:r>
-              <a:t>第五，entry_z 的下界 1.5 從來沒跑過，所以不能推論最適門檻的位置。</a:t>
+              <a:t>這是一個關於設計的結論，不是關於獲利的結論。我認為這樣講比硬要宣稱賺錢誠實</a:t>
+            </a:r>
+          </a:p>
+          <a:p>
+            <a:r>
+              <a:t>得多。</a:t>
             </a:r>
           </a:p>
         </p:txBody>
@@ -3928,7 +3928,7 @@
           <a:lstStyle/>
           <a:p>
             <a:r>
-              <a:t>如果委員問「這些數字可靠嗎」或「你怎麼確認實作正確」，用這張。</a:t>
+              <a:t>如果委員問預先登記的細節，或問「你怎麼確認那三天的回測真的跑成功了」，用這張。</a:t>
             </a:r>
           </a:p>
           <a:p>
@@ -3936,17 +3936,12 @@
           </a:p>
           <a:p>
             <a:r>
-              <a:t>我在研究後期發現多項實作跟方法章宣告的不符，這裡列六項主要的。最嚴重的是</a:t>
-            </a:r>
-          </a:p>
-          <a:p>
-            <a:r>
-              <a:t>共整合檢定誤用了 Dickey-Fuller 臨界值，導致通過率虛高到 77%——一個名目 5% 的</a:t>
-            </a:r>
-          </a:p>
-          <a:p>
-            <a:r>
-              <a:t>檢定不可能拒絕 77% 的虛無假設，這本身就是警訊。</a:t>
+              <a:t>我在回測啟動前就寫定了七項核對程序。因為 run_trading 回報「成功」不足以證明</a:t>
+            </a:r>
+          </a:p>
+          <a:p>
+            <a:r>
+              <a:t>真的跑成功——我在開發過程中曾兩度遇到回報成功但實際零有效模擬的情況。</a:t>
             </a:r>
           </a:p>
           <a:p>
@@ -3954,12 +3949,12 @@
           </a:p>
           <a:p>
             <a:r>
-              <a:t>還有子視窗回測的槽位洩漏，它會讓某一期零配對而且完全不報錯，這種靜默失敗</a:t>
-            </a:r>
-          </a:p>
-          <a:p>
-            <a:r>
-              <a:t>最危險。</a:t>
+              <a:t>七項全部通過。其中第四項我要特別說明：我核對 v1、v2 的逐期耗時中位數要大於</a:t>
+            </a:r>
+          </a:p>
+          <a:p>
+            <a:r>
+              <a:t>60 分鐘，這是用來確認模型確實在訓練，而不是空轉。實測是 69.7 跟 71.0 分鐘。</a:t>
             </a:r>
           </a:p>
           <a:p>
@@ -3967,12 +3962,17 @@
           </a:p>
           <a:p>
             <a:r>
-              <a:t>修正後，交易層的相對效果從 0/5 顯著變成 3/5 顯著。也就是說修正之前，我關於</a:t>
-            </a:r>
-          </a:p>
-          <a:p>
-            <a:r>
-              <a:t>交易層的任何結論都建立在一組並非我所描述的管線之上。</a:t>
+              <a:t>但下面這件事我必須主動揭露：分析程式第一次執行時，第 2 項跟第 7 項沒有通過。</a:t>
+            </a:r>
+          </a:p>
+          <a:p>
+            <a:r>
+              <a:t>原因不在回測，而在核對程式本身把「左緣」實作成單一期，而不是整個 12 期的區塊。</a:t>
+            </a:r>
+          </a:p>
+          <a:p>
+            <a:r>
+              <a:t>更正之後由失敗轉為通過。</a:t>
             </a:r>
           </a:p>
           <a:p>
@@ -3980,12 +3980,17 @@
           </a:p>
           <a:p>
             <a:r>
-              <a:t>有一個可以陳述的觀察：以錯誤的臨界值跟測錯對象的估計量所篩掉的，系統性地是</a:t>
-            </a:r>
-          </a:p>
-          <a:p>
-            <a:r>
-              <a:t>較好的配對。</a:t>
+              <a:t>這正是預先登記最容易被濫用的情境——看到失敗才改程式。我的處置是把更正的依據、</a:t>
+            </a:r>
+          </a:p>
+          <a:p>
+            <a:r>
+              <a:t>它只用日期不涉結果這個性質、以及「它確實是在看到失敗之後才改的」，全部寫進</a:t>
+            </a:r>
+          </a:p>
+          <a:p>
+            <a:r>
+              <a:t>偏離紀錄。</a:t>
             </a:r>
           </a:p>
           <a:p>
@@ -3993,7 +3998,7 @@
           </a:p>
           <a:p>
             <a:r>
-              <a:t>今天報告的每一個數字都產自修正後的管線。</a:t>
+              <a:t>預先登記的價值不在於不出錯，而在於出錯的時候留下痕跡。</a:t>
             </a:r>
           </a:p>
         </p:txBody>
@@ -4063,7 +4068,7 @@
           <a:lstStyle/>
           <a:p>
             <a:r>
-              <a:t>如果委員追問報酬口徑，用這張。</a:t>
+              <a:t>如果委員問「網路沒固定種子，你怎麼知道差異不是隨機的」，用這張。</a:t>
             </a:r>
           </a:p>
           <a:p>
@@ -4071,12 +4076,12 @@
           </a:p>
           <a:p>
             <a:r>
-              <a:t>年化有三個口徑：帳面（閒置現金不計息）、動用資本、rf 超額（閒置現金計息後超過</a:t>
-            </a:r>
-          </a:p>
-          <a:p>
-            <a:r>
-              <a:t>無風險的部分）。最佳配置分別是 1.026%、2.793%、0.375%。</a:t>
+              <a:t>我做了五輪獨立重訓。檢驗的問題是：管線修正造成的位移，是不是超出重訓本身的</a:t>
+            </a:r>
+          </a:p>
+          <a:p>
+            <a:r>
+              <a:t>雜訊。</a:t>
             </a:r>
           </a:p>
           <a:p>
@@ -4084,12 +4089,12 @@
           </a:p>
           <a:p>
             <a:r>
-              <a:t>關鍵是資金利用率只有 42.6%——靜態槽位的分母是理論上限，實際同時持倉遠低於此，</a:t>
-            </a:r>
-          </a:p>
-          <a:p>
-            <a:r>
-              <a:t>所以逾半數資金長期閒置。</a:t>
+              <a:t>120 組比較裡有 88 組，修正前的 Sharpe 低於修正後四輪的最小值，比例 73.3%。</a:t>
+            </a:r>
+          </a:p>
+          <a:p>
+            <a:r>
+              <a:t>如果修正沒有效果，這個比例應該是五分之一。二項檢定的 p 值是 10 的負 36 次方。</a:t>
             </a:r>
           </a:p>
           <a:p>
@@ -4097,12 +4102,12 @@
           </a:p>
           <a:p>
             <a:r>
-              <a:t>下面那張表是我把 DL-THR 的 rf 超額優勢拆開：1.080 個百分點裡面，0.798 是真實</a:t>
-            </a:r>
-          </a:p>
-          <a:p>
-            <a:r>
-              <a:t>報酬差，0.282 純粹是少動用資本多收的利息。</a:t>
+              <a:t>跨輪 Sharpe 的標準差中位數是 0.031，而修正造成的位移中位數是 0.236，差了將近</a:t>
+            </a:r>
+          </a:p>
+          <a:p>
+            <a:r>
+              <a:t>八倍。</a:t>
             </a:r>
           </a:p>
           <a:p>
@@ -4110,25 +4115,12 @@
           </a:p>
           <a:p>
             <a:r>
-              <a:t>右邊是一個內部一致性檢查：拆出來的 0.798 跟 0.579，跟第三段主檢定報的年化Δ</a:t>
-            </a:r>
-          </a:p>
-          <a:p>
-            <a:r>
-              <a:t>逐位相同。這不是湊的，因為 rf 超額等於算術年化減去 rf 乘以利用率，對逐日損益</a:t>
-            </a:r>
-          </a:p>
-          <a:p>
-            <a:r>
-              <a:t>是線性的，所以這個拆解是代數恆等式。</a:t>
-            </a:r>
-          </a:p>
-          <a:p>
-            <a:endParaRPr/>
-          </a:p>
-          <a:p>
-            <a:r>
-              <a:t>我要強調：那 0.282 不應該算成技巧。</a:t>
+              <a:t>有一個例外我必須主動說：KM-SSD-DRL 那條臂只有 6/15，p 值 0.061，沒過。那條臂</a:t>
+            </a:r>
+          </a:p>
+          <a:p>
+            <a:r>
+              <a:t>不可以單獨宣稱。</a:t>
             </a:r>
           </a:p>
         </p:txBody>
@@ -4198,7 +4190,7 @@
           <a:lstStyle/>
           <a:p>
             <a:r>
-              <a:t>如果委員問「網路沒固定種子，你怎麼知道差異不是隨機的」，用這張。</a:t>
+              <a:t>如果委員追問報酬口徑，用這張。</a:t>
             </a:r>
           </a:p>
           <a:p>
@@ -4206,12 +4198,12 @@
           </a:p>
           <a:p>
             <a:r>
-              <a:t>我做了五輪獨立重訓。檢驗的問題是：管線修正造成的位移，是不是超出重訓本身的</a:t>
-            </a:r>
-          </a:p>
-          <a:p>
-            <a:r>
-              <a:t>雜訊。</a:t>
+              <a:t>年化有三個口徑：帳面（閒置現金不計息）、動用資本、rf 超額（閒置現金計息後超過</a:t>
+            </a:r>
+          </a:p>
+          <a:p>
+            <a:r>
+              <a:t>無風險的部分）。等權口徑下最佳的策略分別是 1.026%、2.793%、0.375%。若只看網格裡最好的單一格，不分組 DTW 的 Top1 可到帳面 3.6%、rf 超額 4.6 個百分點，但那是 15 選 1 之後的數字，DSR 扣回後沒有通過，見 5.1.2 節。</a:t>
             </a:r>
           </a:p>
           <a:p>
@@ -4219,12 +4211,12 @@
           </a:p>
           <a:p>
             <a:r>
-              <a:t>120 組比較裡有 88 組，修正前的 Sharpe 低於修正後四輪的最小值，比例 73.3%。</a:t>
-            </a:r>
-          </a:p>
-          <a:p>
-            <a:r>
-              <a:t>如果修正沒有效果，這個比例應該是五分之一。二項檢定的 p 值是 10 的負 36 次方。</a:t>
+              <a:t>關鍵是資金利用率只有 42.6%——靜態槽位的分母是理論上限，實際同時持倉遠低於此，</a:t>
+            </a:r>
+          </a:p>
+          <a:p>
+            <a:r>
+              <a:t>所以逾半數資金長期閒置。</a:t>
             </a:r>
           </a:p>
           <a:p>
@@ -4232,12 +4224,12 @@
           </a:p>
           <a:p>
             <a:r>
-              <a:t>跨輪 Sharpe 的標準差中位數是 0.031，而修正造成的位移中位數是 0.236，差了將近</a:t>
-            </a:r>
-          </a:p>
-          <a:p>
-            <a:r>
-              <a:t>八倍。</a:t>
+              <a:t>下面那張表是我把 DL-THR 的 rf 超額優勢拆開：1.080 個百分點裡面，0.798 是真實</a:t>
+            </a:r>
+          </a:p>
+          <a:p>
+            <a:r>
+              <a:t>報酬差，0.282 純粹是少動用資本多收的利息。</a:t>
             </a:r>
           </a:p>
           <a:p>
@@ -4245,12 +4237,25 @@
           </a:p>
           <a:p>
             <a:r>
-              <a:t>有一個例外我必須主動說：KM-SSD-DRL 那條臂只有 6/15，p 值 0.061，沒過。那條臂</a:t>
-            </a:r>
-          </a:p>
-          <a:p>
-            <a:r>
-              <a:t>不可以單獨宣稱。</a:t>
+              <a:t>右邊是一個內部一致性檢查：拆出來的 0.798 跟 0.579，跟第三段主檢定報的年化Δ</a:t>
+            </a:r>
+          </a:p>
+          <a:p>
+            <a:r>
+              <a:t>逐位相同。這不是湊的，因為 rf 超額等於算術年化減去 rf 乘以利用率，對逐日損益</a:t>
+            </a:r>
+          </a:p>
+          <a:p>
+            <a:r>
+              <a:t>是線性的，所以這個拆解是代數恆等式。</a:t>
+            </a:r>
+          </a:p>
+          <a:p>
+            <a:endParaRPr/>
+          </a:p>
+          <a:p>
+            <a:r>
+              <a:t>我要強調：那 0.282 不應該算成技巧。</a:t>
             </a:r>
           </a:p>
         </p:txBody>
@@ -4434,7 +4439,7 @@
           <a:lstStyle/>
           <a:p>
             <a:r>
-              <a:t>如果委員問「什麼時候賺錢」或「能不能只在高波動期交易」，用這張。</a:t>
+              <a:t>如果委員問「這些數字可靠嗎」或「你怎麼確認實作正確」，用這張。</a:t>
             </a:r>
           </a:p>
           <a:p>
@@ -4442,12 +4447,17 @@
           </a:p>
           <a:p>
             <a:r>
-              <a:t>12 個臂全部呈現同一個型態：動盪期為正，平靜期跟一般期為負。而且這個型態不是</a:t>
-            </a:r>
-          </a:p>
-          <a:p>
-            <a:r>
-              <a:t>前視偏誤造成的，我用 walk-forward 門檻重做過，一致率 82.6%。</a:t>
+              <a:t>我在研究後期發現多項實作跟方法章宣告的不符，這裡列六項主要的。最嚴重的是</a:t>
+            </a:r>
+          </a:p>
+          <a:p>
+            <a:r>
+              <a:t>共整合檢定誤用了 Dickey-Fuller 臨界值，導致通過率虛高到 77%——一個名目 5% 的</a:t>
+            </a:r>
+          </a:p>
+          <a:p>
+            <a:r>
+              <a:t>檢定不可能拒絕 77% 的虛無假設，這本身就是警訊。</a:t>
             </a:r>
           </a:p>
           <a:p>
@@ -4455,17 +4465,12 @@
           </a:p>
           <a:p>
             <a:r>
-              <a:t>但這不構成可靠的改良，因為動盪期報酬極度集中——2008 到 2009 兩年貢獻了全部</a:t>
-            </a:r>
-          </a:p>
-          <a:p>
-            <a:r>
-              <a:t>動盪期報酬的 54% 到 87%。以 GICS-SSD 最極端，扣掉那兩年之後，其餘 17 個年度</a:t>
-            </a:r>
-          </a:p>
-          <a:p>
-            <a:r>
-              <a:t>合計只有 2.8%。</a:t>
+              <a:t>還有子視窗回測的槽位洩漏，它會讓某一期零配對而且完全不報錯，這種靜默失敗</a:t>
+            </a:r>
+          </a:p>
+          <a:p>
+            <a:r>
+              <a:t>最危險。</a:t>
             </a:r>
           </a:p>
           <a:p>
@@ -4473,17 +4478,12 @@
           </a:p>
           <a:p>
             <a:r>
-              <a:t>機制可以講清楚：波動高不等於配對機會多。2008 到 2009 是流動性危機跟強制去槓桿，</a:t>
-            </a:r>
-          </a:p>
-          <a:p>
-            <a:r>
-              <a:t>會製造價差極端偏離並隨後回歸。但 2022 年動盪日數最多，卻只產生負 0.18% 到</a:t>
-            </a:r>
-          </a:p>
-          <a:p>
-            <a:r>
-              <a:t>正 1.45%，因為那波動源於升息跟通膨預期的趨勢性方向移動，價差偏離後不必然回歸。</a:t>
+              <a:t>修正後，交易層的相對效果從 0/5 顯著變成 3/5 顯著。也就是說修正之前，我關於</a:t>
+            </a:r>
+          </a:p>
+          <a:p>
+            <a:r>
+              <a:t>交易層的任何結論都建立在一組並非我所描述的管線之上。</a:t>
             </a:r>
           </a:p>
           <a:p>
@@ -4491,12 +4491,12 @@
           </a:p>
           <a:p>
             <a:r>
-              <a:t>以已實現波動定義的 regime 無法區分這兩種來源。要做 regime 條件化，需要的是能</a:t>
-            </a:r>
-          </a:p>
-          <a:p>
-            <a:r>
-              <a:t>區分波動來源的指標，不是波動水準本身。</a:t>
+              <a:t>有一個可以陳述的觀察：以錯誤的臨界值跟測錯對象的估計量所篩掉的，系統性地是</a:t>
+            </a:r>
+          </a:p>
+          <a:p>
+            <a:r>
+              <a:t>較好的配對。</a:t>
             </a:r>
           </a:p>
           <a:p>
@@ -4504,7 +4504,7 @@
           </a:p>
           <a:p>
             <a:r>
-              <a:t>一句話：這個策略實質上在賣出波動率的均值回歸選擇權。</a:t>
+              <a:t>今天報告的每一個數字都產自修正後的管線。</a:t>
             </a:r>
           </a:p>
         </p:txBody>
@@ -4574,7 +4574,7 @@
           <a:lstStyle/>
           <a:p>
             <a:r>
-              <a:t>如果委員問「你有沒有試過其他改良」或「為什麼不延長交易期」，用這張。</a:t>
+              <a:t>如果委員問「什麼時候賺錢」或「能不能只在高波動期交易」，用這張。</a:t>
             </a:r>
           </a:p>
           <a:p>
@@ -4582,7 +4582,12 @@
           </a:p>
           <a:p>
             <a:r>
-              <a:t>我對交易端測了三項常見改良，三項全部否證。</a:t>
+              <a:t>12 個臂全部呈現同一個型態：動盪期為正，平靜期跟一般期為負。而且這個型態不是</a:t>
+            </a:r>
+          </a:p>
+          <a:p>
+            <a:r>
+              <a:t>前視偏誤造成的，我用 walk-forward 門檻重做過，一致率 82.6%。</a:t>
             </a:r>
           </a:p>
           <a:p>
@@ -4590,7 +4595,17 @@
           </a:p>
           <a:p>
             <a:r>
-              <a:t>波動 regime 條件式進場——剛才 B5 講過了。</a:t>
+              <a:t>但這不構成可靠的改良，因為動盪期報酬極度集中——2008 到 2009 兩年貢獻了全部</a:t>
+            </a:r>
+          </a:p>
+          <a:p>
+            <a:r>
+              <a:t>動盪期報酬的 54% 到 87%。以 GICS-SSD 最極端，扣掉那兩年之後，其餘 17 個年度</a:t>
+            </a:r>
+          </a:p>
+          <a:p>
+            <a:r>
+              <a:t>合計只有 2.8%。</a:t>
             </a:r>
           </a:p>
           <a:p>
@@ -4598,17 +4613,17 @@
           </a:p>
           <a:p>
             <a:r>
-              <a:t>時間停損：4 臂乘 5 個門檻共 20 格，全部劣於現行，而且隨門檻放寬單調收斂回現行</a:t>
-            </a:r>
-          </a:p>
-          <a:p>
-            <a:r>
-              <a:t>值。機制是價差的回歸集中在持倉後期，平均持有 49 到 53 天，42 天就砍會系統性地</a:t>
-            </a:r>
-          </a:p>
-          <a:p>
-            <a:r>
-              <a:t>在最不利的時點認賠。</a:t>
+              <a:t>機制可以講清楚：波動高不等於配對機會多。2008 到 2009 是流動性危機跟強制去槓桿，</a:t>
+            </a:r>
+          </a:p>
+          <a:p>
+            <a:r>
+              <a:t>會製造價差極端偏離並隨後回歸。但 2022 年動盪日數最多，卻只產生負 0.18% 到</a:t>
+            </a:r>
+          </a:p>
+          <a:p>
+            <a:r>
+              <a:t>正 1.45%，因為那波動源於升息跟通膨預期的趨勢性方向移動，價差偏離後不必然回歸。</a:t>
             </a:r>
           </a:p>
           <a:p>
@@ -4616,12 +4631,12 @@
           </a:p>
           <a:p>
             <a:r>
-              <a:t>延長交易期：期末仍持倉的部位，再追蹤一個完整交易期，只有 45.4% 回歸。沒回歸</a:t>
-            </a:r>
-          </a:p>
-          <a:p>
-            <a:r>
-              <a:t>的 54.6%，它們的 z 分數從 4.57 繼續擴大到 6.82。這些不是尚未回歸，是持續發散。</a:t>
+              <a:t>以已實現波動定義的 regime 無法區分這兩種來源。要做 regime 條件化，需要的是能</a:t>
+            </a:r>
+          </a:p>
+          <a:p>
+            <a:r>
+              <a:t>區分波動來源的指標，不是波動水準本身。</a:t>
             </a:r>
           </a:p>
           <a:p>
@@ -4629,30 +4644,7 @@
           </a:p>
           <a:p>
             <a:r>
-              <a:t>三項都是針對「期末強制平倉佔進場 40.3%」設計的。結論是這個現象沒辦法靠調整</a:t>
-            </a:r>
-          </a:p>
-          <a:p>
-            <a:r>
-              <a:t>持有期或進場時機消除，因為沒回歸的配對多數是真發散。要降低它，需要的是形成期</a:t>
-            </a:r>
-          </a:p>
-          <a:p>
-            <a:r>
-              <a:t>能預測樣本外收斂的篩選訊號，而我的單道共整合檢定提供不了。</a:t>
-            </a:r>
-          </a:p>
-          <a:p>
-            <a:endParaRPr/>
-          </a:p>
-          <a:p>
-            <a:r>
-              <a:t>最後一行是分工說明：4.1 變動的是每期可做幾次決策，這裡變動的是那條固定規則</a:t>
-            </a:r>
-          </a:p>
-          <a:p>
-            <a:r>
-              <a:t>本身的形狀，決策次數始終是零。</a:t>
+              <a:t>一句話：這個策略實質上在賣出波動率的均值回歸選擇權。</a:t>
             </a:r>
           </a:p>
         </p:txBody>
@@ -4722,7 +4714,7 @@
           <a:lstStyle/>
           <a:p>
             <a:r>
-              <a:t>如果委員問預先登記的細節，或問「你怎麼確認那三天的回測真的跑成功了」，用這張。</a:t>
+              <a:t>如果委員問「你有沒有試過其他改良」或「為什麼不延長交易期」，用這張。</a:t>
             </a:r>
           </a:p>
           <a:p>
@@ -4730,12 +4722,7 @@
           </a:p>
           <a:p>
             <a:r>
-              <a:t>我在回測啟動前就寫定了七項核對程序。因為 run_trading 回報「成功」不足以證明</a:t>
-            </a:r>
-          </a:p>
-          <a:p>
-            <a:r>
-              <a:t>真的跑成功——我在開發過程中曾兩度遇到回報成功但實際零有效模擬的情況。</a:t>
+              <a:t>我對交易端測了三項常見改良，三項全部否證。</a:t>
             </a:r>
           </a:p>
           <a:p>
@@ -4743,12 +4730,7 @@
           </a:p>
           <a:p>
             <a:r>
-              <a:t>七項全部通過。其中第四項我要特別說明：我核對 v1、v2 的逐期耗時中位數要大於</a:t>
-            </a:r>
-          </a:p>
-          <a:p>
-            <a:r>
-              <a:t>60 分鐘，這是用來確認模型確實在訓練，而不是空轉。實測是 69.7 跟 71.0 分鐘。</a:t>
+              <a:t>波動 regime 條件式進場——剛才 B5 講過了。</a:t>
             </a:r>
           </a:p>
           <a:p>
@@ -4756,17 +4738,17 @@
           </a:p>
           <a:p>
             <a:r>
-              <a:t>但下面這件事我必須主動揭露：分析程式第一次執行時，第 2 項跟第 7 項沒有通過。</a:t>
-            </a:r>
-          </a:p>
-          <a:p>
-            <a:r>
-              <a:t>原因不在回測，而在核對程式本身把「左緣」實作成單一期，而不是整個 12 期的區塊。</a:t>
-            </a:r>
-          </a:p>
-          <a:p>
-            <a:r>
-              <a:t>更正之後由失敗轉為通過。</a:t>
+              <a:t>時間停損：4 臂乘 5 個門檻共 20 格，全部劣於現行，而且隨門檻放寬單調收斂回現行</a:t>
+            </a:r>
+          </a:p>
+          <a:p>
+            <a:r>
+              <a:t>值。機制是價差的回歸集中在持倉後期，平均持有 49 到 53 天，42 天就砍會系統性地</a:t>
+            </a:r>
+          </a:p>
+          <a:p>
+            <a:r>
+              <a:t>在最不利的時點認賠。</a:t>
             </a:r>
           </a:p>
           <a:p>
@@ -4774,17 +4756,12 @@
           </a:p>
           <a:p>
             <a:r>
-              <a:t>這正是預先登記最容易被濫用的情境——看到失敗才改程式。我的處置是把更正的依據、</a:t>
-            </a:r>
-          </a:p>
-          <a:p>
-            <a:r>
-              <a:t>它只用日期不涉結果這個性質、以及「它確實是在看到失敗之後才改的」，全部寫進</a:t>
-            </a:r>
-          </a:p>
-          <a:p>
-            <a:r>
-              <a:t>偏離紀錄。</a:t>
+              <a:t>延長交易期：期末仍持倉的部位，再追蹤一個完整交易期，只有 45.4% 回歸。沒回歸</a:t>
+            </a:r>
+          </a:p>
+          <a:p>
+            <a:r>
+              <a:t>的 54.6%，它們的 z 分數從 4.57 繼續擴大到 6.82。這些不是尚未回歸，是持續發散。</a:t>
             </a:r>
           </a:p>
           <a:p>
@@ -4792,7 +4769,30 @@
           </a:p>
           <a:p>
             <a:r>
-              <a:t>預先登記的價值不在於不出錯，而在於出錯的時候留下痕跡。</a:t>
+              <a:t>三項都是針對「期末強制平倉佔進場 40.3%」設計的。結論是這個現象沒辦法靠調整</a:t>
+            </a:r>
+          </a:p>
+          <a:p>
+            <a:r>
+              <a:t>持有期或進場時機消除，因為沒回歸的配對多數是真發散。要降低它，需要的是形成期</a:t>
+            </a:r>
+          </a:p>
+          <a:p>
+            <a:r>
+              <a:t>能預測樣本外收斂的篩選訊號，而我的單道共整合檢定提供不了。</a:t>
+            </a:r>
+          </a:p>
+          <a:p>
+            <a:endParaRPr/>
+          </a:p>
+          <a:p>
+            <a:r>
+              <a:t>最後一行是分工說明：4.1 變動的是每期可做幾次決策，這裡變動的是那條固定規則</a:t>
+            </a:r>
+          </a:p>
+          <a:p>
+            <a:r>
+              <a:t>本身的形狀，決策次數始終是零。</a:t>
             </a:r>
           </a:p>
         </p:txBody>
@@ -5083,7 +5083,7 @@
           <a:lstStyle/>
           <a:p>
             <a:r>
-              <a:t>帶著這三個問題回到文獻。我把動作空間分成三類，差別只在每期可以做幾次決策。</a:t>
+              <a:t>三個研究問題。</a:t>
             </a:r>
           </a:p>
           <a:p>
@@ -5091,12 +5091,12 @@
           </a:p>
           <a:p>
             <a:r>
-              <a:t>第一類是固定門檻，決策次數是零——它根本不決策，就是 GGR 那組二倍標準差進場、</a:t>
-            </a:r>
-          </a:p>
-          <a:p>
-            <a:r>
-              <a:t>回歸零出場的常數。</a:t>
+              <a:t>Q1 是核心：動作空間是不是關鍵約束。在其餘一切都相同的條件下，把每期決策次數</a:t>
+            </a:r>
+          </a:p>
+          <a:p>
+            <a:r>
+              <a:t>從零、一放大到一百二十六，會不會系統性造成過度交易跟績效劣化。</a:t>
             </a:r>
           </a:p>
           <a:p>
@@ -5104,12 +5104,12 @@
           </a:p>
           <a:p>
             <a:r>
-              <a:t>第二類是我提出的：每期選一組門檻，決策次數是一。選單有九個選項，包含 SKIP</a:t>
-            </a:r>
-          </a:p>
-          <a:p>
-            <a:r>
-              <a:t>也就是拒絕交易，加上八組進出場邊界的組合。</a:t>
+              <a:t>Q2 是接續的問題：如果 Q1 的答案是「該把動作空間縮小」，那縮小之後還剩下什麼</a:t>
+            </a:r>
+          </a:p>
+          <a:p>
+            <a:r>
+              <a:t>能力？模型能不能逐對辨識出該用哪個門檻？</a:t>
             </a:r>
           </a:p>
           <a:p>
@@ -5117,12 +5117,17 @@
           </a:p>
           <a:p>
             <a:r>
-              <a:t>第三類是多數 DRL 文獻在做的：逐日自由決定持倉。交易期是 126 個交易日，所以</a:t>
-            </a:r>
-          </a:p>
-          <a:p>
-            <a:r>
-              <a:t>一期最多 126 次決策。</a:t>
+              <a:t>Q3 是驗收：門檻選擇式相對固定門檻到底有沒有效，以及——這點很重要——它的界線</a:t>
+            </a:r>
+          </a:p>
+          <a:p>
+            <a:r>
+              <a:t>在哪裡。我刻意不把 Q3 問成「能不能獲得統計顯著的超額報酬」，因為我的答案在</a:t>
+            </a:r>
+          </a:p>
+          <a:p>
+            <a:r>
+              <a:t>相對層面是「是」、在絕對層面是「否」，兩者不能混為一談。</a:t>
             </a:r>
           </a:p>
           <a:p>
@@ -5130,17 +5135,7 @@
           </a:p>
           <a:p>
             <a:r>
-              <a:t>關鍵在最後一句：這三者的表達能力是遞增的。逐日決策可以模擬任何固定門檻規則</a:t>
-            </a:r>
-          </a:p>
-          <a:p>
-            <a:r>
-              <a:t>——我只要讓模型每天照門檻規則行動就好。所以如果只看表達能力，第三類應該</a:t>
-            </a:r>
-          </a:p>
-          <a:p>
-            <a:r>
-              <a:t>弱優於前兩類。這是很直覺的推理。</a:t>
+              <a:t>先講結論：這三個問題得到三個不一致的答案，而這個不一致本身就是我的發現。</a:t>
             </a:r>
           </a:p>
         </p:txBody>
@@ -5210,7 +5205,7 @@
           <a:lstStyle/>
           <a:p>
             <a:r>
-              <a:t>但這裡有一個張力。</a:t>
+              <a:t>帶著這三個問題回到文獻。我把動作空間分成三類，差別只在每期可以做幾次決策。</a:t>
             </a:r>
           </a:p>
           <a:p>
@@ -5218,12 +5213,12 @@
           </a:p>
           <a:p>
             <a:r>
-              <a:t>左邊是支持「越大越好」的理由：表達能力涵蓋。模型大不了就學出一條固定規則，</a:t>
-            </a:r>
-          </a:p>
-          <a:p>
-            <a:r>
-              <a:t>理論上它至少不會比較差。</a:t>
+              <a:t>第一類是固定門檻，決策次數是零——它根本不決策，就是 GGR 那組二倍標準差進場、</a:t>
+            </a:r>
+          </a:p>
+          <a:p>
+            <a:r>
+              <a:t>回歸零出場的常數。</a:t>
             </a:r>
           </a:p>
           <a:p>
@@ -5231,12 +5226,12 @@
           </a:p>
           <a:p>
             <a:r>
-              <a:t>右邊是支持「越大越糟」的理由：決策次數越多，每次決策所依據的訊號就越短、</a:t>
-            </a:r>
-          </a:p>
-          <a:p>
-            <a:r>
-              <a:t>噪音佔比越高。而且更實際的問題是——每一次決策都可能產生一次換手成本。</a:t>
+              <a:t>第二類是我提出的：每期選一組門檻，決策次數是一。選單有九個選項，包含 SKIP</a:t>
+            </a:r>
+          </a:p>
+          <a:p>
+            <a:r>
+              <a:t>也就是拒絕交易，加上八組進出場邊界的組合。</a:t>
             </a:r>
           </a:p>
           <a:p>
@@ -5244,12 +5239,12 @@
           </a:p>
           <a:p>
             <a:r>
-              <a:t>這個取捨在日頻上到底朝哪邊傾斜？這不是一個需要理論爭辯的問題，它可以用實驗</a:t>
-            </a:r>
-          </a:p>
-          <a:p>
-            <a:r>
-              <a:t>直接回答。而文獻沒有做這個實驗，因為沒有人把動作空間當成變因。</a:t>
+              <a:t>第三類是多數 DRL 文獻在做的：逐日自由決定持倉。交易期是 126 個交易日，所以</a:t>
+            </a:r>
+          </a:p>
+          <a:p>
+            <a:r>
+              <a:t>一期最多 126 次決策。</a:t>
             </a:r>
           </a:p>
           <a:p>
@@ -5257,7 +5252,17 @@
           </a:p>
           <a:p>
             <a:r>
-              <a:t>我的研究就是去做這個實驗。</a:t>
+              <a:t>關鍵在最後一句：這三者的表達能力是遞增的。逐日決策可以模擬任何固定門檻規則</a:t>
+            </a:r>
+          </a:p>
+          <a:p>
+            <a:r>
+              <a:t>——我只要讓模型每天照門檻規則行動就好。所以如果只看表達能力，第三類應該</a:t>
+            </a:r>
+          </a:p>
+          <a:p>
+            <a:r>
+              <a:t>弱優於前兩類。這是很直覺的推理。</a:t>
             </a:r>
           </a:p>
         </p:txBody>
@@ -5327,7 +5332,7 @@
           <a:lstStyle/>
           <a:p>
             <a:r>
-              <a:t>三個研究問題。</a:t>
+              <a:t>但這裡有一個張力。</a:t>
             </a:r>
           </a:p>
           <a:p>
@@ -5335,12 +5340,12 @@
           </a:p>
           <a:p>
             <a:r>
-              <a:t>Q1 是核心：動作空間是不是關鍵約束。在其餘一切都相同的條件下，把每期決策次數</a:t>
-            </a:r>
-          </a:p>
-          <a:p>
-            <a:r>
-              <a:t>從零、一放大到一百二十六，會不會系統性造成過度交易跟績效劣化。</a:t>
+              <a:t>左邊是支持「越大越好」的理由：表達能力涵蓋。模型大不了就學出一條固定規則，</a:t>
+            </a:r>
+          </a:p>
+          <a:p>
+            <a:r>
+              <a:t>理論上它至少不會比較差。</a:t>
             </a:r>
           </a:p>
           <a:p>
@@ -5348,12 +5353,12 @@
           </a:p>
           <a:p>
             <a:r>
-              <a:t>Q2 是接續的問題：如果 Q1 的答案是「該把動作空間縮小」，那縮小之後還剩下什麼</a:t>
-            </a:r>
-          </a:p>
-          <a:p>
-            <a:r>
-              <a:t>能力？模型能不能逐對辨識出該用哪個門檻？</a:t>
+              <a:t>右邊是支持「越大越糟」的理由：決策次數越多，每次決策所依據的訊號就越短、</a:t>
+            </a:r>
+          </a:p>
+          <a:p>
+            <a:r>
+              <a:t>噪音佔比越高。而且更實際的問題是——每一次決策都可能產生一次換手成本。</a:t>
             </a:r>
           </a:p>
           <a:p>
@@ -5361,17 +5366,12 @@
           </a:p>
           <a:p>
             <a:r>
-              <a:t>Q3 是驗收：門檻選擇式相對固定門檻到底有沒有效，以及——這點很重要——它的界線</a:t>
-            </a:r>
-          </a:p>
-          <a:p>
-            <a:r>
-              <a:t>在哪裡。我刻意不把 Q3 問成「能不能獲得統計顯著的超額報酬」，因為我的答案在</a:t>
-            </a:r>
-          </a:p>
-          <a:p>
-            <a:r>
-              <a:t>相對層面是「是」、在絕對層面是「否」，兩者不能混為一談。</a:t>
+              <a:t>這個取捨在日頻上到底朝哪邊傾斜？這不是一個需要理論爭辯的問題，它可以用實驗</a:t>
+            </a:r>
+          </a:p>
+          <a:p>
+            <a:r>
+              <a:t>直接回答。而文獻沒有做這個實驗，因為沒有人把動作空間當成變因。</a:t>
             </a:r>
           </a:p>
           <a:p>
@@ -5379,7 +5379,7 @@
           </a:p>
           <a:p>
             <a:r>
-              <a:t>先講結論：這三個問題得到三個不一致的答案，而這個不一致本身就是我的發現。</a:t>
+              <a:t>我的研究就是去做這個實驗。</a:t>
             </a:r>
           </a:p>
         </p:txBody>
@@ -19052,7 +19052,7 @@
                           </a:solidFill>
                           <a:latin typeface="Microsoft JhengHei"/>
                         </a:rPr>
-                        <a:t>最佳配置帳面年化 1.026%；rf 超額僅 +0.375 pp、Sharpe 0.276；「日均報酬是否為零」檢定 </a:t>
+                        <a:t>等權口徑最佳策略帳面年化 1.026%；rf 超額僅 +0.375 pp、Sharpe 0.276；「日均報酬是否為零」檢定 </a:t>
                       </a:r>
                       <a:r>
                         <a:rPr sz="1300" b="1">
@@ -22102,8 +22102,8 @@
         </p:nvSpPr>
         <p:spPr>
           <a:xfrm>
-            <a:off x="640080" y="4297680"/>
-            <a:ext cx="10881360" cy="1554480"/>
+            <a:off x="640080" y="4297679"/>
+            <a:ext cx="10881360" cy="1754777"/>
           </a:xfrm>
           <a:prstGeom prst="roundRect">
             <a:avLst>
@@ -22145,7 +22145,7 @@
               </a:spcAft>
             </a:pPr>
             <a:r>
-              <a:rPr sz="1600" b="1">
+              <a:rPr sz="1600" b="1" dirty="0" err="1">
                 <a:solidFill>
                   <a:srgbClr val="FFFFFF"/>
                 </a:solidFill>
@@ -22153,6 +22153,12 @@
               </a:rPr>
               <a:t>一項必須揭露的事後更正</a:t>
             </a:r>
+            <a:endParaRPr sz="1600" b="1" dirty="0">
+              <a:solidFill>
+                <a:srgbClr val="FFFFFF"/>
+              </a:solidFill>
+              <a:latin typeface="Microsoft JhengHei"/>
+            </a:endParaRPr>
           </a:p>
           <a:p>
             <a:pPr algn="l">
@@ -22164,7 +22170,7 @@
               </a:spcAft>
             </a:pPr>
             <a:r>
-              <a:rPr sz="1350" b="0">
+              <a:rPr sz="1350" b="0" dirty="0" err="1">
                 <a:solidFill>
                   <a:srgbClr val="E8EDF5"/>
                 </a:solidFill>
@@ -22173,22 +22179,67 @@
               <a:t>分析程式</a:t>
             </a:r>
             <a:r>
-              <a:rPr sz="1350" b="1">
+              <a:rPr sz="1350" b="1" dirty="0" err="1">
                 <a:solidFill>
                   <a:srgbClr val="E8EDF5"/>
                 </a:solidFill>
                 <a:latin typeface="Microsoft JhengHei"/>
               </a:rPr>
-              <a:t>首次執行時第 2、7 項未通過</a:t>
-            </a:r>
-            <a:r>
-              <a:rPr sz="1350" b="0">
+              <a:t>首次執行時第</a:t>
+            </a:r>
+            <a:r>
+              <a:rPr sz="1350" b="1" dirty="0">
                 <a:solidFill>
                   <a:srgbClr val="E8EDF5"/>
                 </a:solidFill>
                 <a:latin typeface="Microsoft JhengHei"/>
               </a:rPr>
-              <a:t>。原因不在回測，而在核對程式把「左緣」實作為單一期而非整個 12 期區塊。更正後由失敗轉為通過。</a:t>
+              <a:t> 2、7 </a:t>
+            </a:r>
+            <a:r>
+              <a:rPr sz="1350" b="1" dirty="0" err="1">
+                <a:solidFill>
+                  <a:srgbClr val="E8EDF5"/>
+                </a:solidFill>
+                <a:latin typeface="Microsoft JhengHei"/>
+              </a:rPr>
+              <a:t>項未通過</a:t>
+            </a:r>
+            <a:r>
+              <a:rPr sz="1350" b="0" dirty="0" err="1">
+                <a:solidFill>
+                  <a:srgbClr val="E8EDF5"/>
+                </a:solidFill>
+                <a:latin typeface="Microsoft JhengHei"/>
+              </a:rPr>
+              <a:t>。原因不在回測，而在核對程式把「左緣」實作為單一期而非整個</a:t>
+            </a:r>
+            <a:r>
+              <a:rPr sz="1350" b="0" dirty="0">
+                <a:solidFill>
+                  <a:srgbClr val="E8EDF5"/>
+                </a:solidFill>
+                <a:latin typeface="Microsoft JhengHei"/>
+              </a:rPr>
+              <a:t> 12 </a:t>
+            </a:r>
+            <a:r>
+              <a:rPr sz="1350" b="0" dirty="0" err="1">
+                <a:solidFill>
+                  <a:srgbClr val="E8EDF5"/>
+                </a:solidFill>
+                <a:latin typeface="Microsoft JhengHei"/>
+              </a:rPr>
+              <a:t>期區塊。更正後由失敗轉為通過</a:t>
+            </a:r>
+            <a:r>
+              <a:rPr sz="1350" b="0" dirty="0">
+                <a:solidFill>
+                  <a:srgbClr val="E8EDF5"/>
+                </a:solidFill>
+                <a:latin typeface="Microsoft JhengHei"/>
+              </a:rPr>
+              <a:t>。</a:t>
             </a:r>
           </a:p>
           <a:p>
@@ -22201,40 +22252,76 @@
               </a:spcAft>
             </a:pPr>
             <a:r>
-              <a:rPr sz="1350" b="0">
+              <a:rPr sz="1350" b="0" dirty="0" err="1">
                 <a:solidFill>
                   <a:srgbClr val="E8EDF5"/>
                 </a:solidFill>
                 <a:latin typeface="Microsoft JhengHei"/>
               </a:rPr>
-              <a:t>依據全部來自早於資料的原文、只用價格日曆與形成期日期、不涉任何結果；假說與估計式皆未更動——</a:t>
-            </a:r>
-            <a:r>
-              <a:rPr sz="1350" b="1">
+              <a:t>依據全部來自早於資料的原文、只用價格日曆與形成期日期、不涉任何結果；假說與估計式皆未更動</a:t>
+            </a:r>
+            <a:r>
+              <a:rPr sz="1350" b="0" dirty="0">
                 <a:solidFill>
                   <a:srgbClr val="E8EDF5"/>
                 </a:solidFill>
                 <a:latin typeface="Microsoft JhengHei"/>
               </a:rPr>
+              <a:t>——</a:t>
+            </a:r>
+            <a:r>
+              <a:rPr sz="1350" b="1" dirty="0" err="1">
+                <a:solidFill>
+                  <a:srgbClr val="E8EDF5"/>
+                </a:solidFill>
+                <a:latin typeface="Microsoft JhengHei"/>
+              </a:rPr>
               <a:t>但它確實是在看到失敗之後才改的</a:t>
             </a:r>
             <a:r>
-              <a:rPr sz="1350" b="0">
+              <a:rPr sz="1350" b="0" dirty="0" err="1">
                 <a:solidFill>
                   <a:srgbClr val="E8EDF5"/>
                 </a:solidFill>
                 <a:latin typeface="Microsoft JhengHei"/>
               </a:rPr>
-              <a:t>，故逐條記於附錄 D。</a:t>
-            </a:r>
-            <a:r>
-              <a:rPr sz="1350" b="1">
+              <a:t>，故逐條記於附錄</a:t>
+            </a:r>
+            <a:r>
+              <a:rPr sz="1350" b="0" dirty="0">
                 <a:solidFill>
                   <a:srgbClr val="E8EDF5"/>
                 </a:solidFill>
                 <a:latin typeface="Microsoft JhengHei"/>
               </a:rPr>
-              <a:t>預先登記的價值不在於不出錯，而在於出錯時留下痕跡。</a:t>
+              <a:t> </a:t>
+            </a:r>
+            <a:r>
+              <a:rPr sz="1350" b="0" dirty="0" err="1">
+                <a:solidFill>
+                  <a:srgbClr val="E8EDF5"/>
+                </a:solidFill>
+                <a:latin typeface="Microsoft JhengHei"/>
+              </a:rPr>
+              <a:t>D。</a:t>
+            </a:r>
+            <a:r>
+              <a:rPr sz="1350" b="1" dirty="0" err="1">
+                <a:solidFill>
+                  <a:srgbClr val="E8EDF5"/>
+                </a:solidFill>
+                <a:latin typeface="Microsoft JhengHei"/>
+              </a:rPr>
+              <a:t>預先登記的價值不在於不出錯，而在於出錯時留下痕跡</a:t>
+            </a:r>
+            <a:r>
+              <a:rPr sz="1350" b="1" dirty="0">
+                <a:solidFill>
+                  <a:srgbClr val="E8EDF5"/>
+                </a:solidFill>
+                <a:latin typeface="Microsoft JhengHei"/>
+              </a:rPr>
+              <a:t>。</a:t>
             </a:r>
           </a:p>
         </p:txBody>
@@ -22839,1685 +22926,6 @@
 </file>
 
 <file path=ppt/slides/slide29.xml><?xml version="1.0" encoding="utf-8"?>
-<p:sld xmlns:a="http://schemas.openxmlformats.org/drawingml/2006/main" xmlns:r="http://schemas.openxmlformats.org/officeDocument/2006/relationships" xmlns:p="http://schemas.openxmlformats.org/presentationml/2006/main">
-  <p:cSld>
-    <p:spTree>
-      <p:nvGrpSpPr>
-        <p:cNvPr id="1" name=""/>
-        <p:cNvGrpSpPr/>
-        <p:nvPr/>
-      </p:nvGrpSpPr>
-      <p:grpSpPr>
-        <a:xfrm>
-          <a:off x="0" y="0"/>
-          <a:ext cx="0" cy="0"/>
-          <a:chOff x="0" y="0"/>
-          <a:chExt cx="0" cy="0"/>
-        </a:xfrm>
-      </p:grpSpPr>
-      <p:sp>
-        <p:nvSpPr>
-          <p:cNvPr id="2" name="TextBox 1"/>
-          <p:cNvSpPr txBox="1"/>
-          <p:nvPr/>
-        </p:nvSpPr>
-        <p:spPr>
-          <a:xfrm>
-            <a:off x="640080" y="384048"/>
-            <a:ext cx="10881360" cy="274320"/>
-          </a:xfrm>
-          <a:prstGeom prst="rect">
-            <a:avLst/>
-          </a:prstGeom>
-          <a:noFill/>
-        </p:spPr>
-        <p:txBody>
-          <a:bodyPr wrap="square" lIns="0" tIns="0" rIns="0" bIns="0">
-            <a:spAutoFit/>
-          </a:bodyPr>
-          <a:lstStyle/>
-          <a:p>
-            <a:pPr algn="l">
-              <a:lnSpc>
-                <a:spcPct val="125000"/>
-              </a:lnSpc>
-              <a:spcAft>
-                <a:spcPts val="200"/>
-              </a:spcAft>
-            </a:pPr>
-            <a:r>
-              <a:rPr sz="1200" b="1">
-                <a:solidFill>
-                  <a:srgbClr val="6B7280"/>
-                </a:solidFill>
-                <a:latin typeface="Microsoft JhengHei"/>
-              </a:rPr>
-              <a:t>備用　｜　附錄 C.1 Regime 分層（walk-forward）、§4.6.2</a:t>
-            </a:r>
-          </a:p>
-        </p:txBody>
-      </p:sp>
-      <p:sp>
-        <p:nvSpPr>
-          <p:cNvPr id="3" name="TextBox 2"/>
-          <p:cNvSpPr txBox="1"/>
-          <p:nvPr/>
-        </p:nvSpPr>
-        <p:spPr>
-          <a:xfrm>
-            <a:off x="640080" y="658368"/>
-            <a:ext cx="10881360" cy="822960"/>
-          </a:xfrm>
-          <a:prstGeom prst="rect">
-            <a:avLst/>
-          </a:prstGeom>
-          <a:noFill/>
-        </p:spPr>
-        <p:txBody>
-          <a:bodyPr wrap="square" lIns="0" tIns="0" rIns="0" bIns="0">
-            <a:spAutoFit/>
-          </a:bodyPr>
-          <a:lstStyle/>
-          <a:p>
-            <a:pPr algn="l">
-              <a:lnSpc>
-                <a:spcPct val="125000"/>
-              </a:lnSpc>
-              <a:spcAft>
-                <a:spcPts val="0"/>
-              </a:spcAft>
-            </a:pPr>
-            <a:r>
-              <a:rPr sz="3000" b="1">
-                <a:solidFill>
-                  <a:srgbClr val="0B2A5B"/>
-                </a:solidFill>
-                <a:latin typeface="Microsoft JhengHei"/>
-              </a:rPr>
-              <a:t>B5　Regime 分層：獲利集中於何時</a:t>
-            </a:r>
-          </a:p>
-        </p:txBody>
-      </p:sp>
-      <p:sp>
-        <p:nvSpPr>
-          <p:cNvPr id="4" name="TextBox 3"/>
-          <p:cNvSpPr txBox="1"/>
-          <p:nvPr/>
-        </p:nvSpPr>
-        <p:spPr>
-          <a:xfrm>
-            <a:off x="11247120" y="6355080"/>
-            <a:ext cx="457200" cy="274320"/>
-          </a:xfrm>
-          <a:prstGeom prst="rect">
-            <a:avLst/>
-          </a:prstGeom>
-          <a:noFill/>
-        </p:spPr>
-        <p:txBody>
-          <a:bodyPr wrap="square" lIns="0" tIns="0" rIns="0" bIns="0">
-            <a:spAutoFit/>
-          </a:bodyPr>
-          <a:lstStyle/>
-          <a:p>
-            <a:pPr algn="r">
-              <a:lnSpc>
-                <a:spcPct val="125000"/>
-              </a:lnSpc>
-              <a:spcAft>
-                <a:spcPts val="600"/>
-              </a:spcAft>
-            </a:pPr>
-            <a:r>
-              <a:rPr sz="1000" b="0">
-                <a:solidFill>
-                  <a:srgbClr val="6B7280"/>
-                </a:solidFill>
-                <a:latin typeface="Microsoft JhengHei"/>
-              </a:rPr>
-              <a:t>31</a:t>
-            </a:r>
-          </a:p>
-        </p:txBody>
-      </p:sp>
-      <p:graphicFrame>
-        <p:nvGraphicFramePr>
-          <p:cNvPr id="5" name="Table 4"/>
-          <p:cNvGraphicFramePr>
-            <a:graphicFrameLocks noGrp="1"/>
-          </p:cNvGraphicFramePr>
-          <p:nvPr/>
-        </p:nvGraphicFramePr>
-        <p:xfrm>
-          <a:off x="640080" y="1737360"/>
-          <a:ext cx="6949440" cy="1554480"/>
-        </p:xfrm>
-        <a:graphic>
-          <a:graphicData uri="http://schemas.openxmlformats.org/drawingml/2006/table">
-            <a:tbl>
-              <a:tblPr firstRow="1" bandRow="1">
-                <a:tableStyleId>{5C22544A-7EE6-4342-B048-85BDC9FD1C3A}</a:tableStyleId>
-              </a:tblPr>
-              <a:tblGrid>
-                <a:gridCol w="2377440">
-                  <a:extLst>
-                    <a:ext uri="{9D8B030D-6E8A-4147-A177-3AD203B41FA5}">
-                      <a16:colId xmlns:a16="http://schemas.microsoft.com/office/drawing/2014/main" val="20000"/>
-                    </a:ext>
-                  </a:extLst>
-                </a:gridCol>
-                <a:gridCol w="1143000">
-                  <a:extLst>
-                    <a:ext uri="{9D8B030D-6E8A-4147-A177-3AD203B41FA5}">
-                      <a16:colId xmlns:a16="http://schemas.microsoft.com/office/drawing/2014/main" val="20001"/>
-                    </a:ext>
-                  </a:extLst>
-                </a:gridCol>
-                <a:gridCol w="1143000">
-                  <a:extLst>
-                    <a:ext uri="{9D8B030D-6E8A-4147-A177-3AD203B41FA5}">
-                      <a16:colId xmlns:a16="http://schemas.microsoft.com/office/drawing/2014/main" val="20002"/>
-                    </a:ext>
-                  </a:extLst>
-                </a:gridCol>
-                <a:gridCol w="1188720">
-                  <a:extLst>
-                    <a:ext uri="{9D8B030D-6E8A-4147-A177-3AD203B41FA5}">
-                      <a16:colId xmlns:a16="http://schemas.microsoft.com/office/drawing/2014/main" val="20003"/>
-                    </a:ext>
-                  </a:extLst>
-                </a:gridCol>
-                <a:gridCol w="1097280">
-                  <a:extLst>
-                    <a:ext uri="{9D8B030D-6E8A-4147-A177-3AD203B41FA5}">
-                      <a16:colId xmlns:a16="http://schemas.microsoft.com/office/drawing/2014/main" val="20004"/>
-                    </a:ext>
-                  </a:extLst>
-                </a:gridCol>
-              </a:tblGrid>
-              <a:tr h="310896">
-                <a:tc>
-                  <a:txBody>
-                    <a:bodyPr/>
-                    <a:lstStyle/>
-                    <a:p>
-                      <a:pPr algn="l"/>
-                      <a:r>
-                        <a:rPr sz="1250" b="1">
-                          <a:solidFill>
-                            <a:srgbClr val="FFFFFF"/>
-                          </a:solidFill>
-                          <a:latin typeface="Microsoft JhengHei"/>
-                        </a:rPr>
-                        <a:t>臂（walk-forward 門檻）</a:t>
-                      </a:r>
-                    </a:p>
-                  </a:txBody>
-                  <a:tcPr marT="27432" marB="27432">
-                    <a:solidFill>
-                      <a:srgbClr val="0B2A5B"/>
-                    </a:solidFill>
-                  </a:tcPr>
-                </a:tc>
-                <a:tc>
-                  <a:txBody>
-                    <a:bodyPr/>
-                    <a:lstStyle/>
-                    <a:p>
-                      <a:pPr algn="l"/>
-                      <a:r>
-                        <a:rPr sz="1250" b="1">
-                          <a:solidFill>
-                            <a:srgbClr val="FFFFFF"/>
-                          </a:solidFill>
-                          <a:latin typeface="Microsoft JhengHei"/>
-                        </a:rPr>
-                        <a:t>Calm</a:t>
-                      </a:r>
-                    </a:p>
-                  </a:txBody>
-                  <a:tcPr marT="27432" marB="27432">
-                    <a:solidFill>
-                      <a:srgbClr val="0B2A5B"/>
-                    </a:solidFill>
-                  </a:tcPr>
-                </a:tc>
-                <a:tc>
-                  <a:txBody>
-                    <a:bodyPr/>
-                    <a:lstStyle/>
-                    <a:p>
-                      <a:pPr algn="l"/>
-                      <a:r>
-                        <a:rPr sz="1250" b="1">
-                          <a:solidFill>
-                            <a:srgbClr val="FFFFFF"/>
-                          </a:solidFill>
-                          <a:latin typeface="Microsoft JhengHei"/>
-                        </a:rPr>
-                        <a:t>Normal</a:t>
-                      </a:r>
-                    </a:p>
-                  </a:txBody>
-                  <a:tcPr marT="27432" marB="27432">
-                    <a:solidFill>
-                      <a:srgbClr val="0B2A5B"/>
-                    </a:solidFill>
-                  </a:tcPr>
-                </a:tc>
-                <a:tc>
-                  <a:txBody>
-                    <a:bodyPr/>
-                    <a:lstStyle/>
-                    <a:p>
-                      <a:pPr algn="l"/>
-                      <a:r>
-                        <a:rPr sz="1250" b="1">
-                          <a:solidFill>
-                            <a:srgbClr val="FFFFFF"/>
-                          </a:solidFill>
-                          <a:latin typeface="Microsoft JhengHei"/>
-                        </a:rPr>
-                        <a:t>Turbulent</a:t>
-                      </a:r>
-                    </a:p>
-                  </a:txBody>
-                  <a:tcPr marT="27432" marB="27432">
-                    <a:solidFill>
-                      <a:srgbClr val="0B2A5B"/>
-                    </a:solidFill>
-                  </a:tcPr>
-                </a:tc>
-                <a:tc>
-                  <a:txBody>
-                    <a:bodyPr/>
-                    <a:lstStyle/>
-                    <a:p>
-                      <a:pPr algn="l"/>
-                      <a:r>
-                        <a:rPr sz="1250" b="1">
-                          <a:solidFill>
-                            <a:srgbClr val="FFFFFF"/>
-                          </a:solidFill>
-                          <a:latin typeface="Microsoft JhengHei"/>
-                        </a:rPr>
-                        <a:t>動盪期年化</a:t>
-                      </a:r>
-                    </a:p>
-                  </a:txBody>
-                  <a:tcPr marT="27432" marB="27432">
-                    <a:solidFill>
-                      <a:srgbClr val="0B2A5B"/>
-                    </a:solidFill>
-                  </a:tcPr>
-                </a:tc>
-                <a:extLst>
-                  <a:ext uri="{0D108BD9-81ED-4DB2-BD59-A6C34878D82A}">
-                    <a16:rowId xmlns:a16="http://schemas.microsoft.com/office/drawing/2014/main" val="10000"/>
-                  </a:ext>
-                </a:extLst>
-              </a:tr>
-              <a:tr h="310896">
-                <a:tc>
-                  <a:txBody>
-                    <a:bodyPr/>
-                    <a:lstStyle/>
-                    <a:p>
-                      <a:pPr algn="l"/>
-                      <a:r>
-                        <a:rPr sz="1250" b="0">
-                          <a:solidFill>
-                            <a:srgbClr val="1A1A1A"/>
-                          </a:solidFill>
-                          <a:latin typeface="Microsoft JhengHei"/>
-                        </a:rPr>
-                        <a:t>AGG-DTW</a:t>
-                      </a:r>
-                    </a:p>
-                  </a:txBody>
-                  <a:tcPr marT="27432" marB="27432">
-                    <a:solidFill>
-                      <a:srgbClr val="FFFFFF"/>
-                    </a:solidFill>
-                  </a:tcPr>
-                </a:tc>
-                <a:tc>
-                  <a:txBody>
-                    <a:bodyPr/>
-                    <a:lstStyle/>
-                    <a:p>
-                      <a:pPr algn="r"/>
-                      <a:r>
-                        <a:rPr sz="1250" b="0">
-                          <a:solidFill>
-                            <a:srgbClr val="1A1A1A"/>
-                          </a:solidFill>
-                          <a:latin typeface="Microsoft JhengHei"/>
-                        </a:rPr>
-                        <a:t>−0.386</a:t>
-                      </a:r>
-                    </a:p>
-                  </a:txBody>
-                  <a:tcPr marT="27432" marB="27432">
-                    <a:solidFill>
-                      <a:srgbClr val="FFFFFF"/>
-                    </a:solidFill>
-                  </a:tcPr>
-                </a:tc>
-                <a:tc>
-                  <a:txBody>
-                    <a:bodyPr/>
-                    <a:lstStyle/>
-                    <a:p>
-                      <a:pPr algn="r"/>
-                      <a:r>
-                        <a:rPr sz="1250" b="0">
-                          <a:solidFill>
-                            <a:srgbClr val="1A1A1A"/>
-                          </a:solidFill>
-                          <a:latin typeface="Microsoft JhengHei"/>
-                        </a:rPr>
-                        <a:t>−0.616</a:t>
-                      </a:r>
-                    </a:p>
-                  </a:txBody>
-                  <a:tcPr marT="27432" marB="27432">
-                    <a:solidFill>
-                      <a:srgbClr val="FFFFFF"/>
-                    </a:solidFill>
-                  </a:tcPr>
-                </a:tc>
-                <a:tc>
-                  <a:txBody>
-                    <a:bodyPr/>
-                    <a:lstStyle/>
-                    <a:p>
-                      <a:pPr algn="r"/>
-                      <a:r>
-                        <a:rPr sz="1250" b="1">
-                          <a:solidFill>
-                            <a:srgbClr val="1A1A1A"/>
-                          </a:solidFill>
-                          <a:latin typeface="Microsoft JhengHei"/>
-                        </a:rPr>
-                        <a:t>+0.893</a:t>
-                      </a:r>
-                    </a:p>
-                  </a:txBody>
-                  <a:tcPr marT="27432" marB="27432">
-                    <a:solidFill>
-                      <a:srgbClr val="FFFFFF"/>
-                    </a:solidFill>
-                  </a:tcPr>
-                </a:tc>
-                <a:tc>
-                  <a:txBody>
-                    <a:bodyPr/>
-                    <a:lstStyle/>
-                    <a:p>
-                      <a:pPr algn="r"/>
-                      <a:r>
-                        <a:rPr sz="1250" b="0">
-                          <a:solidFill>
-                            <a:srgbClr val="1A1A1A"/>
-                          </a:solidFill>
-                          <a:latin typeface="Microsoft JhengHei"/>
-                        </a:rPr>
-                        <a:t>+3.49%</a:t>
-                      </a:r>
-                    </a:p>
-                  </a:txBody>
-                  <a:tcPr marT="27432" marB="27432">
-                    <a:solidFill>
-                      <a:srgbClr val="FFFFFF"/>
-                    </a:solidFill>
-                  </a:tcPr>
-                </a:tc>
-                <a:extLst>
-                  <a:ext uri="{0D108BD9-81ED-4DB2-BD59-A6C34878D82A}">
-                    <a16:rowId xmlns:a16="http://schemas.microsoft.com/office/drawing/2014/main" val="10001"/>
-                  </a:ext>
-                </a:extLst>
-              </a:tr>
-              <a:tr h="310896">
-                <a:tc>
-                  <a:txBody>
-                    <a:bodyPr/>
-                    <a:lstStyle/>
-                    <a:p>
-                      <a:pPr algn="l"/>
-                      <a:r>
-                        <a:rPr sz="1250" b="0">
-                          <a:solidFill>
-                            <a:srgbClr val="1A1A1A"/>
-                          </a:solidFill>
-                          <a:latin typeface="Microsoft JhengHei"/>
-                        </a:rPr>
-                        <a:t>GICS-DTW</a:t>
-                      </a:r>
-                    </a:p>
-                  </a:txBody>
-                  <a:tcPr marT="27432" marB="27432">
-                    <a:solidFill>
-                      <a:srgbClr val="E8EDF5"/>
-                    </a:solidFill>
-                  </a:tcPr>
-                </a:tc>
-                <a:tc>
-                  <a:txBody>
-                    <a:bodyPr/>
-                    <a:lstStyle/>
-                    <a:p>
-                      <a:pPr algn="r"/>
-                      <a:r>
-                        <a:rPr sz="1250" b="0">
-                          <a:solidFill>
-                            <a:srgbClr val="1A1A1A"/>
-                          </a:solidFill>
-                          <a:latin typeface="Microsoft JhengHei"/>
-                        </a:rPr>
-                        <a:t>−0.282</a:t>
-                      </a:r>
-                    </a:p>
-                  </a:txBody>
-                  <a:tcPr marT="27432" marB="27432">
-                    <a:solidFill>
-                      <a:srgbClr val="E8EDF5"/>
-                    </a:solidFill>
-                  </a:tcPr>
-                </a:tc>
-                <a:tc>
-                  <a:txBody>
-                    <a:bodyPr/>
-                    <a:lstStyle/>
-                    <a:p>
-                      <a:pPr algn="r"/>
-                      <a:r>
-                        <a:rPr sz="1250" b="0">
-                          <a:solidFill>
-                            <a:srgbClr val="1A1A1A"/>
-                          </a:solidFill>
-                          <a:latin typeface="Microsoft JhengHei"/>
-                        </a:rPr>
-                        <a:t>−0.307</a:t>
-                      </a:r>
-                    </a:p>
-                  </a:txBody>
-                  <a:tcPr marT="27432" marB="27432">
-                    <a:solidFill>
-                      <a:srgbClr val="E8EDF5"/>
-                    </a:solidFill>
-                  </a:tcPr>
-                </a:tc>
-                <a:tc>
-                  <a:txBody>
-                    <a:bodyPr/>
-                    <a:lstStyle/>
-                    <a:p>
-                      <a:pPr algn="r"/>
-                      <a:r>
-                        <a:rPr sz="1250" b="1">
-                          <a:solidFill>
-                            <a:srgbClr val="1A1A1A"/>
-                          </a:solidFill>
-                          <a:latin typeface="Microsoft JhengHei"/>
-                        </a:rPr>
-                        <a:t>+0.754</a:t>
-                      </a:r>
-                    </a:p>
-                  </a:txBody>
-                  <a:tcPr marT="27432" marB="27432">
-                    <a:solidFill>
-                      <a:srgbClr val="E8EDF5"/>
-                    </a:solidFill>
-                  </a:tcPr>
-                </a:tc>
-                <a:tc>
-                  <a:txBody>
-                    <a:bodyPr/>
-                    <a:lstStyle/>
-                    <a:p>
-                      <a:pPr algn="r"/>
-                      <a:r>
-                        <a:rPr sz="1250" b="0">
-                          <a:solidFill>
-                            <a:srgbClr val="1A1A1A"/>
-                          </a:solidFill>
-                          <a:latin typeface="Microsoft JhengHei"/>
-                        </a:rPr>
-                        <a:t>+3.34%</a:t>
-                      </a:r>
-                    </a:p>
-                  </a:txBody>
-                  <a:tcPr marT="27432" marB="27432">
-                    <a:solidFill>
-                      <a:srgbClr val="E8EDF5"/>
-                    </a:solidFill>
-                  </a:tcPr>
-                </a:tc>
-                <a:extLst>
-                  <a:ext uri="{0D108BD9-81ED-4DB2-BD59-A6C34878D82A}">
-                    <a16:rowId xmlns:a16="http://schemas.microsoft.com/office/drawing/2014/main" val="10002"/>
-                  </a:ext>
-                </a:extLst>
-              </a:tr>
-              <a:tr h="310896">
-                <a:tc>
-                  <a:txBody>
-                    <a:bodyPr/>
-                    <a:lstStyle/>
-                    <a:p>
-                      <a:pPr algn="l"/>
-                      <a:r>
-                        <a:rPr sz="1250" b="0">
-                          <a:solidFill>
-                            <a:srgbClr val="1A1A1A"/>
-                          </a:solidFill>
-                          <a:latin typeface="Microsoft JhengHei"/>
-                        </a:rPr>
-                        <a:t>GICS-SSD</a:t>
-                      </a:r>
-                    </a:p>
-                  </a:txBody>
-                  <a:tcPr marT="27432" marB="27432">
-                    <a:solidFill>
-                      <a:srgbClr val="FFFFFF"/>
-                    </a:solidFill>
-                  </a:tcPr>
-                </a:tc>
-                <a:tc>
-                  <a:txBody>
-                    <a:bodyPr/>
-                    <a:lstStyle/>
-                    <a:p>
-                      <a:pPr algn="r"/>
-                      <a:r>
-                        <a:rPr sz="1250" b="0">
-                          <a:solidFill>
-                            <a:srgbClr val="1A1A1A"/>
-                          </a:solidFill>
-                          <a:latin typeface="Microsoft JhengHei"/>
-                        </a:rPr>
-                        <a:t>−0.463</a:t>
-                      </a:r>
-                    </a:p>
-                  </a:txBody>
-                  <a:tcPr marT="27432" marB="27432">
-                    <a:solidFill>
-                      <a:srgbClr val="FFFFFF"/>
-                    </a:solidFill>
-                  </a:tcPr>
-                </a:tc>
-                <a:tc>
-                  <a:txBody>
-                    <a:bodyPr/>
-                    <a:lstStyle/>
-                    <a:p>
-                      <a:pPr algn="r"/>
-                      <a:r>
-                        <a:rPr sz="1250" b="0">
-                          <a:solidFill>
-                            <a:srgbClr val="1A1A1A"/>
-                          </a:solidFill>
-                          <a:latin typeface="Microsoft JhengHei"/>
-                        </a:rPr>
-                        <a:t>−0.097</a:t>
-                      </a:r>
-                    </a:p>
-                  </a:txBody>
-                  <a:tcPr marT="27432" marB="27432">
-                    <a:solidFill>
-                      <a:srgbClr val="FFFFFF"/>
-                    </a:solidFill>
-                  </a:tcPr>
-                </a:tc>
-                <a:tc>
-                  <a:txBody>
-                    <a:bodyPr/>
-                    <a:lstStyle/>
-                    <a:p>
-                      <a:pPr algn="r"/>
-                      <a:r>
-                        <a:rPr sz="1250" b="1">
-                          <a:solidFill>
-                            <a:srgbClr val="1A1A1A"/>
-                          </a:solidFill>
-                          <a:latin typeface="Microsoft JhengHei"/>
-                        </a:rPr>
-                        <a:t>+0.737</a:t>
-                      </a:r>
-                    </a:p>
-                  </a:txBody>
-                  <a:tcPr marT="27432" marB="27432">
-                    <a:solidFill>
-                      <a:srgbClr val="FFFFFF"/>
-                    </a:solidFill>
-                  </a:tcPr>
-                </a:tc>
-                <a:tc>
-                  <a:txBody>
-                    <a:bodyPr/>
-                    <a:lstStyle/>
-                    <a:p>
-                      <a:pPr algn="r"/>
-                      <a:r>
-                        <a:rPr sz="1250" b="0">
-                          <a:solidFill>
-                            <a:srgbClr val="1A1A1A"/>
-                          </a:solidFill>
-                          <a:latin typeface="Microsoft JhengHei"/>
-                        </a:rPr>
-                        <a:t>+3.33%</a:t>
-                      </a:r>
-                    </a:p>
-                  </a:txBody>
-                  <a:tcPr marT="27432" marB="27432">
-                    <a:solidFill>
-                      <a:srgbClr val="FFFFFF"/>
-                    </a:solidFill>
-                  </a:tcPr>
-                </a:tc>
-                <a:extLst>
-                  <a:ext uri="{0D108BD9-81ED-4DB2-BD59-A6C34878D82A}">
-                    <a16:rowId xmlns:a16="http://schemas.microsoft.com/office/drawing/2014/main" val="10003"/>
-                  </a:ext>
-                </a:extLst>
-              </a:tr>
-              <a:tr h="310896">
-                <a:tc>
-                  <a:txBody>
-                    <a:bodyPr/>
-                    <a:lstStyle/>
-                    <a:p>
-                      <a:pPr algn="l"/>
-                      <a:r>
-                        <a:rPr sz="1250" b="0">
-                          <a:solidFill>
-                            <a:srgbClr val="1A1A1A"/>
-                          </a:solidFill>
-                          <a:latin typeface="Microsoft JhengHei"/>
-                        </a:rPr>
-                        <a:t>GICS-SDP</a:t>
-                      </a:r>
-                    </a:p>
-                  </a:txBody>
-                  <a:tcPr marT="27432" marB="27432">
-                    <a:solidFill>
-                      <a:srgbClr val="E8EDF5"/>
-                    </a:solidFill>
-                  </a:tcPr>
-                </a:tc>
-                <a:tc>
-                  <a:txBody>
-                    <a:bodyPr/>
-                    <a:lstStyle/>
-                    <a:p>
-                      <a:pPr algn="r"/>
-                      <a:r>
-                        <a:rPr sz="1250" b="0">
-                          <a:solidFill>
-                            <a:srgbClr val="1A1A1A"/>
-                          </a:solidFill>
-                          <a:latin typeface="Microsoft JhengHei"/>
-                        </a:rPr>
-                        <a:t>−0.324</a:t>
-                      </a:r>
-                    </a:p>
-                  </a:txBody>
-                  <a:tcPr marT="27432" marB="27432">
-                    <a:solidFill>
-                      <a:srgbClr val="E8EDF5"/>
-                    </a:solidFill>
-                  </a:tcPr>
-                </a:tc>
-                <a:tc>
-                  <a:txBody>
-                    <a:bodyPr/>
-                    <a:lstStyle/>
-                    <a:p>
-                      <a:pPr algn="r"/>
-                      <a:r>
-                        <a:rPr sz="1250" b="0">
-                          <a:solidFill>
-                            <a:srgbClr val="1A1A1A"/>
-                          </a:solidFill>
-                          <a:latin typeface="Microsoft JhengHei"/>
-                        </a:rPr>
-                        <a:t>−0.058</a:t>
-                      </a:r>
-                    </a:p>
-                  </a:txBody>
-                  <a:tcPr marT="27432" marB="27432">
-                    <a:solidFill>
-                      <a:srgbClr val="E8EDF5"/>
-                    </a:solidFill>
-                  </a:tcPr>
-                </a:tc>
-                <a:tc>
-                  <a:txBody>
-                    <a:bodyPr/>
-                    <a:lstStyle/>
-                    <a:p>
-                      <a:pPr algn="r"/>
-                      <a:r>
-                        <a:rPr sz="1250" b="0">
-                          <a:solidFill>
-                            <a:srgbClr val="1A1A1A"/>
-                          </a:solidFill>
-                          <a:latin typeface="Microsoft JhengHei"/>
-                        </a:rPr>
-                        <a:t>+0.702</a:t>
-                      </a:r>
-                    </a:p>
-                  </a:txBody>
-                  <a:tcPr marT="27432" marB="27432">
-                    <a:solidFill>
-                      <a:srgbClr val="E8EDF5"/>
-                    </a:solidFill>
-                  </a:tcPr>
-                </a:tc>
-                <a:tc>
-                  <a:txBody>
-                    <a:bodyPr/>
-                    <a:lstStyle/>
-                    <a:p>
-                      <a:pPr algn="r"/>
-                      <a:r>
-                        <a:rPr sz="1250" b="0">
-                          <a:solidFill>
-                            <a:srgbClr val="1A1A1A"/>
-                          </a:solidFill>
-                          <a:latin typeface="Microsoft JhengHei"/>
-                        </a:rPr>
-                        <a:t>+3.26%</a:t>
-                      </a:r>
-                    </a:p>
-                  </a:txBody>
-                  <a:tcPr marT="27432" marB="27432">
-                    <a:solidFill>
-                      <a:srgbClr val="E8EDF5"/>
-                    </a:solidFill>
-                  </a:tcPr>
-                </a:tc>
-                <a:extLst>
-                  <a:ext uri="{0D108BD9-81ED-4DB2-BD59-A6C34878D82A}">
-                    <a16:rowId xmlns:a16="http://schemas.microsoft.com/office/drawing/2014/main" val="10004"/>
-                  </a:ext>
-                </a:extLst>
-              </a:tr>
-            </a:tbl>
-          </a:graphicData>
-        </a:graphic>
-      </p:graphicFrame>
-      <p:sp>
-        <p:nvSpPr>
-          <p:cNvPr id="6" name="Rounded Rectangle 5"/>
-          <p:cNvSpPr/>
-          <p:nvPr/>
-        </p:nvSpPr>
-        <p:spPr>
-          <a:xfrm>
-            <a:off x="7863840" y="1737360"/>
-            <a:ext cx="3657600" cy="3840480"/>
-          </a:xfrm>
-          <a:prstGeom prst="roundRect">
-            <a:avLst>
-              <a:gd name="adj" fmla="val 6000"/>
-            </a:avLst>
-          </a:prstGeom>
-          <a:solidFill>
-            <a:srgbClr val="0B2A5B"/>
-          </a:solidFill>
-          <a:ln>
-            <a:noFill/>
-          </a:ln>
-          <a:effectLst/>
-        </p:spPr>
-        <p:style>
-          <a:lnRef idx="1">
-            <a:schemeClr val="accent1"/>
-          </a:lnRef>
-          <a:fillRef idx="3">
-            <a:schemeClr val="accent1"/>
-          </a:fillRef>
-          <a:effectRef idx="2">
-            <a:schemeClr val="accent1"/>
-          </a:effectRef>
-          <a:fontRef idx="minor">
-            <a:schemeClr val="lt1"/>
-          </a:fontRef>
-        </p:style>
-        <p:txBody>
-          <a:bodyPr wrap="square" lIns="201168" tIns="146304" rIns="201168" bIns="146304" rtlCol="0" anchor="t"/>
-          <a:lstStyle/>
-          <a:p>
-            <a:pPr algn="l">
-              <a:lnSpc>
-                <a:spcPct val="125000"/>
-              </a:lnSpc>
-              <a:spcAft>
-                <a:spcPts val="800"/>
-              </a:spcAft>
-            </a:pPr>
-            <a:r>
-              <a:rPr sz="1600" b="1">
-                <a:solidFill>
-                  <a:srgbClr val="FFFFFF"/>
-                </a:solidFill>
-                <a:latin typeface="Microsoft JhengHei"/>
-              </a:rPr>
-              <a:t>型態一致，但不可據以建立策略</a:t>
-            </a:r>
-          </a:p>
-          <a:p>
-            <a:pPr algn="l">
-              <a:lnSpc>
-                <a:spcPct val="125000"/>
-              </a:lnSpc>
-              <a:spcAft>
-                <a:spcPts val="800"/>
-              </a:spcAft>
-            </a:pPr>
-            <a:r>
-              <a:rPr sz="1300" b="0">
-                <a:solidFill>
-                  <a:srgbClr val="E8EDF5"/>
-                </a:solidFill>
-                <a:latin typeface="Microsoft JhengHei"/>
-              </a:rPr>
-              <a:t>12 個臂</a:t>
-            </a:r>
-            <a:r>
-              <a:rPr sz="1300" b="1">
-                <a:solidFill>
-                  <a:srgbClr val="E8EDF5"/>
-                </a:solidFill>
-                <a:latin typeface="Microsoft JhengHei"/>
-              </a:rPr>
-              <a:t>全部</a:t>
-            </a:r>
-            <a:r>
-              <a:rPr sz="1300" b="0">
-                <a:solidFill>
-                  <a:srgbClr val="E8EDF5"/>
-                </a:solidFill>
-                <a:latin typeface="Microsoft JhengHei"/>
-              </a:rPr>
-              <a:t>呈同一型態：動盪期為正，平靜與一般期為負。</a:t>
-            </a:r>
-          </a:p>
-          <a:p>
-            <a:pPr algn="l">
-              <a:lnSpc>
-                <a:spcPct val="125000"/>
-              </a:lnSpc>
-              <a:spcAft>
-                <a:spcPts val="800"/>
-              </a:spcAft>
-            </a:pPr>
-            <a:r>
-              <a:rPr sz="1300" b="0">
-                <a:solidFill>
-                  <a:srgbClr val="E8EDF5"/>
-                </a:solidFill>
-                <a:latin typeface="Microsoft JhengHei"/>
-              </a:rPr>
-              <a:t>但動盪期報酬</a:t>
-            </a:r>
-            <a:r>
-              <a:rPr sz="1300" b="1">
-                <a:solidFill>
-                  <a:srgbClr val="E8EDF5"/>
-                </a:solidFill>
-                <a:latin typeface="Microsoft JhengHei"/>
-              </a:rPr>
-              <a:t>極度集中</a:t>
-            </a:r>
-            <a:r>
-              <a:rPr sz="1300" b="0">
-                <a:solidFill>
-                  <a:srgbClr val="E8EDF5"/>
-                </a:solidFill>
-                <a:latin typeface="Microsoft JhengHei"/>
-              </a:rPr>
-              <a:t>：2008–2009 兩年貢獻全部動盪期報酬的 </a:t>
-            </a:r>
-            <a:r>
-              <a:rPr sz="1300" b="1">
-                <a:solidFill>
-                  <a:srgbClr val="E8EDF5"/>
-                </a:solidFill>
-                <a:latin typeface="Microsoft JhengHei"/>
-              </a:rPr>
-              <a:t>54%–87%</a:t>
-            </a:r>
-            <a:r>
-              <a:rPr sz="1300" b="0">
-                <a:solidFill>
-                  <a:srgbClr val="E8EDF5"/>
-                </a:solidFill>
-                <a:latin typeface="Microsoft JhengHei"/>
-              </a:rPr>
-              <a:t>。</a:t>
-            </a:r>
-          </a:p>
-          <a:p>
-            <a:pPr algn="l">
-              <a:lnSpc>
-                <a:spcPct val="125000"/>
-              </a:lnSpc>
-              <a:spcAft>
-                <a:spcPts val="800"/>
-              </a:spcAft>
-            </a:pPr>
-            <a:r>
-              <a:rPr sz="1300" b="0">
-                <a:solidFill>
-                  <a:srgbClr val="E8EDF5"/>
-                </a:solidFill>
-                <a:latin typeface="Microsoft JhengHei"/>
-              </a:rPr>
-              <a:t>2022 年動盪日數最多（225 日）卻僅 −0.18% ~ +1.45%——因其波動源於</a:t>
-            </a:r>
-            <a:r>
-              <a:rPr sz="1300" b="1">
-                <a:solidFill>
-                  <a:srgbClr val="E8EDF5"/>
-                </a:solidFill>
-                <a:latin typeface="Microsoft JhengHei"/>
-              </a:rPr>
-              <a:t>趨勢性方向移動</a:t>
-            </a:r>
-            <a:r>
-              <a:rPr sz="1300" b="0">
-                <a:solidFill>
-                  <a:srgbClr val="E8EDF5"/>
-                </a:solidFill>
-                <a:latin typeface="Microsoft JhengHei"/>
-              </a:rPr>
-              <a:t>，價差偏離後不必然回歸。</a:t>
-            </a:r>
-          </a:p>
-          <a:p>
-            <a:pPr algn="l">
-              <a:lnSpc>
-                <a:spcPct val="125000"/>
-              </a:lnSpc>
-              <a:spcAft>
-                <a:spcPts val="0"/>
-              </a:spcAft>
-            </a:pPr>
-            <a:r>
-              <a:rPr sz="1300" b="1">
-                <a:solidFill>
-                  <a:srgbClr val="FFFFFF"/>
-                </a:solidFill>
-                <a:latin typeface="Microsoft JhengHei"/>
-              </a:rPr>
-              <a:t>策略實質上在賣出波動率的均值回歸選擇權。</a:t>
-            </a:r>
-          </a:p>
-        </p:txBody>
-      </p:sp>
-    </p:spTree>
-  </p:cSld>
-  <p:clrMapOvr>
-    <a:masterClrMapping/>
-  </p:clrMapOvr>
-</p:sld>
-</file>
-
-<file path=ppt/slides/slide3.xml><?xml version="1.0" encoding="utf-8"?>
-<p:sld xmlns:a="http://schemas.openxmlformats.org/drawingml/2006/main" xmlns:r="http://schemas.openxmlformats.org/officeDocument/2006/relationships" xmlns:p="http://schemas.openxmlformats.org/presentationml/2006/main">
-  <p:cSld>
-    <p:spTree>
-      <p:nvGrpSpPr>
-        <p:cNvPr id="1" name=""/>
-        <p:cNvGrpSpPr/>
-        <p:nvPr/>
-      </p:nvGrpSpPr>
-      <p:grpSpPr>
-        <a:xfrm>
-          <a:off x="0" y="0"/>
-          <a:ext cx="0" cy="0"/>
-          <a:chOff x="0" y="0"/>
-          <a:chExt cx="0" cy="0"/>
-        </a:xfrm>
-      </p:grpSpPr>
-      <p:sp>
-        <p:nvSpPr>
-          <p:cNvPr id="2" name="TextBox 1"/>
-          <p:cNvSpPr txBox="1"/>
-          <p:nvPr/>
-        </p:nvSpPr>
-        <p:spPr>
-          <a:xfrm>
-            <a:off x="640080" y="384048"/>
-            <a:ext cx="10881360" cy="274320"/>
-          </a:xfrm>
-          <a:prstGeom prst="rect">
-            <a:avLst/>
-          </a:prstGeom>
-          <a:noFill/>
-        </p:spPr>
-        <p:txBody>
-          <a:bodyPr wrap="square" lIns="0" tIns="0" rIns="0" bIns="0">
-            <a:spAutoFit/>
-          </a:bodyPr>
-          <a:lstStyle/>
-          <a:p>
-            <a:pPr algn="l">
-              <a:lnSpc>
-                <a:spcPct val="125000"/>
-              </a:lnSpc>
-              <a:spcAft>
-                <a:spcPts val="200"/>
-              </a:spcAft>
-            </a:pPr>
-            <a:r>
-              <a:rPr sz="1200" b="1">
-                <a:solidFill>
-                  <a:srgbClr val="6B7280"/>
-                </a:solidFill>
-                <a:latin typeface="Microsoft JhengHei"/>
-              </a:rPr>
-              <a:t>背景 2 / 3　｜　§1.1 研究背景（詳 §2.1.3）</a:t>
-            </a:r>
-          </a:p>
-        </p:txBody>
-      </p:sp>
-      <p:sp>
-        <p:nvSpPr>
-          <p:cNvPr id="3" name="TextBox 2"/>
-          <p:cNvSpPr txBox="1"/>
-          <p:nvPr/>
-        </p:nvSpPr>
-        <p:spPr>
-          <a:xfrm>
-            <a:off x="640080" y="658368"/>
-            <a:ext cx="10881360" cy="822960"/>
-          </a:xfrm>
-          <a:prstGeom prst="rect">
-            <a:avLst/>
-          </a:prstGeom>
-          <a:noFill/>
-        </p:spPr>
-        <p:txBody>
-          <a:bodyPr wrap="square" lIns="0" tIns="0" rIns="0" bIns="0">
-            <a:spAutoFit/>
-          </a:bodyPr>
-          <a:lstStyle/>
-          <a:p>
-            <a:pPr algn="l">
-              <a:lnSpc>
-                <a:spcPct val="125000"/>
-              </a:lnSpc>
-              <a:spcAft>
-                <a:spcPts val="0"/>
-              </a:spcAft>
-            </a:pPr>
-            <a:r>
-              <a:rPr sz="3000" b="1">
-                <a:solidFill>
-                  <a:srgbClr val="0B2A5B"/>
-                </a:solidFill>
-                <a:latin typeface="Microsoft JhengHei"/>
-              </a:rPr>
-              <a:t>問題：這個策略的報酬正在消失</a:t>
-            </a:r>
-          </a:p>
-        </p:txBody>
-      </p:sp>
-      <p:sp>
-        <p:nvSpPr>
-          <p:cNvPr id="4" name="TextBox 3"/>
-          <p:cNvSpPr txBox="1"/>
-          <p:nvPr/>
-        </p:nvSpPr>
-        <p:spPr>
-          <a:xfrm>
-            <a:off x="11247120" y="6355080"/>
-            <a:ext cx="457200" cy="274320"/>
-          </a:xfrm>
-          <a:prstGeom prst="rect">
-            <a:avLst/>
-          </a:prstGeom>
-          <a:noFill/>
-        </p:spPr>
-        <p:txBody>
-          <a:bodyPr wrap="square" lIns="0" tIns="0" rIns="0" bIns="0">
-            <a:spAutoFit/>
-          </a:bodyPr>
-          <a:lstStyle/>
-          <a:p>
-            <a:pPr algn="r">
-              <a:lnSpc>
-                <a:spcPct val="125000"/>
-              </a:lnSpc>
-              <a:spcAft>
-                <a:spcPts val="600"/>
-              </a:spcAft>
-            </a:pPr>
-            <a:r>
-              <a:rPr sz="1000" b="0">
-                <a:solidFill>
-                  <a:srgbClr val="6B7280"/>
-                </a:solidFill>
-                <a:latin typeface="Microsoft JhengHei"/>
-              </a:rPr>
-              <a:t>3</a:t>
-            </a:r>
-          </a:p>
-        </p:txBody>
-      </p:sp>
-      <p:sp>
-        <p:nvSpPr>
-          <p:cNvPr id="5" name="TextBox 4"/>
-          <p:cNvSpPr txBox="1"/>
-          <p:nvPr/>
-        </p:nvSpPr>
-        <p:spPr>
-          <a:xfrm>
-            <a:off x="640080" y="1554480"/>
-            <a:ext cx="10881360" cy="1005840"/>
-          </a:xfrm>
-          <a:prstGeom prst="rect">
-            <a:avLst/>
-          </a:prstGeom>
-          <a:noFill/>
-        </p:spPr>
-        <p:txBody>
-          <a:bodyPr wrap="square" lIns="0" tIns="0" rIns="0" bIns="0">
-            <a:spAutoFit/>
-          </a:bodyPr>
-          <a:lstStyle/>
-          <a:p>
-            <a:pPr algn="l">
-              <a:lnSpc>
-                <a:spcPct val="125000"/>
-              </a:lnSpc>
-              <a:spcAft>
-                <a:spcPts val="0"/>
-              </a:spcAft>
-            </a:pPr>
-            <a:r>
-              <a:rPr sz="1700" b="0">
-                <a:solidFill>
-                  <a:srgbClr val="1A1A1A"/>
-                </a:solidFill>
-                <a:latin typeface="Microsoft JhengHei"/>
-              </a:rPr>
-              <a:t>GGR 在 1962–2002 年報告年化超額報酬最高可達 11%。但後續研究一致發現：</a:t>
-            </a:r>
-            <a:r>
-              <a:rPr sz="1700" b="1">
-                <a:solidFill>
-                  <a:srgbClr val="1A1A1A"/>
-                </a:solidFill>
-                <a:latin typeface="Microsoft JhengHei"/>
-              </a:rPr>
-              <a:t>這個績效在 2000 年代之後大幅衰減</a:t>
-            </a:r>
-            <a:r>
-              <a:rPr sz="1700" b="0">
-                <a:solidFill>
-                  <a:srgbClr val="1A1A1A"/>
-                </a:solidFill>
-                <a:latin typeface="Microsoft JhengHei"/>
-              </a:rPr>
-              <a:t>。</a:t>
-            </a:r>
-          </a:p>
-        </p:txBody>
-      </p:sp>
-      <p:sp>
-        <p:nvSpPr>
-          <p:cNvPr id="6" name="Rounded Rectangle 5"/>
-          <p:cNvSpPr/>
-          <p:nvPr/>
-        </p:nvSpPr>
-        <p:spPr>
-          <a:xfrm>
-            <a:off x="640080" y="2743200"/>
-            <a:ext cx="3429000" cy="1920240"/>
-          </a:xfrm>
-          <a:prstGeom prst="roundRect">
-            <a:avLst>
-              <a:gd name="adj" fmla="val 6000"/>
-            </a:avLst>
-          </a:prstGeom>
-          <a:solidFill>
-            <a:srgbClr val="E8EDF5"/>
-          </a:solidFill>
-          <a:ln>
-            <a:noFill/>
-          </a:ln>
-          <a:effectLst/>
-        </p:spPr>
-        <p:style>
-          <a:lnRef idx="1">
-            <a:schemeClr val="accent1"/>
-          </a:lnRef>
-          <a:fillRef idx="3">
-            <a:schemeClr val="accent1"/>
-          </a:fillRef>
-          <a:effectRef idx="2">
-            <a:schemeClr val="accent1"/>
-          </a:effectRef>
-          <a:fontRef idx="minor">
-            <a:schemeClr val="lt1"/>
-          </a:fontRef>
-        </p:style>
-        <p:txBody>
-          <a:bodyPr wrap="square" lIns="201168" tIns="146304" rIns="201168" bIns="146304" rtlCol="0" anchor="t"/>
-          <a:lstStyle/>
-          <a:p>
-            <a:pPr algn="l">
-              <a:lnSpc>
-                <a:spcPct val="125000"/>
-              </a:lnSpc>
-              <a:spcAft>
-                <a:spcPts val="600"/>
-              </a:spcAft>
-            </a:pPr>
-            <a:r>
-              <a:rPr sz="1500" b="1">
-                <a:solidFill>
-                  <a:srgbClr val="0B2A5B"/>
-                </a:solidFill>
-                <a:latin typeface="Microsoft JhengHei"/>
-              </a:rPr>
-              <a:t>Do &amp; Faff（2010）</a:t>
-            </a:r>
-          </a:p>
-          <a:p>
-            <a:pPr algn="l">
-              <a:lnSpc>
-                <a:spcPct val="125000"/>
-              </a:lnSpc>
-              <a:spcAft>
-                <a:spcPts val="0"/>
-              </a:spcAft>
-            </a:pPr>
-            <a:r>
-              <a:rPr sz="1300" b="0">
-                <a:solidFill>
-                  <a:srgbClr val="1A1A1A"/>
-                </a:solidFill>
-                <a:latin typeface="Microsoft JhengHei"/>
-              </a:rPr>
-              <a:t>把樣本延伸到 2009 年，獲利自 1990 年代末起顯著下降，且非由特定次期間的異常值驅動。</a:t>
-            </a:r>
-          </a:p>
-        </p:txBody>
-      </p:sp>
-      <p:sp>
-        <p:nvSpPr>
-          <p:cNvPr id="7" name="Rounded Rectangle 6"/>
-          <p:cNvSpPr/>
-          <p:nvPr/>
-        </p:nvSpPr>
-        <p:spPr>
-          <a:xfrm>
-            <a:off x="4389120" y="2743200"/>
-            <a:ext cx="3429000" cy="1920240"/>
-          </a:xfrm>
-          <a:prstGeom prst="roundRect">
-            <a:avLst>
-              <a:gd name="adj" fmla="val 6000"/>
-            </a:avLst>
-          </a:prstGeom>
-          <a:solidFill>
-            <a:srgbClr val="E8EDF5"/>
-          </a:solidFill>
-          <a:ln>
-            <a:noFill/>
-          </a:ln>
-          <a:effectLst/>
-        </p:spPr>
-        <p:style>
-          <a:lnRef idx="1">
-            <a:schemeClr val="accent1"/>
-          </a:lnRef>
-          <a:fillRef idx="3">
-            <a:schemeClr val="accent1"/>
-          </a:fillRef>
-          <a:effectRef idx="2">
-            <a:schemeClr val="accent1"/>
-          </a:effectRef>
-          <a:fontRef idx="minor">
-            <a:schemeClr val="lt1"/>
-          </a:fontRef>
-        </p:style>
-        <p:txBody>
-          <a:bodyPr wrap="square" lIns="201168" tIns="146304" rIns="201168" bIns="146304" rtlCol="0" anchor="t"/>
-          <a:lstStyle/>
-          <a:p>
-            <a:pPr algn="l">
-              <a:lnSpc>
-                <a:spcPct val="125000"/>
-              </a:lnSpc>
-              <a:spcAft>
-                <a:spcPts val="600"/>
-              </a:spcAft>
-            </a:pPr>
-            <a:r>
-              <a:rPr sz="1500" b="1">
-                <a:solidFill>
-                  <a:srgbClr val="0B2A5B"/>
-                </a:solidFill>
-                <a:latin typeface="Microsoft JhengHei"/>
-              </a:rPr>
-              <a:t>Do &amp; Faff（2012）</a:t>
-            </a:r>
-          </a:p>
-          <a:p>
-            <a:pPr algn="l">
-              <a:lnSpc>
-                <a:spcPct val="125000"/>
-              </a:lnSpc>
-              <a:spcAft>
-                <a:spcPts val="0"/>
-              </a:spcAft>
-            </a:pPr>
-            <a:r>
-              <a:rPr sz="1300" b="0">
-                <a:solidFill>
-                  <a:srgbClr val="1A1A1A"/>
-                </a:solidFill>
-                <a:latin typeface="Microsoft JhengHei"/>
-              </a:rPr>
-              <a:t>納入佣金、買賣價差與放空費用後，獲利</a:t>
-            </a:r>
-            <a:r>
-              <a:rPr sz="1300" b="1">
-                <a:solidFill>
-                  <a:srgbClr val="1A1A1A"/>
-                </a:solidFill>
-                <a:latin typeface="Microsoft JhengHei"/>
-              </a:rPr>
-              <a:t>大幅縮水</a:t>
-            </a:r>
-            <a:r>
-              <a:rPr sz="1300" b="0">
-                <a:solidFill>
-                  <a:srgbClr val="1A1A1A"/>
-                </a:solidFill>
-                <a:latin typeface="Microsoft JhengHei"/>
-              </a:rPr>
-              <a:t>；且該文明確指出</a:t>
-            </a:r>
-            <a:r>
-              <a:rPr sz="1300" b="1">
-                <a:solidFill>
-                  <a:srgbClr val="1A1A1A"/>
-                </a:solidFill>
-                <a:latin typeface="Microsoft JhengHei"/>
-              </a:rPr>
-              <a:t>2002 年後基本無利可圖</a:t>
-            </a:r>
-            <a:r>
-              <a:rPr sz="1300" b="0">
-                <a:solidFill>
-                  <a:srgbClr val="1A1A1A"/>
-                </a:solidFill>
-                <a:latin typeface="Microsoft JhengHei"/>
-              </a:rPr>
-              <a:t>。</a:t>
-            </a:r>
-          </a:p>
-        </p:txBody>
-      </p:sp>
-      <p:sp>
-        <p:nvSpPr>
-          <p:cNvPr id="8" name="Rounded Rectangle 7"/>
-          <p:cNvSpPr/>
-          <p:nvPr/>
-        </p:nvSpPr>
-        <p:spPr>
-          <a:xfrm>
-            <a:off x="8138160" y="2743200"/>
-            <a:ext cx="3383280" cy="1920240"/>
-          </a:xfrm>
-          <a:prstGeom prst="roundRect">
-            <a:avLst>
-              <a:gd name="adj" fmla="val 6000"/>
-            </a:avLst>
-          </a:prstGeom>
-          <a:solidFill>
-            <a:srgbClr val="E8EDF5"/>
-          </a:solidFill>
-          <a:ln>
-            <a:noFill/>
-          </a:ln>
-          <a:effectLst/>
-        </p:spPr>
-        <p:style>
-          <a:lnRef idx="1">
-            <a:schemeClr val="accent1"/>
-          </a:lnRef>
-          <a:fillRef idx="3">
-            <a:schemeClr val="accent1"/>
-          </a:fillRef>
-          <a:effectRef idx="2">
-            <a:schemeClr val="accent1"/>
-          </a:effectRef>
-          <a:fontRef idx="minor">
-            <a:schemeClr val="lt1"/>
-          </a:fontRef>
-        </p:style>
-        <p:txBody>
-          <a:bodyPr wrap="square" lIns="201168" tIns="146304" rIns="201168" bIns="146304" rtlCol="0" anchor="t"/>
-          <a:lstStyle/>
-          <a:p>
-            <a:pPr algn="l">
-              <a:lnSpc>
-                <a:spcPct val="125000"/>
-              </a:lnSpc>
-              <a:spcAft>
-                <a:spcPts val="600"/>
-              </a:spcAft>
-            </a:pPr>
-            <a:r>
-              <a:rPr sz="1500" b="1">
-                <a:solidFill>
-                  <a:srgbClr val="0B2A5B"/>
-                </a:solidFill>
-                <a:latin typeface="Microsoft JhengHei"/>
-              </a:rPr>
-              <a:t>Krauss（2017）</a:t>
-            </a:r>
-          </a:p>
-          <a:p>
-            <a:pPr algn="l">
-              <a:lnSpc>
-                <a:spcPct val="125000"/>
-              </a:lnSpc>
-              <a:spcAft>
-                <a:spcPts val="0"/>
-              </a:spcAft>
-            </a:pPr>
-            <a:r>
-              <a:rPr sz="1300" b="0">
-                <a:solidFill>
-                  <a:srgbClr val="1A1A1A"/>
-                </a:solidFill>
-                <a:latin typeface="Microsoft JhengHei"/>
-              </a:rPr>
-              <a:t>綜述五大類方法，指出</a:t>
-            </a:r>
-            <a:r>
-              <a:rPr sz="1300" b="1">
-                <a:solidFill>
-                  <a:srgbClr val="1A1A1A"/>
-                </a:solidFill>
-                <a:latin typeface="Microsoft JhengHei"/>
-              </a:rPr>
-              <a:t>方法間的差異往往小於樣本期間造成的差異</a:t>
-            </a:r>
-            <a:r>
-              <a:rPr sz="1300" b="0">
-                <a:solidFill>
-                  <a:srgbClr val="1A1A1A"/>
-                </a:solidFill>
-                <a:latin typeface="Microsoft JhengHei"/>
-              </a:rPr>
-              <a:t>。</a:t>
-            </a:r>
-          </a:p>
-        </p:txBody>
-      </p:sp>
-      <p:sp>
-        <p:nvSpPr>
-          <p:cNvPr id="9" name="TextBox 8"/>
-          <p:cNvSpPr txBox="1"/>
-          <p:nvPr/>
-        </p:nvSpPr>
-        <p:spPr>
-          <a:xfrm>
-            <a:off x="640080" y="5029200"/>
-            <a:ext cx="10881360" cy="731520"/>
-          </a:xfrm>
-          <a:prstGeom prst="rect">
-            <a:avLst/>
-          </a:prstGeom>
-          <a:noFill/>
-        </p:spPr>
-        <p:txBody>
-          <a:bodyPr wrap="square" lIns="0" tIns="0" rIns="0" bIns="0">
-            <a:spAutoFit/>
-          </a:bodyPr>
-          <a:lstStyle/>
-          <a:p>
-            <a:pPr algn="l">
-              <a:lnSpc>
-                <a:spcPct val="125000"/>
-              </a:lnSpc>
-              <a:spcAft>
-                <a:spcPts val="600"/>
-              </a:spcAft>
-            </a:pPr>
-            <a:r>
-              <a:rPr sz="1800" b="1">
-                <a:solidFill>
-                  <a:srgbClr val="C4553B"/>
-                </a:solidFill>
-                <a:latin typeface="Microsoft JhengHei"/>
-              </a:rPr>
-              <a:t>→ 文獻於是轉向：能不能用機器學習把它救回來？</a:t>
-            </a:r>
-          </a:p>
-        </p:txBody>
-      </p:sp>
-      <p:sp>
-        <p:nvSpPr>
-          <p:cNvPr id="10" name="TextBox 9"/>
-          <p:cNvSpPr txBox="1"/>
-          <p:nvPr/>
-        </p:nvSpPr>
-        <p:spPr>
-          <a:xfrm>
-            <a:off x="640080" y="5806440"/>
-            <a:ext cx="10332720" cy="1188720"/>
-          </a:xfrm>
-          <a:prstGeom prst="rect">
-            <a:avLst/>
-          </a:prstGeom>
-          <a:noFill/>
-        </p:spPr>
-        <p:txBody>
-          <a:bodyPr wrap="square" lIns="0" tIns="0" rIns="0" bIns="0">
-            <a:spAutoFit/>
-          </a:bodyPr>
-          <a:lstStyle/>
-          <a:p>
-            <a:pPr>
-              <a:lnSpc>
-                <a:spcPct val="105000"/>
-              </a:lnSpc>
-              <a:spcAft>
-                <a:spcPts val="100"/>
-              </a:spcAft>
-            </a:pPr>
-            <a:r>
-              <a:rPr sz="800">
-                <a:solidFill>
-                  <a:srgbClr val="6B7280"/>
-                </a:solidFill>
-                <a:latin typeface="Microsoft JhengHei"/>
-              </a:rPr>
-              <a:t>Gatev, E., Goetzmann, W. N., &amp; Rouwenhorst, K. G. (2006). Pairs trading: Performance of a relative-value arbitrage rule. The Review of Financial Studies, 19(3), 797–827.</a:t>
-            </a:r>
-          </a:p>
-          <a:p>
-            <a:pPr>
-              <a:lnSpc>
-                <a:spcPct val="105000"/>
-              </a:lnSpc>
-              <a:spcAft>
-                <a:spcPts val="100"/>
-              </a:spcAft>
-            </a:pPr>
-            <a:r>
-              <a:rPr sz="800">
-                <a:solidFill>
-                  <a:srgbClr val="6B7280"/>
-                </a:solidFill>
-                <a:latin typeface="Microsoft JhengHei"/>
-              </a:rPr>
-              <a:t>Do, B., &amp; Faff, R. (2010). Does simple pairs trading still work? Financial Analysts Journal, 66(4), 83–95.</a:t>
-            </a:r>
-          </a:p>
-          <a:p>
-            <a:pPr>
-              <a:lnSpc>
-                <a:spcPct val="105000"/>
-              </a:lnSpc>
-              <a:spcAft>
-                <a:spcPts val="100"/>
-              </a:spcAft>
-            </a:pPr>
-            <a:r>
-              <a:rPr sz="800">
-                <a:solidFill>
-                  <a:srgbClr val="6B7280"/>
-                </a:solidFill>
-                <a:latin typeface="Microsoft JhengHei"/>
-              </a:rPr>
-              <a:t>Do, B., &amp; Faff, R. (2012). Are pairs trading profits robust to trading costs? Journal of Financial Research, 35(2), 261–287.</a:t>
-            </a:r>
-          </a:p>
-          <a:p>
-            <a:pPr>
-              <a:lnSpc>
-                <a:spcPct val="105000"/>
-              </a:lnSpc>
-              <a:spcAft>
-                <a:spcPts val="100"/>
-              </a:spcAft>
-            </a:pPr>
-            <a:r>
-              <a:rPr sz="800">
-                <a:solidFill>
-                  <a:srgbClr val="6B7280"/>
-                </a:solidFill>
-                <a:latin typeface="Microsoft JhengHei"/>
-              </a:rPr>
-              <a:t>Krauss, C. (2017). Statistical arbitrage pairs trading strategies: Review and outlook. Journal of Economic Surveys, 31(2), 513–545.</a:t>
-            </a:r>
-          </a:p>
-        </p:txBody>
-      </p:sp>
-    </p:spTree>
-  </p:cSld>
-  <p:clrMapOvr>
-    <a:masterClrMapping/>
-  </p:clrMapOvr>
-</p:sld>
-</file>
-
-<file path=ppt/slides/slide30.xml><?xml version="1.0" encoding="utf-8"?>
 <p:sld xmlns:a="http://schemas.openxmlformats.org/drawingml/2006/main" xmlns:r="http://schemas.openxmlformats.org/officeDocument/2006/relationships" xmlns:p="http://schemas.openxmlformats.org/presentationml/2006/main">
   <p:cSld>
     <p:spTree>
@@ -25512,7 +23920,656 @@
 </p:sld>
 </file>
 
-<file path=ppt/slides/slide31.xml><?xml version="1.0" encoding="utf-8"?>
+<file path=ppt/slides/slide3.xml><?xml version="1.0" encoding="utf-8"?>
+<p:sld xmlns:a="http://schemas.openxmlformats.org/drawingml/2006/main" xmlns:r="http://schemas.openxmlformats.org/officeDocument/2006/relationships" xmlns:p="http://schemas.openxmlformats.org/presentationml/2006/main">
+  <p:cSld>
+    <p:spTree>
+      <p:nvGrpSpPr>
+        <p:cNvPr id="1" name=""/>
+        <p:cNvGrpSpPr/>
+        <p:nvPr/>
+      </p:nvGrpSpPr>
+      <p:grpSpPr>
+        <a:xfrm>
+          <a:off x="0" y="0"/>
+          <a:ext cx="0" cy="0"/>
+          <a:chOff x="0" y="0"/>
+          <a:chExt cx="0" cy="0"/>
+        </a:xfrm>
+      </p:grpSpPr>
+      <p:sp>
+        <p:nvSpPr>
+          <p:cNvPr id="2" name="TextBox 1"/>
+          <p:cNvSpPr txBox="1"/>
+          <p:nvPr/>
+        </p:nvSpPr>
+        <p:spPr>
+          <a:xfrm>
+            <a:off x="640080" y="384048"/>
+            <a:ext cx="10881360" cy="274320"/>
+          </a:xfrm>
+          <a:prstGeom prst="rect">
+            <a:avLst/>
+          </a:prstGeom>
+          <a:noFill/>
+        </p:spPr>
+        <p:txBody>
+          <a:bodyPr wrap="square" lIns="0" tIns="0" rIns="0" bIns="0">
+            <a:spAutoFit/>
+          </a:bodyPr>
+          <a:lstStyle/>
+          <a:p>
+            <a:pPr algn="l">
+              <a:lnSpc>
+                <a:spcPct val="125000"/>
+              </a:lnSpc>
+              <a:spcAft>
+                <a:spcPts val="200"/>
+              </a:spcAft>
+            </a:pPr>
+            <a:r>
+              <a:rPr sz="1200" b="1">
+                <a:solidFill>
+                  <a:srgbClr val="6B7280"/>
+                </a:solidFill>
+                <a:latin typeface="Microsoft JhengHei"/>
+              </a:rPr>
+              <a:t>背景 2 / 3　｜　§1.1 研究背景（詳 §2.1.3）</a:t>
+            </a:r>
+          </a:p>
+        </p:txBody>
+      </p:sp>
+      <p:sp>
+        <p:nvSpPr>
+          <p:cNvPr id="3" name="TextBox 2"/>
+          <p:cNvSpPr txBox="1"/>
+          <p:nvPr/>
+        </p:nvSpPr>
+        <p:spPr>
+          <a:xfrm>
+            <a:off x="640080" y="658368"/>
+            <a:ext cx="10881360" cy="822960"/>
+          </a:xfrm>
+          <a:prstGeom prst="rect">
+            <a:avLst/>
+          </a:prstGeom>
+          <a:noFill/>
+        </p:spPr>
+        <p:txBody>
+          <a:bodyPr wrap="square" lIns="0" tIns="0" rIns="0" bIns="0">
+            <a:spAutoFit/>
+          </a:bodyPr>
+          <a:lstStyle/>
+          <a:p>
+            <a:pPr algn="l">
+              <a:lnSpc>
+                <a:spcPct val="125000"/>
+              </a:lnSpc>
+              <a:spcAft>
+                <a:spcPts val="0"/>
+              </a:spcAft>
+            </a:pPr>
+            <a:r>
+              <a:rPr sz="3000" b="1">
+                <a:solidFill>
+                  <a:srgbClr val="0B2A5B"/>
+                </a:solidFill>
+                <a:latin typeface="Microsoft JhengHei"/>
+              </a:rPr>
+              <a:t>問題：這個策略的報酬正在消失</a:t>
+            </a:r>
+          </a:p>
+        </p:txBody>
+      </p:sp>
+      <p:sp>
+        <p:nvSpPr>
+          <p:cNvPr id="4" name="TextBox 3"/>
+          <p:cNvSpPr txBox="1"/>
+          <p:nvPr/>
+        </p:nvSpPr>
+        <p:spPr>
+          <a:xfrm>
+            <a:off x="11247120" y="6355080"/>
+            <a:ext cx="457200" cy="274320"/>
+          </a:xfrm>
+          <a:prstGeom prst="rect">
+            <a:avLst/>
+          </a:prstGeom>
+          <a:noFill/>
+        </p:spPr>
+        <p:txBody>
+          <a:bodyPr wrap="square" lIns="0" tIns="0" rIns="0" bIns="0">
+            <a:spAutoFit/>
+          </a:bodyPr>
+          <a:lstStyle/>
+          <a:p>
+            <a:pPr algn="r">
+              <a:lnSpc>
+                <a:spcPct val="125000"/>
+              </a:lnSpc>
+              <a:spcAft>
+                <a:spcPts val="600"/>
+              </a:spcAft>
+            </a:pPr>
+            <a:r>
+              <a:rPr sz="1000" b="0">
+                <a:solidFill>
+                  <a:srgbClr val="6B7280"/>
+                </a:solidFill>
+                <a:latin typeface="Microsoft JhengHei"/>
+              </a:rPr>
+              <a:t>3</a:t>
+            </a:r>
+          </a:p>
+        </p:txBody>
+      </p:sp>
+      <p:sp>
+        <p:nvSpPr>
+          <p:cNvPr id="5" name="TextBox 4"/>
+          <p:cNvSpPr txBox="1"/>
+          <p:nvPr/>
+        </p:nvSpPr>
+        <p:spPr>
+          <a:xfrm>
+            <a:off x="640080" y="1554480"/>
+            <a:ext cx="10881360" cy="1005840"/>
+          </a:xfrm>
+          <a:prstGeom prst="rect">
+            <a:avLst/>
+          </a:prstGeom>
+          <a:noFill/>
+        </p:spPr>
+        <p:txBody>
+          <a:bodyPr wrap="square" lIns="0" tIns="0" rIns="0" bIns="0">
+            <a:spAutoFit/>
+          </a:bodyPr>
+          <a:lstStyle/>
+          <a:p>
+            <a:pPr algn="l">
+              <a:lnSpc>
+                <a:spcPct val="125000"/>
+              </a:lnSpc>
+              <a:spcAft>
+                <a:spcPts val="0"/>
+              </a:spcAft>
+            </a:pPr>
+            <a:r>
+              <a:rPr sz="1700" b="0">
+                <a:solidFill>
+                  <a:srgbClr val="1A1A1A"/>
+                </a:solidFill>
+                <a:latin typeface="Microsoft JhengHei"/>
+              </a:rPr>
+              <a:t>GGR 在 1962–2002 年報告年化超額報酬最高可達 11%。但後續研究一致發現：</a:t>
+            </a:r>
+            <a:r>
+              <a:rPr sz="1700" b="1">
+                <a:solidFill>
+                  <a:srgbClr val="1A1A1A"/>
+                </a:solidFill>
+                <a:latin typeface="Microsoft JhengHei"/>
+              </a:rPr>
+              <a:t>這個績效在 2000 年代之後大幅衰減</a:t>
+            </a:r>
+            <a:r>
+              <a:rPr sz="1700" b="0">
+                <a:solidFill>
+                  <a:srgbClr val="1A1A1A"/>
+                </a:solidFill>
+                <a:latin typeface="Microsoft JhengHei"/>
+              </a:rPr>
+              <a:t>。</a:t>
+            </a:r>
+          </a:p>
+        </p:txBody>
+      </p:sp>
+      <p:sp>
+        <p:nvSpPr>
+          <p:cNvPr id="6" name="Rounded Rectangle 5"/>
+          <p:cNvSpPr/>
+          <p:nvPr/>
+        </p:nvSpPr>
+        <p:spPr>
+          <a:xfrm>
+            <a:off x="640080" y="2743200"/>
+            <a:ext cx="3429000" cy="1920240"/>
+          </a:xfrm>
+          <a:prstGeom prst="roundRect">
+            <a:avLst>
+              <a:gd name="adj" fmla="val 6000"/>
+            </a:avLst>
+          </a:prstGeom>
+          <a:solidFill>
+            <a:srgbClr val="E8EDF5"/>
+          </a:solidFill>
+          <a:ln>
+            <a:noFill/>
+          </a:ln>
+          <a:effectLst/>
+        </p:spPr>
+        <p:style>
+          <a:lnRef idx="1">
+            <a:schemeClr val="accent1"/>
+          </a:lnRef>
+          <a:fillRef idx="3">
+            <a:schemeClr val="accent1"/>
+          </a:fillRef>
+          <a:effectRef idx="2">
+            <a:schemeClr val="accent1"/>
+          </a:effectRef>
+          <a:fontRef idx="minor">
+            <a:schemeClr val="lt1"/>
+          </a:fontRef>
+        </p:style>
+        <p:txBody>
+          <a:bodyPr wrap="square" lIns="201168" tIns="146304" rIns="201168" bIns="146304" rtlCol="0" anchor="t"/>
+          <a:lstStyle/>
+          <a:p>
+            <a:pPr algn="l">
+              <a:lnSpc>
+                <a:spcPct val="125000"/>
+              </a:lnSpc>
+              <a:spcAft>
+                <a:spcPts val="600"/>
+              </a:spcAft>
+            </a:pPr>
+            <a:r>
+              <a:rPr sz="1500" b="1">
+                <a:solidFill>
+                  <a:srgbClr val="0B2A5B"/>
+                </a:solidFill>
+                <a:latin typeface="Microsoft JhengHei"/>
+              </a:rPr>
+              <a:t>Do &amp; Faff（2010）</a:t>
+            </a:r>
+          </a:p>
+          <a:p>
+            <a:pPr algn="l">
+              <a:lnSpc>
+                <a:spcPct val="125000"/>
+              </a:lnSpc>
+              <a:spcAft>
+                <a:spcPts val="0"/>
+              </a:spcAft>
+            </a:pPr>
+            <a:r>
+              <a:rPr sz="1300" b="0">
+                <a:solidFill>
+                  <a:srgbClr val="1A1A1A"/>
+                </a:solidFill>
+                <a:latin typeface="Microsoft JhengHei"/>
+              </a:rPr>
+              <a:t>把樣本延伸到 2009 年，獲利自 1990 年代末起顯著下降，且非由特定次期間的異常值驅動。</a:t>
+            </a:r>
+          </a:p>
+        </p:txBody>
+      </p:sp>
+      <p:sp>
+        <p:nvSpPr>
+          <p:cNvPr id="7" name="Rounded Rectangle 6"/>
+          <p:cNvSpPr/>
+          <p:nvPr/>
+        </p:nvSpPr>
+        <p:spPr>
+          <a:xfrm>
+            <a:off x="4389120" y="2743200"/>
+            <a:ext cx="3429000" cy="1920240"/>
+          </a:xfrm>
+          <a:prstGeom prst="roundRect">
+            <a:avLst>
+              <a:gd name="adj" fmla="val 6000"/>
+            </a:avLst>
+          </a:prstGeom>
+          <a:solidFill>
+            <a:srgbClr val="E8EDF5"/>
+          </a:solidFill>
+          <a:ln>
+            <a:noFill/>
+          </a:ln>
+          <a:effectLst/>
+        </p:spPr>
+        <p:style>
+          <a:lnRef idx="1">
+            <a:schemeClr val="accent1"/>
+          </a:lnRef>
+          <a:fillRef idx="3">
+            <a:schemeClr val="accent1"/>
+          </a:fillRef>
+          <a:effectRef idx="2">
+            <a:schemeClr val="accent1"/>
+          </a:effectRef>
+          <a:fontRef idx="minor">
+            <a:schemeClr val="lt1"/>
+          </a:fontRef>
+        </p:style>
+        <p:txBody>
+          <a:bodyPr wrap="square" lIns="201168" tIns="146304" rIns="201168" bIns="146304" rtlCol="0" anchor="t"/>
+          <a:lstStyle/>
+          <a:p>
+            <a:pPr algn="l">
+              <a:lnSpc>
+                <a:spcPct val="125000"/>
+              </a:lnSpc>
+              <a:spcAft>
+                <a:spcPts val="600"/>
+              </a:spcAft>
+            </a:pPr>
+            <a:r>
+              <a:rPr sz="1500" b="1">
+                <a:solidFill>
+                  <a:srgbClr val="0B2A5B"/>
+                </a:solidFill>
+                <a:latin typeface="Microsoft JhengHei"/>
+              </a:rPr>
+              <a:t>Do &amp; Faff（2012）</a:t>
+            </a:r>
+          </a:p>
+          <a:p>
+            <a:pPr algn="l">
+              <a:lnSpc>
+                <a:spcPct val="125000"/>
+              </a:lnSpc>
+              <a:spcAft>
+                <a:spcPts val="0"/>
+              </a:spcAft>
+            </a:pPr>
+            <a:r>
+              <a:rPr sz="1300" b="0">
+                <a:solidFill>
+                  <a:srgbClr val="1A1A1A"/>
+                </a:solidFill>
+                <a:latin typeface="Microsoft JhengHei"/>
+              </a:rPr>
+              <a:t>納入佣金、買賣價差與放空費用後，獲利</a:t>
+            </a:r>
+            <a:r>
+              <a:rPr sz="1300" b="1">
+                <a:solidFill>
+                  <a:srgbClr val="1A1A1A"/>
+                </a:solidFill>
+                <a:latin typeface="Microsoft JhengHei"/>
+              </a:rPr>
+              <a:t>大幅縮水</a:t>
+            </a:r>
+            <a:r>
+              <a:rPr sz="1300" b="0">
+                <a:solidFill>
+                  <a:srgbClr val="1A1A1A"/>
+                </a:solidFill>
+                <a:latin typeface="Microsoft JhengHei"/>
+              </a:rPr>
+              <a:t>；且該文明確指出</a:t>
+            </a:r>
+            <a:r>
+              <a:rPr sz="1300" b="1">
+                <a:solidFill>
+                  <a:srgbClr val="1A1A1A"/>
+                </a:solidFill>
+                <a:latin typeface="Microsoft JhengHei"/>
+              </a:rPr>
+              <a:t>2002 年後基本無利可圖</a:t>
+            </a:r>
+            <a:r>
+              <a:rPr sz="1300" b="0">
+                <a:solidFill>
+                  <a:srgbClr val="1A1A1A"/>
+                </a:solidFill>
+                <a:latin typeface="Microsoft JhengHei"/>
+              </a:rPr>
+              <a:t>。</a:t>
+            </a:r>
+          </a:p>
+        </p:txBody>
+      </p:sp>
+      <p:sp>
+        <p:nvSpPr>
+          <p:cNvPr id="8" name="Rounded Rectangle 7"/>
+          <p:cNvSpPr/>
+          <p:nvPr/>
+        </p:nvSpPr>
+        <p:spPr>
+          <a:xfrm>
+            <a:off x="8138160" y="2743200"/>
+            <a:ext cx="3383280" cy="1920240"/>
+          </a:xfrm>
+          <a:prstGeom prst="roundRect">
+            <a:avLst>
+              <a:gd name="adj" fmla="val 6000"/>
+            </a:avLst>
+          </a:prstGeom>
+          <a:solidFill>
+            <a:srgbClr val="E8EDF5"/>
+          </a:solidFill>
+          <a:ln>
+            <a:noFill/>
+          </a:ln>
+          <a:effectLst/>
+        </p:spPr>
+        <p:style>
+          <a:lnRef idx="1">
+            <a:schemeClr val="accent1"/>
+          </a:lnRef>
+          <a:fillRef idx="3">
+            <a:schemeClr val="accent1"/>
+          </a:fillRef>
+          <a:effectRef idx="2">
+            <a:schemeClr val="accent1"/>
+          </a:effectRef>
+          <a:fontRef idx="minor">
+            <a:schemeClr val="lt1"/>
+          </a:fontRef>
+        </p:style>
+        <p:txBody>
+          <a:bodyPr wrap="square" lIns="201168" tIns="146304" rIns="201168" bIns="146304" rtlCol="0" anchor="t"/>
+          <a:lstStyle/>
+          <a:p>
+            <a:pPr algn="l">
+              <a:lnSpc>
+                <a:spcPct val="125000"/>
+              </a:lnSpc>
+              <a:spcAft>
+                <a:spcPts val="600"/>
+              </a:spcAft>
+            </a:pPr>
+            <a:r>
+              <a:rPr sz="1500" b="1">
+                <a:solidFill>
+                  <a:srgbClr val="0B2A5B"/>
+                </a:solidFill>
+                <a:latin typeface="Microsoft JhengHei"/>
+              </a:rPr>
+              <a:t>Krauss（2017）</a:t>
+            </a:r>
+          </a:p>
+          <a:p>
+            <a:pPr algn="l">
+              <a:lnSpc>
+                <a:spcPct val="125000"/>
+              </a:lnSpc>
+              <a:spcAft>
+                <a:spcPts val="0"/>
+              </a:spcAft>
+            </a:pPr>
+            <a:r>
+              <a:rPr sz="1300" b="0">
+                <a:solidFill>
+                  <a:srgbClr val="1A1A1A"/>
+                </a:solidFill>
+                <a:latin typeface="Microsoft JhengHei"/>
+              </a:rPr>
+              <a:t>綜述五大類方法，指出</a:t>
+            </a:r>
+            <a:r>
+              <a:rPr sz="1300" b="1">
+                <a:solidFill>
+                  <a:srgbClr val="1A1A1A"/>
+                </a:solidFill>
+                <a:latin typeface="Microsoft JhengHei"/>
+              </a:rPr>
+              <a:t>方法間的差異往往小於樣本期間造成的差異</a:t>
+            </a:r>
+            <a:r>
+              <a:rPr sz="1300" b="0">
+                <a:solidFill>
+                  <a:srgbClr val="1A1A1A"/>
+                </a:solidFill>
+                <a:latin typeface="Microsoft JhengHei"/>
+              </a:rPr>
+              <a:t>。</a:t>
+            </a:r>
+          </a:p>
+        </p:txBody>
+      </p:sp>
+      <p:sp>
+        <p:nvSpPr>
+          <p:cNvPr id="9" name="TextBox 8"/>
+          <p:cNvSpPr txBox="1"/>
+          <p:nvPr/>
+        </p:nvSpPr>
+        <p:spPr>
+          <a:xfrm>
+            <a:off x="640080" y="5029200"/>
+            <a:ext cx="10881360" cy="731520"/>
+          </a:xfrm>
+          <a:prstGeom prst="rect">
+            <a:avLst/>
+          </a:prstGeom>
+          <a:noFill/>
+        </p:spPr>
+        <p:txBody>
+          <a:bodyPr wrap="square" lIns="0" tIns="0" rIns="0" bIns="0">
+            <a:spAutoFit/>
+          </a:bodyPr>
+          <a:lstStyle/>
+          <a:p>
+            <a:pPr algn="l">
+              <a:lnSpc>
+                <a:spcPct val="125000"/>
+              </a:lnSpc>
+              <a:spcAft>
+                <a:spcPts val="600"/>
+              </a:spcAft>
+            </a:pPr>
+            <a:r>
+              <a:rPr sz="1800" b="1">
+                <a:solidFill>
+                  <a:srgbClr val="C4553B"/>
+                </a:solidFill>
+                <a:latin typeface="Microsoft JhengHei"/>
+              </a:rPr>
+              <a:t>→ 文獻於是轉向：能不能用機器學習把它救回來？</a:t>
+            </a:r>
+          </a:p>
+        </p:txBody>
+      </p:sp>
+      <p:sp>
+        <p:nvSpPr>
+          <p:cNvPr id="10" name="TextBox 9"/>
+          <p:cNvSpPr txBox="1"/>
+          <p:nvPr/>
+        </p:nvSpPr>
+        <p:spPr>
+          <a:xfrm>
+            <a:off x="640080" y="5806440"/>
+            <a:ext cx="10332720" cy="1188720"/>
+          </a:xfrm>
+          <a:prstGeom prst="rect">
+            <a:avLst/>
+          </a:prstGeom>
+          <a:noFill/>
+        </p:spPr>
+        <p:txBody>
+          <a:bodyPr wrap="square" lIns="0" tIns="0" rIns="0" bIns="0">
+            <a:spAutoFit/>
+          </a:bodyPr>
+          <a:lstStyle/>
+          <a:p>
+            <a:pPr>
+              <a:lnSpc>
+                <a:spcPct val="105000"/>
+              </a:lnSpc>
+              <a:spcAft>
+                <a:spcPts val="100"/>
+              </a:spcAft>
+            </a:pPr>
+            <a:r>
+              <a:rPr sz="800">
+                <a:solidFill>
+                  <a:srgbClr val="6B7280"/>
+                </a:solidFill>
+                <a:latin typeface="Microsoft JhengHei"/>
+              </a:rPr>
+              <a:t>Gatev, E., Goetzmann, W. N., &amp; Rouwenhorst, K. G. (2006). Pairs trading: Performance of a relative-value arbitrage rule. The Review of Financial Studies, 19(3), 797–827.</a:t>
+            </a:r>
+          </a:p>
+          <a:p>
+            <a:pPr>
+              <a:lnSpc>
+                <a:spcPct val="105000"/>
+              </a:lnSpc>
+              <a:spcAft>
+                <a:spcPts val="100"/>
+              </a:spcAft>
+            </a:pPr>
+            <a:r>
+              <a:rPr sz="800">
+                <a:solidFill>
+                  <a:srgbClr val="6B7280"/>
+                </a:solidFill>
+                <a:latin typeface="Microsoft JhengHei"/>
+              </a:rPr>
+              <a:t>Do, B., &amp; Faff, R. (2010). Does simple pairs trading still work? Financial Analysts Journal, 66(4), 83–95.</a:t>
+            </a:r>
+          </a:p>
+          <a:p>
+            <a:pPr>
+              <a:lnSpc>
+                <a:spcPct val="105000"/>
+              </a:lnSpc>
+              <a:spcAft>
+                <a:spcPts val="100"/>
+              </a:spcAft>
+            </a:pPr>
+            <a:r>
+              <a:rPr sz="800">
+                <a:solidFill>
+                  <a:srgbClr val="6B7280"/>
+                </a:solidFill>
+                <a:latin typeface="Microsoft JhengHei"/>
+              </a:rPr>
+              <a:t>Do, B., &amp; Faff, R. (2012). Are pairs trading profits robust to trading costs? Journal of Financial Research, 35(2), 261–287.</a:t>
+            </a:r>
+          </a:p>
+          <a:p>
+            <a:pPr>
+              <a:lnSpc>
+                <a:spcPct val="105000"/>
+              </a:lnSpc>
+              <a:spcAft>
+                <a:spcPts val="100"/>
+              </a:spcAft>
+            </a:pPr>
+            <a:r>
+              <a:rPr sz="800">
+                <a:solidFill>
+                  <a:srgbClr val="6B7280"/>
+                </a:solidFill>
+                <a:latin typeface="Microsoft JhengHei"/>
+              </a:rPr>
+              <a:t>Krauss, C. (2017). Statistical arbitrage pairs trading strategies: Review and outlook. Journal of Economic Surveys, 31(2), 513–545.</a:t>
+            </a:r>
+          </a:p>
+        </p:txBody>
+      </p:sp>
+    </p:spTree>
+  </p:cSld>
+  <p:clrMapOvr>
+    <a:masterClrMapping/>
+  </p:clrMapOvr>
+</p:sld>
+</file>
+
+<file path=ppt/slides/slide30.xml><?xml version="1.0" encoding="utf-8"?>
 <p:sld xmlns:a="http://schemas.openxmlformats.org/drawingml/2006/main" xmlns:r="http://schemas.openxmlformats.org/officeDocument/2006/relationships" xmlns:p="http://schemas.openxmlformats.org/presentationml/2006/main">
   <p:cSld>
     <p:spTree>
@@ -26204,6 +25261,1036 @@
                 <a:latin typeface="Microsoft JhengHei"/>
               </a:rPr>
               <a:t>簡報所報告的每一個數字皆產自修正後的管線。</a:t>
+            </a:r>
+          </a:p>
+        </p:txBody>
+      </p:sp>
+    </p:spTree>
+  </p:cSld>
+  <p:clrMapOvr>
+    <a:masterClrMapping/>
+  </p:clrMapOvr>
+</p:sld>
+</file>
+
+<file path=ppt/slides/slide31.xml><?xml version="1.0" encoding="utf-8"?>
+<p:sld xmlns:a="http://schemas.openxmlformats.org/drawingml/2006/main" xmlns:r="http://schemas.openxmlformats.org/officeDocument/2006/relationships" xmlns:p="http://schemas.openxmlformats.org/presentationml/2006/main">
+  <p:cSld>
+    <p:spTree>
+      <p:nvGrpSpPr>
+        <p:cNvPr id="1" name=""/>
+        <p:cNvGrpSpPr/>
+        <p:nvPr/>
+      </p:nvGrpSpPr>
+      <p:grpSpPr>
+        <a:xfrm>
+          <a:off x="0" y="0"/>
+          <a:ext cx="0" cy="0"/>
+          <a:chOff x="0" y="0"/>
+          <a:chExt cx="0" cy="0"/>
+        </a:xfrm>
+      </p:grpSpPr>
+      <p:sp>
+        <p:nvSpPr>
+          <p:cNvPr id="2" name="TextBox 1"/>
+          <p:cNvSpPr txBox="1"/>
+          <p:nvPr/>
+        </p:nvSpPr>
+        <p:spPr>
+          <a:xfrm>
+            <a:off x="640080" y="384048"/>
+            <a:ext cx="10881360" cy="274320"/>
+          </a:xfrm>
+          <a:prstGeom prst="rect">
+            <a:avLst/>
+          </a:prstGeom>
+          <a:noFill/>
+        </p:spPr>
+        <p:txBody>
+          <a:bodyPr wrap="square" lIns="0" tIns="0" rIns="0" bIns="0">
+            <a:spAutoFit/>
+          </a:bodyPr>
+          <a:lstStyle/>
+          <a:p>
+            <a:pPr algn="l">
+              <a:lnSpc>
+                <a:spcPct val="125000"/>
+              </a:lnSpc>
+              <a:spcAft>
+                <a:spcPts val="200"/>
+              </a:spcAft>
+            </a:pPr>
+            <a:r>
+              <a:rPr sz="1200" b="1">
+                <a:solidFill>
+                  <a:srgbClr val="6B7280"/>
+                </a:solidFill>
+                <a:latin typeface="Microsoft JhengHei"/>
+              </a:rPr>
+              <a:t>備用　｜　附錄 C.1 Regime 分層（walk-forward）、§4.6.2</a:t>
+            </a:r>
+          </a:p>
+        </p:txBody>
+      </p:sp>
+      <p:sp>
+        <p:nvSpPr>
+          <p:cNvPr id="3" name="TextBox 2"/>
+          <p:cNvSpPr txBox="1"/>
+          <p:nvPr/>
+        </p:nvSpPr>
+        <p:spPr>
+          <a:xfrm>
+            <a:off x="640080" y="658368"/>
+            <a:ext cx="10881360" cy="822960"/>
+          </a:xfrm>
+          <a:prstGeom prst="rect">
+            <a:avLst/>
+          </a:prstGeom>
+          <a:noFill/>
+        </p:spPr>
+        <p:txBody>
+          <a:bodyPr wrap="square" lIns="0" tIns="0" rIns="0" bIns="0">
+            <a:spAutoFit/>
+          </a:bodyPr>
+          <a:lstStyle/>
+          <a:p>
+            <a:pPr algn="l">
+              <a:lnSpc>
+                <a:spcPct val="125000"/>
+              </a:lnSpc>
+              <a:spcAft>
+                <a:spcPts val="0"/>
+              </a:spcAft>
+            </a:pPr>
+            <a:r>
+              <a:rPr sz="3000" b="1">
+                <a:solidFill>
+                  <a:srgbClr val="0B2A5B"/>
+                </a:solidFill>
+                <a:latin typeface="Microsoft JhengHei"/>
+              </a:rPr>
+              <a:t>B5　Regime 分層：獲利集中於何時</a:t>
+            </a:r>
+          </a:p>
+        </p:txBody>
+      </p:sp>
+      <p:sp>
+        <p:nvSpPr>
+          <p:cNvPr id="4" name="TextBox 3"/>
+          <p:cNvSpPr txBox="1"/>
+          <p:nvPr/>
+        </p:nvSpPr>
+        <p:spPr>
+          <a:xfrm>
+            <a:off x="11247120" y="6355080"/>
+            <a:ext cx="457200" cy="274320"/>
+          </a:xfrm>
+          <a:prstGeom prst="rect">
+            <a:avLst/>
+          </a:prstGeom>
+          <a:noFill/>
+        </p:spPr>
+        <p:txBody>
+          <a:bodyPr wrap="square" lIns="0" tIns="0" rIns="0" bIns="0">
+            <a:spAutoFit/>
+          </a:bodyPr>
+          <a:lstStyle/>
+          <a:p>
+            <a:pPr algn="r">
+              <a:lnSpc>
+                <a:spcPct val="125000"/>
+              </a:lnSpc>
+              <a:spcAft>
+                <a:spcPts val="600"/>
+              </a:spcAft>
+            </a:pPr>
+            <a:r>
+              <a:rPr sz="1000" b="0">
+                <a:solidFill>
+                  <a:srgbClr val="6B7280"/>
+                </a:solidFill>
+                <a:latin typeface="Microsoft JhengHei"/>
+              </a:rPr>
+              <a:t>31</a:t>
+            </a:r>
+          </a:p>
+        </p:txBody>
+      </p:sp>
+      <p:graphicFrame>
+        <p:nvGraphicFramePr>
+          <p:cNvPr id="5" name="Table 4"/>
+          <p:cNvGraphicFramePr>
+            <a:graphicFrameLocks noGrp="1"/>
+          </p:cNvGraphicFramePr>
+          <p:nvPr/>
+        </p:nvGraphicFramePr>
+        <p:xfrm>
+          <a:off x="640080" y="1737360"/>
+          <a:ext cx="6949440" cy="1554480"/>
+        </p:xfrm>
+        <a:graphic>
+          <a:graphicData uri="http://schemas.openxmlformats.org/drawingml/2006/table">
+            <a:tbl>
+              <a:tblPr firstRow="1" bandRow="1">
+                <a:tableStyleId>{5C22544A-7EE6-4342-B048-85BDC9FD1C3A}</a:tableStyleId>
+              </a:tblPr>
+              <a:tblGrid>
+                <a:gridCol w="2377440">
+                  <a:extLst>
+                    <a:ext uri="{9D8B030D-6E8A-4147-A177-3AD203B41FA5}">
+                      <a16:colId xmlns:a16="http://schemas.microsoft.com/office/drawing/2014/main" val="20000"/>
+                    </a:ext>
+                  </a:extLst>
+                </a:gridCol>
+                <a:gridCol w="1143000">
+                  <a:extLst>
+                    <a:ext uri="{9D8B030D-6E8A-4147-A177-3AD203B41FA5}">
+                      <a16:colId xmlns:a16="http://schemas.microsoft.com/office/drawing/2014/main" val="20001"/>
+                    </a:ext>
+                  </a:extLst>
+                </a:gridCol>
+                <a:gridCol w="1143000">
+                  <a:extLst>
+                    <a:ext uri="{9D8B030D-6E8A-4147-A177-3AD203B41FA5}">
+                      <a16:colId xmlns:a16="http://schemas.microsoft.com/office/drawing/2014/main" val="20002"/>
+                    </a:ext>
+                  </a:extLst>
+                </a:gridCol>
+                <a:gridCol w="1188720">
+                  <a:extLst>
+                    <a:ext uri="{9D8B030D-6E8A-4147-A177-3AD203B41FA5}">
+                      <a16:colId xmlns:a16="http://schemas.microsoft.com/office/drawing/2014/main" val="20003"/>
+                    </a:ext>
+                  </a:extLst>
+                </a:gridCol>
+                <a:gridCol w="1097280">
+                  <a:extLst>
+                    <a:ext uri="{9D8B030D-6E8A-4147-A177-3AD203B41FA5}">
+                      <a16:colId xmlns:a16="http://schemas.microsoft.com/office/drawing/2014/main" val="20004"/>
+                    </a:ext>
+                  </a:extLst>
+                </a:gridCol>
+              </a:tblGrid>
+              <a:tr h="310896">
+                <a:tc>
+                  <a:txBody>
+                    <a:bodyPr/>
+                    <a:lstStyle/>
+                    <a:p>
+                      <a:pPr algn="l"/>
+                      <a:r>
+                        <a:rPr sz="1250" b="1">
+                          <a:solidFill>
+                            <a:srgbClr val="FFFFFF"/>
+                          </a:solidFill>
+                          <a:latin typeface="Microsoft JhengHei"/>
+                        </a:rPr>
+                        <a:t>臂（walk-forward 門檻）</a:t>
+                      </a:r>
+                    </a:p>
+                  </a:txBody>
+                  <a:tcPr marT="27432" marB="27432">
+                    <a:solidFill>
+                      <a:srgbClr val="0B2A5B"/>
+                    </a:solidFill>
+                  </a:tcPr>
+                </a:tc>
+                <a:tc>
+                  <a:txBody>
+                    <a:bodyPr/>
+                    <a:lstStyle/>
+                    <a:p>
+                      <a:pPr algn="l"/>
+                      <a:r>
+                        <a:rPr sz="1250" b="1">
+                          <a:solidFill>
+                            <a:srgbClr val="FFFFFF"/>
+                          </a:solidFill>
+                          <a:latin typeface="Microsoft JhengHei"/>
+                        </a:rPr>
+                        <a:t>Calm</a:t>
+                      </a:r>
+                    </a:p>
+                  </a:txBody>
+                  <a:tcPr marT="27432" marB="27432">
+                    <a:solidFill>
+                      <a:srgbClr val="0B2A5B"/>
+                    </a:solidFill>
+                  </a:tcPr>
+                </a:tc>
+                <a:tc>
+                  <a:txBody>
+                    <a:bodyPr/>
+                    <a:lstStyle/>
+                    <a:p>
+                      <a:pPr algn="l"/>
+                      <a:r>
+                        <a:rPr sz="1250" b="1">
+                          <a:solidFill>
+                            <a:srgbClr val="FFFFFF"/>
+                          </a:solidFill>
+                          <a:latin typeface="Microsoft JhengHei"/>
+                        </a:rPr>
+                        <a:t>Normal</a:t>
+                      </a:r>
+                    </a:p>
+                  </a:txBody>
+                  <a:tcPr marT="27432" marB="27432">
+                    <a:solidFill>
+                      <a:srgbClr val="0B2A5B"/>
+                    </a:solidFill>
+                  </a:tcPr>
+                </a:tc>
+                <a:tc>
+                  <a:txBody>
+                    <a:bodyPr/>
+                    <a:lstStyle/>
+                    <a:p>
+                      <a:pPr algn="l"/>
+                      <a:r>
+                        <a:rPr sz="1250" b="1">
+                          <a:solidFill>
+                            <a:srgbClr val="FFFFFF"/>
+                          </a:solidFill>
+                          <a:latin typeface="Microsoft JhengHei"/>
+                        </a:rPr>
+                        <a:t>Turbulent</a:t>
+                      </a:r>
+                    </a:p>
+                  </a:txBody>
+                  <a:tcPr marT="27432" marB="27432">
+                    <a:solidFill>
+                      <a:srgbClr val="0B2A5B"/>
+                    </a:solidFill>
+                  </a:tcPr>
+                </a:tc>
+                <a:tc>
+                  <a:txBody>
+                    <a:bodyPr/>
+                    <a:lstStyle/>
+                    <a:p>
+                      <a:pPr algn="l"/>
+                      <a:r>
+                        <a:rPr sz="1250" b="1">
+                          <a:solidFill>
+                            <a:srgbClr val="FFFFFF"/>
+                          </a:solidFill>
+                          <a:latin typeface="Microsoft JhengHei"/>
+                        </a:rPr>
+                        <a:t>動盪期年化</a:t>
+                      </a:r>
+                    </a:p>
+                  </a:txBody>
+                  <a:tcPr marT="27432" marB="27432">
+                    <a:solidFill>
+                      <a:srgbClr val="0B2A5B"/>
+                    </a:solidFill>
+                  </a:tcPr>
+                </a:tc>
+                <a:extLst>
+                  <a:ext uri="{0D108BD9-81ED-4DB2-BD59-A6C34878D82A}">
+                    <a16:rowId xmlns:a16="http://schemas.microsoft.com/office/drawing/2014/main" val="10000"/>
+                  </a:ext>
+                </a:extLst>
+              </a:tr>
+              <a:tr h="310896">
+                <a:tc>
+                  <a:txBody>
+                    <a:bodyPr/>
+                    <a:lstStyle/>
+                    <a:p>
+                      <a:pPr algn="l"/>
+                      <a:r>
+                        <a:rPr sz="1250" b="0">
+                          <a:solidFill>
+                            <a:srgbClr val="1A1A1A"/>
+                          </a:solidFill>
+                          <a:latin typeface="Microsoft JhengHei"/>
+                        </a:rPr>
+                        <a:t>AGG-DTW</a:t>
+                      </a:r>
+                    </a:p>
+                  </a:txBody>
+                  <a:tcPr marT="27432" marB="27432">
+                    <a:solidFill>
+                      <a:srgbClr val="FFFFFF"/>
+                    </a:solidFill>
+                  </a:tcPr>
+                </a:tc>
+                <a:tc>
+                  <a:txBody>
+                    <a:bodyPr/>
+                    <a:lstStyle/>
+                    <a:p>
+                      <a:pPr algn="r"/>
+                      <a:r>
+                        <a:rPr sz="1250" b="0">
+                          <a:solidFill>
+                            <a:srgbClr val="1A1A1A"/>
+                          </a:solidFill>
+                          <a:latin typeface="Microsoft JhengHei"/>
+                        </a:rPr>
+                        <a:t>−0.386</a:t>
+                      </a:r>
+                    </a:p>
+                  </a:txBody>
+                  <a:tcPr marT="27432" marB="27432">
+                    <a:solidFill>
+                      <a:srgbClr val="FFFFFF"/>
+                    </a:solidFill>
+                  </a:tcPr>
+                </a:tc>
+                <a:tc>
+                  <a:txBody>
+                    <a:bodyPr/>
+                    <a:lstStyle/>
+                    <a:p>
+                      <a:pPr algn="r"/>
+                      <a:r>
+                        <a:rPr sz="1250" b="0">
+                          <a:solidFill>
+                            <a:srgbClr val="1A1A1A"/>
+                          </a:solidFill>
+                          <a:latin typeface="Microsoft JhengHei"/>
+                        </a:rPr>
+                        <a:t>−0.616</a:t>
+                      </a:r>
+                    </a:p>
+                  </a:txBody>
+                  <a:tcPr marT="27432" marB="27432">
+                    <a:solidFill>
+                      <a:srgbClr val="FFFFFF"/>
+                    </a:solidFill>
+                  </a:tcPr>
+                </a:tc>
+                <a:tc>
+                  <a:txBody>
+                    <a:bodyPr/>
+                    <a:lstStyle/>
+                    <a:p>
+                      <a:pPr algn="r"/>
+                      <a:r>
+                        <a:rPr sz="1250" b="1">
+                          <a:solidFill>
+                            <a:srgbClr val="1A1A1A"/>
+                          </a:solidFill>
+                          <a:latin typeface="Microsoft JhengHei"/>
+                        </a:rPr>
+                        <a:t>+0.893</a:t>
+                      </a:r>
+                    </a:p>
+                  </a:txBody>
+                  <a:tcPr marT="27432" marB="27432">
+                    <a:solidFill>
+                      <a:srgbClr val="FFFFFF"/>
+                    </a:solidFill>
+                  </a:tcPr>
+                </a:tc>
+                <a:tc>
+                  <a:txBody>
+                    <a:bodyPr/>
+                    <a:lstStyle/>
+                    <a:p>
+                      <a:pPr algn="r"/>
+                      <a:r>
+                        <a:rPr sz="1250" b="0">
+                          <a:solidFill>
+                            <a:srgbClr val="1A1A1A"/>
+                          </a:solidFill>
+                          <a:latin typeface="Microsoft JhengHei"/>
+                        </a:rPr>
+                        <a:t>+3.49%</a:t>
+                      </a:r>
+                    </a:p>
+                  </a:txBody>
+                  <a:tcPr marT="27432" marB="27432">
+                    <a:solidFill>
+                      <a:srgbClr val="FFFFFF"/>
+                    </a:solidFill>
+                  </a:tcPr>
+                </a:tc>
+                <a:extLst>
+                  <a:ext uri="{0D108BD9-81ED-4DB2-BD59-A6C34878D82A}">
+                    <a16:rowId xmlns:a16="http://schemas.microsoft.com/office/drawing/2014/main" val="10001"/>
+                  </a:ext>
+                </a:extLst>
+              </a:tr>
+              <a:tr h="310896">
+                <a:tc>
+                  <a:txBody>
+                    <a:bodyPr/>
+                    <a:lstStyle/>
+                    <a:p>
+                      <a:pPr algn="l"/>
+                      <a:r>
+                        <a:rPr sz="1250" b="0">
+                          <a:solidFill>
+                            <a:srgbClr val="1A1A1A"/>
+                          </a:solidFill>
+                          <a:latin typeface="Microsoft JhengHei"/>
+                        </a:rPr>
+                        <a:t>GICS-DTW</a:t>
+                      </a:r>
+                    </a:p>
+                  </a:txBody>
+                  <a:tcPr marT="27432" marB="27432">
+                    <a:solidFill>
+                      <a:srgbClr val="E8EDF5"/>
+                    </a:solidFill>
+                  </a:tcPr>
+                </a:tc>
+                <a:tc>
+                  <a:txBody>
+                    <a:bodyPr/>
+                    <a:lstStyle/>
+                    <a:p>
+                      <a:pPr algn="r"/>
+                      <a:r>
+                        <a:rPr sz="1250" b="0">
+                          <a:solidFill>
+                            <a:srgbClr val="1A1A1A"/>
+                          </a:solidFill>
+                          <a:latin typeface="Microsoft JhengHei"/>
+                        </a:rPr>
+                        <a:t>−0.282</a:t>
+                      </a:r>
+                    </a:p>
+                  </a:txBody>
+                  <a:tcPr marT="27432" marB="27432">
+                    <a:solidFill>
+                      <a:srgbClr val="E8EDF5"/>
+                    </a:solidFill>
+                  </a:tcPr>
+                </a:tc>
+                <a:tc>
+                  <a:txBody>
+                    <a:bodyPr/>
+                    <a:lstStyle/>
+                    <a:p>
+                      <a:pPr algn="r"/>
+                      <a:r>
+                        <a:rPr sz="1250" b="0">
+                          <a:solidFill>
+                            <a:srgbClr val="1A1A1A"/>
+                          </a:solidFill>
+                          <a:latin typeface="Microsoft JhengHei"/>
+                        </a:rPr>
+                        <a:t>−0.307</a:t>
+                      </a:r>
+                    </a:p>
+                  </a:txBody>
+                  <a:tcPr marT="27432" marB="27432">
+                    <a:solidFill>
+                      <a:srgbClr val="E8EDF5"/>
+                    </a:solidFill>
+                  </a:tcPr>
+                </a:tc>
+                <a:tc>
+                  <a:txBody>
+                    <a:bodyPr/>
+                    <a:lstStyle/>
+                    <a:p>
+                      <a:pPr algn="r"/>
+                      <a:r>
+                        <a:rPr sz="1250" b="1">
+                          <a:solidFill>
+                            <a:srgbClr val="1A1A1A"/>
+                          </a:solidFill>
+                          <a:latin typeface="Microsoft JhengHei"/>
+                        </a:rPr>
+                        <a:t>+0.754</a:t>
+                      </a:r>
+                    </a:p>
+                  </a:txBody>
+                  <a:tcPr marT="27432" marB="27432">
+                    <a:solidFill>
+                      <a:srgbClr val="E8EDF5"/>
+                    </a:solidFill>
+                  </a:tcPr>
+                </a:tc>
+                <a:tc>
+                  <a:txBody>
+                    <a:bodyPr/>
+                    <a:lstStyle/>
+                    <a:p>
+                      <a:pPr algn="r"/>
+                      <a:r>
+                        <a:rPr sz="1250" b="0">
+                          <a:solidFill>
+                            <a:srgbClr val="1A1A1A"/>
+                          </a:solidFill>
+                          <a:latin typeface="Microsoft JhengHei"/>
+                        </a:rPr>
+                        <a:t>+3.34%</a:t>
+                      </a:r>
+                    </a:p>
+                  </a:txBody>
+                  <a:tcPr marT="27432" marB="27432">
+                    <a:solidFill>
+                      <a:srgbClr val="E8EDF5"/>
+                    </a:solidFill>
+                  </a:tcPr>
+                </a:tc>
+                <a:extLst>
+                  <a:ext uri="{0D108BD9-81ED-4DB2-BD59-A6C34878D82A}">
+                    <a16:rowId xmlns:a16="http://schemas.microsoft.com/office/drawing/2014/main" val="10002"/>
+                  </a:ext>
+                </a:extLst>
+              </a:tr>
+              <a:tr h="310896">
+                <a:tc>
+                  <a:txBody>
+                    <a:bodyPr/>
+                    <a:lstStyle/>
+                    <a:p>
+                      <a:pPr algn="l"/>
+                      <a:r>
+                        <a:rPr sz="1250" b="0">
+                          <a:solidFill>
+                            <a:srgbClr val="1A1A1A"/>
+                          </a:solidFill>
+                          <a:latin typeface="Microsoft JhengHei"/>
+                        </a:rPr>
+                        <a:t>GICS-SSD</a:t>
+                      </a:r>
+                    </a:p>
+                  </a:txBody>
+                  <a:tcPr marT="27432" marB="27432">
+                    <a:solidFill>
+                      <a:srgbClr val="FFFFFF"/>
+                    </a:solidFill>
+                  </a:tcPr>
+                </a:tc>
+                <a:tc>
+                  <a:txBody>
+                    <a:bodyPr/>
+                    <a:lstStyle/>
+                    <a:p>
+                      <a:pPr algn="r"/>
+                      <a:r>
+                        <a:rPr sz="1250" b="0">
+                          <a:solidFill>
+                            <a:srgbClr val="1A1A1A"/>
+                          </a:solidFill>
+                          <a:latin typeface="Microsoft JhengHei"/>
+                        </a:rPr>
+                        <a:t>−0.463</a:t>
+                      </a:r>
+                    </a:p>
+                  </a:txBody>
+                  <a:tcPr marT="27432" marB="27432">
+                    <a:solidFill>
+                      <a:srgbClr val="FFFFFF"/>
+                    </a:solidFill>
+                  </a:tcPr>
+                </a:tc>
+                <a:tc>
+                  <a:txBody>
+                    <a:bodyPr/>
+                    <a:lstStyle/>
+                    <a:p>
+                      <a:pPr algn="r"/>
+                      <a:r>
+                        <a:rPr sz="1250" b="0">
+                          <a:solidFill>
+                            <a:srgbClr val="1A1A1A"/>
+                          </a:solidFill>
+                          <a:latin typeface="Microsoft JhengHei"/>
+                        </a:rPr>
+                        <a:t>−0.097</a:t>
+                      </a:r>
+                    </a:p>
+                  </a:txBody>
+                  <a:tcPr marT="27432" marB="27432">
+                    <a:solidFill>
+                      <a:srgbClr val="FFFFFF"/>
+                    </a:solidFill>
+                  </a:tcPr>
+                </a:tc>
+                <a:tc>
+                  <a:txBody>
+                    <a:bodyPr/>
+                    <a:lstStyle/>
+                    <a:p>
+                      <a:pPr algn="r"/>
+                      <a:r>
+                        <a:rPr sz="1250" b="1">
+                          <a:solidFill>
+                            <a:srgbClr val="1A1A1A"/>
+                          </a:solidFill>
+                          <a:latin typeface="Microsoft JhengHei"/>
+                        </a:rPr>
+                        <a:t>+0.737</a:t>
+                      </a:r>
+                    </a:p>
+                  </a:txBody>
+                  <a:tcPr marT="27432" marB="27432">
+                    <a:solidFill>
+                      <a:srgbClr val="FFFFFF"/>
+                    </a:solidFill>
+                  </a:tcPr>
+                </a:tc>
+                <a:tc>
+                  <a:txBody>
+                    <a:bodyPr/>
+                    <a:lstStyle/>
+                    <a:p>
+                      <a:pPr algn="r"/>
+                      <a:r>
+                        <a:rPr sz="1250" b="0">
+                          <a:solidFill>
+                            <a:srgbClr val="1A1A1A"/>
+                          </a:solidFill>
+                          <a:latin typeface="Microsoft JhengHei"/>
+                        </a:rPr>
+                        <a:t>+3.33%</a:t>
+                      </a:r>
+                    </a:p>
+                  </a:txBody>
+                  <a:tcPr marT="27432" marB="27432">
+                    <a:solidFill>
+                      <a:srgbClr val="FFFFFF"/>
+                    </a:solidFill>
+                  </a:tcPr>
+                </a:tc>
+                <a:extLst>
+                  <a:ext uri="{0D108BD9-81ED-4DB2-BD59-A6C34878D82A}">
+                    <a16:rowId xmlns:a16="http://schemas.microsoft.com/office/drawing/2014/main" val="10003"/>
+                  </a:ext>
+                </a:extLst>
+              </a:tr>
+              <a:tr h="310896">
+                <a:tc>
+                  <a:txBody>
+                    <a:bodyPr/>
+                    <a:lstStyle/>
+                    <a:p>
+                      <a:pPr algn="l"/>
+                      <a:r>
+                        <a:rPr sz="1250" b="0">
+                          <a:solidFill>
+                            <a:srgbClr val="1A1A1A"/>
+                          </a:solidFill>
+                          <a:latin typeface="Microsoft JhengHei"/>
+                        </a:rPr>
+                        <a:t>GICS-SDP</a:t>
+                      </a:r>
+                    </a:p>
+                  </a:txBody>
+                  <a:tcPr marT="27432" marB="27432">
+                    <a:solidFill>
+                      <a:srgbClr val="E8EDF5"/>
+                    </a:solidFill>
+                  </a:tcPr>
+                </a:tc>
+                <a:tc>
+                  <a:txBody>
+                    <a:bodyPr/>
+                    <a:lstStyle/>
+                    <a:p>
+                      <a:pPr algn="r"/>
+                      <a:r>
+                        <a:rPr sz="1250" b="0">
+                          <a:solidFill>
+                            <a:srgbClr val="1A1A1A"/>
+                          </a:solidFill>
+                          <a:latin typeface="Microsoft JhengHei"/>
+                        </a:rPr>
+                        <a:t>−0.324</a:t>
+                      </a:r>
+                    </a:p>
+                  </a:txBody>
+                  <a:tcPr marT="27432" marB="27432">
+                    <a:solidFill>
+                      <a:srgbClr val="E8EDF5"/>
+                    </a:solidFill>
+                  </a:tcPr>
+                </a:tc>
+                <a:tc>
+                  <a:txBody>
+                    <a:bodyPr/>
+                    <a:lstStyle/>
+                    <a:p>
+                      <a:pPr algn="r"/>
+                      <a:r>
+                        <a:rPr sz="1250" b="0">
+                          <a:solidFill>
+                            <a:srgbClr val="1A1A1A"/>
+                          </a:solidFill>
+                          <a:latin typeface="Microsoft JhengHei"/>
+                        </a:rPr>
+                        <a:t>−0.058</a:t>
+                      </a:r>
+                    </a:p>
+                  </a:txBody>
+                  <a:tcPr marT="27432" marB="27432">
+                    <a:solidFill>
+                      <a:srgbClr val="E8EDF5"/>
+                    </a:solidFill>
+                  </a:tcPr>
+                </a:tc>
+                <a:tc>
+                  <a:txBody>
+                    <a:bodyPr/>
+                    <a:lstStyle/>
+                    <a:p>
+                      <a:pPr algn="r"/>
+                      <a:r>
+                        <a:rPr sz="1250" b="0">
+                          <a:solidFill>
+                            <a:srgbClr val="1A1A1A"/>
+                          </a:solidFill>
+                          <a:latin typeface="Microsoft JhengHei"/>
+                        </a:rPr>
+                        <a:t>+0.702</a:t>
+                      </a:r>
+                    </a:p>
+                  </a:txBody>
+                  <a:tcPr marT="27432" marB="27432">
+                    <a:solidFill>
+                      <a:srgbClr val="E8EDF5"/>
+                    </a:solidFill>
+                  </a:tcPr>
+                </a:tc>
+                <a:tc>
+                  <a:txBody>
+                    <a:bodyPr/>
+                    <a:lstStyle/>
+                    <a:p>
+                      <a:pPr algn="r"/>
+                      <a:r>
+                        <a:rPr sz="1250" b="0">
+                          <a:solidFill>
+                            <a:srgbClr val="1A1A1A"/>
+                          </a:solidFill>
+                          <a:latin typeface="Microsoft JhengHei"/>
+                        </a:rPr>
+                        <a:t>+3.26%</a:t>
+                      </a:r>
+                    </a:p>
+                  </a:txBody>
+                  <a:tcPr marT="27432" marB="27432">
+                    <a:solidFill>
+                      <a:srgbClr val="E8EDF5"/>
+                    </a:solidFill>
+                  </a:tcPr>
+                </a:tc>
+                <a:extLst>
+                  <a:ext uri="{0D108BD9-81ED-4DB2-BD59-A6C34878D82A}">
+                    <a16:rowId xmlns:a16="http://schemas.microsoft.com/office/drawing/2014/main" val="10004"/>
+                  </a:ext>
+                </a:extLst>
+              </a:tr>
+            </a:tbl>
+          </a:graphicData>
+        </a:graphic>
+      </p:graphicFrame>
+      <p:sp>
+        <p:nvSpPr>
+          <p:cNvPr id="6" name="Rounded Rectangle 5"/>
+          <p:cNvSpPr/>
+          <p:nvPr/>
+        </p:nvSpPr>
+        <p:spPr>
+          <a:xfrm>
+            <a:off x="7863840" y="1737360"/>
+            <a:ext cx="3657600" cy="3840480"/>
+          </a:xfrm>
+          <a:prstGeom prst="roundRect">
+            <a:avLst>
+              <a:gd name="adj" fmla="val 6000"/>
+            </a:avLst>
+          </a:prstGeom>
+          <a:solidFill>
+            <a:srgbClr val="0B2A5B"/>
+          </a:solidFill>
+          <a:ln>
+            <a:noFill/>
+          </a:ln>
+          <a:effectLst/>
+        </p:spPr>
+        <p:style>
+          <a:lnRef idx="1">
+            <a:schemeClr val="accent1"/>
+          </a:lnRef>
+          <a:fillRef idx="3">
+            <a:schemeClr val="accent1"/>
+          </a:fillRef>
+          <a:effectRef idx="2">
+            <a:schemeClr val="accent1"/>
+          </a:effectRef>
+          <a:fontRef idx="minor">
+            <a:schemeClr val="lt1"/>
+          </a:fontRef>
+        </p:style>
+        <p:txBody>
+          <a:bodyPr wrap="square" lIns="201168" tIns="146304" rIns="201168" bIns="146304" rtlCol="0" anchor="t"/>
+          <a:lstStyle/>
+          <a:p>
+            <a:pPr algn="l">
+              <a:lnSpc>
+                <a:spcPct val="125000"/>
+              </a:lnSpc>
+              <a:spcAft>
+                <a:spcPts val="800"/>
+              </a:spcAft>
+            </a:pPr>
+            <a:r>
+              <a:rPr sz="1600" b="1">
+                <a:solidFill>
+                  <a:srgbClr val="FFFFFF"/>
+                </a:solidFill>
+                <a:latin typeface="Microsoft JhengHei"/>
+              </a:rPr>
+              <a:t>型態一致，但不可據以建立策略</a:t>
+            </a:r>
+          </a:p>
+          <a:p>
+            <a:pPr algn="l">
+              <a:lnSpc>
+                <a:spcPct val="125000"/>
+              </a:lnSpc>
+              <a:spcAft>
+                <a:spcPts val="800"/>
+              </a:spcAft>
+            </a:pPr>
+            <a:r>
+              <a:rPr sz="1300" b="0">
+                <a:solidFill>
+                  <a:srgbClr val="E8EDF5"/>
+                </a:solidFill>
+                <a:latin typeface="Microsoft JhengHei"/>
+              </a:rPr>
+              <a:t>12 個臂</a:t>
+            </a:r>
+            <a:r>
+              <a:rPr sz="1300" b="1">
+                <a:solidFill>
+                  <a:srgbClr val="E8EDF5"/>
+                </a:solidFill>
+                <a:latin typeface="Microsoft JhengHei"/>
+              </a:rPr>
+              <a:t>全部</a:t>
+            </a:r>
+            <a:r>
+              <a:rPr sz="1300" b="0">
+                <a:solidFill>
+                  <a:srgbClr val="E8EDF5"/>
+                </a:solidFill>
+                <a:latin typeface="Microsoft JhengHei"/>
+              </a:rPr>
+              <a:t>呈同一型態：動盪期為正，平靜與一般期為負。</a:t>
+            </a:r>
+          </a:p>
+          <a:p>
+            <a:pPr algn="l">
+              <a:lnSpc>
+                <a:spcPct val="125000"/>
+              </a:lnSpc>
+              <a:spcAft>
+                <a:spcPts val="800"/>
+              </a:spcAft>
+            </a:pPr>
+            <a:r>
+              <a:rPr sz="1300" b="0">
+                <a:solidFill>
+                  <a:srgbClr val="E8EDF5"/>
+                </a:solidFill>
+                <a:latin typeface="Microsoft JhengHei"/>
+              </a:rPr>
+              <a:t>但動盪期報酬</a:t>
+            </a:r>
+            <a:r>
+              <a:rPr sz="1300" b="1">
+                <a:solidFill>
+                  <a:srgbClr val="E8EDF5"/>
+                </a:solidFill>
+                <a:latin typeface="Microsoft JhengHei"/>
+              </a:rPr>
+              <a:t>極度集中</a:t>
+            </a:r>
+            <a:r>
+              <a:rPr sz="1300" b="0">
+                <a:solidFill>
+                  <a:srgbClr val="E8EDF5"/>
+                </a:solidFill>
+                <a:latin typeface="Microsoft JhengHei"/>
+              </a:rPr>
+              <a:t>：2008–2009 兩年貢獻全部動盪期報酬的 </a:t>
+            </a:r>
+            <a:r>
+              <a:rPr sz="1300" b="1">
+                <a:solidFill>
+                  <a:srgbClr val="E8EDF5"/>
+                </a:solidFill>
+                <a:latin typeface="Microsoft JhengHei"/>
+              </a:rPr>
+              <a:t>54%–87%</a:t>
+            </a:r>
+            <a:r>
+              <a:rPr sz="1300" b="0">
+                <a:solidFill>
+                  <a:srgbClr val="E8EDF5"/>
+                </a:solidFill>
+                <a:latin typeface="Microsoft JhengHei"/>
+              </a:rPr>
+              <a:t>。</a:t>
+            </a:r>
+          </a:p>
+          <a:p>
+            <a:pPr algn="l">
+              <a:lnSpc>
+                <a:spcPct val="125000"/>
+              </a:lnSpc>
+              <a:spcAft>
+                <a:spcPts val="800"/>
+              </a:spcAft>
+            </a:pPr>
+            <a:r>
+              <a:rPr sz="1300" b="0">
+                <a:solidFill>
+                  <a:srgbClr val="E8EDF5"/>
+                </a:solidFill>
+                <a:latin typeface="Microsoft JhengHei"/>
+              </a:rPr>
+              <a:t>2022 年動盪日數最多（225 日）卻僅 −0.18% ~ +1.45%——因其波動源於</a:t>
+            </a:r>
+            <a:r>
+              <a:rPr sz="1300" b="1">
+                <a:solidFill>
+                  <a:srgbClr val="E8EDF5"/>
+                </a:solidFill>
+                <a:latin typeface="Microsoft JhengHei"/>
+              </a:rPr>
+              <a:t>趨勢性方向移動</a:t>
+            </a:r>
+            <a:r>
+              <a:rPr sz="1300" b="0">
+                <a:solidFill>
+                  <a:srgbClr val="E8EDF5"/>
+                </a:solidFill>
+                <a:latin typeface="Microsoft JhengHei"/>
+              </a:rPr>
+              <a:t>，價差偏離後不必然回歸。</a:t>
+            </a:r>
+          </a:p>
+          <a:p>
+            <a:pPr algn="l">
+              <a:lnSpc>
+                <a:spcPct val="125000"/>
+              </a:lnSpc>
+              <a:spcAft>
+                <a:spcPts val="0"/>
+              </a:spcAft>
+            </a:pPr>
+            <a:r>
+              <a:rPr sz="1300" b="1">
+                <a:solidFill>
+                  <a:srgbClr val="FFFFFF"/>
+                </a:solidFill>
+                <a:latin typeface="Microsoft JhengHei"/>
+              </a:rPr>
+              <a:t>策略實質上在賣出波動率的均值回歸選擇權。</a:t>
             </a:r>
           </a:p>
         </p:txBody>
@@ -27794,6 +27881,478 @@
 </file>
 
 <file path=ppt/slides/slide6.xml><?xml version="1.0" encoding="utf-8"?>
+<p:sld xmlns:a="http://schemas.openxmlformats.org/drawingml/2006/main" xmlns:r="http://schemas.openxmlformats.org/officeDocument/2006/relationships" xmlns:p="http://schemas.openxmlformats.org/presentationml/2006/main">
+  <p:cSld>
+    <p:spTree>
+      <p:nvGrpSpPr>
+        <p:cNvPr id="1" name=""/>
+        <p:cNvGrpSpPr/>
+        <p:nvPr/>
+      </p:nvGrpSpPr>
+      <p:grpSpPr>
+        <a:xfrm>
+          <a:off x="0" y="0"/>
+          <a:ext cx="0" cy="0"/>
+          <a:chOff x="0" y="0"/>
+          <a:chExt cx="0" cy="0"/>
+        </a:xfrm>
+      </p:grpSpPr>
+      <p:sp>
+        <p:nvSpPr>
+          <p:cNvPr id="2" name="TextBox 1"/>
+          <p:cNvSpPr txBox="1"/>
+          <p:nvPr/>
+        </p:nvSpPr>
+        <p:spPr>
+          <a:xfrm>
+            <a:off x="640080" y="384048"/>
+            <a:ext cx="10881360" cy="274320"/>
+          </a:xfrm>
+          <a:prstGeom prst="rect">
+            <a:avLst/>
+          </a:prstGeom>
+          <a:noFill/>
+        </p:spPr>
+        <p:txBody>
+          <a:bodyPr wrap="square" lIns="0" tIns="0" rIns="0" bIns="0">
+            <a:spAutoFit/>
+          </a:bodyPr>
+          <a:lstStyle/>
+          <a:p>
+            <a:pPr algn="l">
+              <a:lnSpc>
+                <a:spcPct val="125000"/>
+              </a:lnSpc>
+              <a:spcAft>
+                <a:spcPts val="200"/>
+              </a:spcAft>
+            </a:pPr>
+            <a:r>
+              <a:rPr sz="1200" b="1">
+                <a:solidFill>
+                  <a:srgbClr val="6B7280"/>
+                </a:solidFill>
+                <a:latin typeface="Microsoft JhengHei"/>
+              </a:rPr>
+              <a:t>研究問題　｜　§1.2.3 研究問題</a:t>
+            </a:r>
+          </a:p>
+        </p:txBody>
+      </p:sp>
+      <p:sp>
+        <p:nvSpPr>
+          <p:cNvPr id="3" name="TextBox 2"/>
+          <p:cNvSpPr txBox="1"/>
+          <p:nvPr/>
+        </p:nvSpPr>
+        <p:spPr>
+          <a:xfrm>
+            <a:off x="640080" y="658368"/>
+            <a:ext cx="10881360" cy="822960"/>
+          </a:xfrm>
+          <a:prstGeom prst="rect">
+            <a:avLst/>
+          </a:prstGeom>
+          <a:noFill/>
+        </p:spPr>
+        <p:txBody>
+          <a:bodyPr wrap="square" lIns="0" tIns="0" rIns="0" bIns="0">
+            <a:spAutoFit/>
+          </a:bodyPr>
+          <a:lstStyle/>
+          <a:p>
+            <a:pPr algn="l">
+              <a:lnSpc>
+                <a:spcPct val="125000"/>
+              </a:lnSpc>
+              <a:spcAft>
+                <a:spcPts val="0"/>
+              </a:spcAft>
+            </a:pPr>
+            <a:r>
+              <a:rPr sz="3000" b="1">
+                <a:solidFill>
+                  <a:srgbClr val="0B2A5B"/>
+                </a:solidFill>
+                <a:latin typeface="Microsoft JhengHei"/>
+              </a:rPr>
+              <a:t>三個研究問題</a:t>
+            </a:r>
+          </a:p>
+        </p:txBody>
+      </p:sp>
+      <p:sp>
+        <p:nvSpPr>
+          <p:cNvPr id="4" name="TextBox 3"/>
+          <p:cNvSpPr txBox="1"/>
+          <p:nvPr/>
+        </p:nvSpPr>
+        <p:spPr>
+          <a:xfrm>
+            <a:off x="11247120" y="6355080"/>
+            <a:ext cx="457200" cy="274320"/>
+          </a:xfrm>
+          <a:prstGeom prst="rect">
+            <a:avLst/>
+          </a:prstGeom>
+          <a:noFill/>
+        </p:spPr>
+        <p:txBody>
+          <a:bodyPr wrap="square" lIns="0" tIns="0" rIns="0" bIns="0">
+            <a:spAutoFit/>
+          </a:bodyPr>
+          <a:lstStyle/>
+          <a:p>
+            <a:pPr algn="r">
+              <a:lnSpc>
+                <a:spcPct val="125000"/>
+              </a:lnSpc>
+              <a:spcAft>
+                <a:spcPts val="600"/>
+              </a:spcAft>
+            </a:pPr>
+            <a:r>
+              <a:rPr sz="1000" b="0">
+                <a:solidFill>
+                  <a:srgbClr val="6B7280"/>
+                </a:solidFill>
+                <a:latin typeface="Microsoft JhengHei"/>
+              </a:rPr>
+              <a:t>6</a:t>
+            </a:r>
+          </a:p>
+        </p:txBody>
+      </p:sp>
+      <p:sp>
+        <p:nvSpPr>
+          <p:cNvPr id="5" name="TextBox 4"/>
+          <p:cNvSpPr txBox="1"/>
+          <p:nvPr/>
+        </p:nvSpPr>
+        <p:spPr>
+          <a:xfrm>
+            <a:off x="640080" y="1737360"/>
+            <a:ext cx="1005840" cy="731520"/>
+          </a:xfrm>
+          <a:prstGeom prst="rect">
+            <a:avLst/>
+          </a:prstGeom>
+          <a:noFill/>
+        </p:spPr>
+        <p:txBody>
+          <a:bodyPr wrap="square" lIns="0" tIns="0" rIns="0" bIns="0">
+            <a:spAutoFit/>
+          </a:bodyPr>
+          <a:lstStyle/>
+          <a:p>
+            <a:pPr algn="l">
+              <a:lnSpc>
+                <a:spcPct val="125000"/>
+              </a:lnSpc>
+              <a:spcAft>
+                <a:spcPts val="600"/>
+              </a:spcAft>
+            </a:pPr>
+            <a:r>
+              <a:rPr sz="3000" b="1">
+                <a:solidFill>
+                  <a:srgbClr val="C4553B"/>
+                </a:solidFill>
+                <a:latin typeface="Microsoft JhengHei"/>
+              </a:rPr>
+              <a:t>Q1</a:t>
+            </a:r>
+          </a:p>
+        </p:txBody>
+      </p:sp>
+      <p:sp>
+        <p:nvSpPr>
+          <p:cNvPr id="6" name="TextBox 5"/>
+          <p:cNvSpPr txBox="1"/>
+          <p:nvPr/>
+        </p:nvSpPr>
+        <p:spPr>
+          <a:xfrm>
+            <a:off x="1737360" y="1792224"/>
+            <a:ext cx="9784080" cy="1097280"/>
+          </a:xfrm>
+          <a:prstGeom prst="rect">
+            <a:avLst/>
+          </a:prstGeom>
+          <a:noFill/>
+        </p:spPr>
+        <p:txBody>
+          <a:bodyPr wrap="square" lIns="0" tIns="0" rIns="0" bIns="0">
+            <a:spAutoFit/>
+          </a:bodyPr>
+          <a:lstStyle/>
+          <a:p>
+            <a:pPr algn="l">
+              <a:lnSpc>
+                <a:spcPct val="125000"/>
+              </a:lnSpc>
+              <a:spcAft>
+                <a:spcPts val="0"/>
+              </a:spcAft>
+            </a:pPr>
+            <a:r>
+              <a:rPr sz="1500" b="1">
+                <a:solidFill>
+                  <a:srgbClr val="1A1A1A"/>
+                </a:solidFill>
+                <a:latin typeface="Microsoft JhengHei"/>
+              </a:rPr>
+              <a:t>動作空間是不是關鍵約束？</a:t>
+            </a:r>
+            <a:r>
+              <a:rPr sz="1500" b="0">
+                <a:solidFill>
+                  <a:srgbClr val="1A1A1A"/>
+                </a:solidFill>
+                <a:latin typeface="Microsoft JhengHei"/>
+              </a:rPr>
+              <a:t>　在其餘一切完全相同的條件下，把每期決策次數從 0、1 放大到 126，會不會系統性造成過度交易與績效劣化？</a:t>
+            </a:r>
+          </a:p>
+        </p:txBody>
+      </p:sp>
+      <p:sp>
+        <p:nvSpPr>
+          <p:cNvPr id="7" name="TextBox 6"/>
+          <p:cNvSpPr txBox="1"/>
+          <p:nvPr/>
+        </p:nvSpPr>
+        <p:spPr>
+          <a:xfrm>
+            <a:off x="640080" y="3063240"/>
+            <a:ext cx="1005840" cy="731520"/>
+          </a:xfrm>
+          <a:prstGeom prst="rect">
+            <a:avLst/>
+          </a:prstGeom>
+          <a:noFill/>
+        </p:spPr>
+        <p:txBody>
+          <a:bodyPr wrap="square" lIns="0" tIns="0" rIns="0" bIns="0">
+            <a:spAutoFit/>
+          </a:bodyPr>
+          <a:lstStyle/>
+          <a:p>
+            <a:pPr algn="l">
+              <a:lnSpc>
+                <a:spcPct val="125000"/>
+              </a:lnSpc>
+              <a:spcAft>
+                <a:spcPts val="600"/>
+              </a:spcAft>
+            </a:pPr>
+            <a:r>
+              <a:rPr sz="3000" b="1">
+                <a:solidFill>
+                  <a:srgbClr val="0B2A5B"/>
+                </a:solidFill>
+                <a:latin typeface="Microsoft JhengHei"/>
+              </a:rPr>
+              <a:t>Q2</a:t>
+            </a:r>
+          </a:p>
+        </p:txBody>
+      </p:sp>
+      <p:sp>
+        <p:nvSpPr>
+          <p:cNvPr id="8" name="TextBox 7"/>
+          <p:cNvSpPr txBox="1"/>
+          <p:nvPr/>
+        </p:nvSpPr>
+        <p:spPr>
+          <a:xfrm>
+            <a:off x="1737360" y="3118104"/>
+            <a:ext cx="9784080" cy="1097280"/>
+          </a:xfrm>
+          <a:prstGeom prst="rect">
+            <a:avLst/>
+          </a:prstGeom>
+          <a:noFill/>
+        </p:spPr>
+        <p:txBody>
+          <a:bodyPr wrap="square" lIns="0" tIns="0" rIns="0" bIns="0">
+            <a:spAutoFit/>
+          </a:bodyPr>
+          <a:lstStyle/>
+          <a:p>
+            <a:pPr algn="l">
+              <a:lnSpc>
+                <a:spcPct val="125000"/>
+              </a:lnSpc>
+              <a:spcAft>
+                <a:spcPts val="0"/>
+              </a:spcAft>
+            </a:pPr>
+            <a:r>
+              <a:rPr sz="1500" b="1">
+                <a:solidFill>
+                  <a:srgbClr val="1A1A1A"/>
+                </a:solidFill>
+                <a:latin typeface="Microsoft JhengHei"/>
+              </a:rPr>
+              <a:t>逐對辨識能力存在嗎？</a:t>
+            </a:r>
+            <a:r>
+              <a:rPr sz="1500" b="0">
+                <a:solidFill>
+                  <a:srgbClr val="1A1A1A"/>
+                </a:solidFill>
+                <a:latin typeface="Microsoft JhengHei"/>
+              </a:rPr>
+              <a:t>　把動作空間縮到每期選一組門檻之後，模型能不能辨識出「這一組配對該用哪個門檻」——也就是贏過一個完全不辨識的常數？</a:t>
+            </a:r>
+          </a:p>
+        </p:txBody>
+      </p:sp>
+      <p:sp>
+        <p:nvSpPr>
+          <p:cNvPr id="9" name="TextBox 8"/>
+          <p:cNvSpPr txBox="1"/>
+          <p:nvPr/>
+        </p:nvSpPr>
+        <p:spPr>
+          <a:xfrm>
+            <a:off x="640080" y="4389120"/>
+            <a:ext cx="1005840" cy="731520"/>
+          </a:xfrm>
+          <a:prstGeom prst="rect">
+            <a:avLst/>
+          </a:prstGeom>
+          <a:noFill/>
+        </p:spPr>
+        <p:txBody>
+          <a:bodyPr wrap="square" lIns="0" tIns="0" rIns="0" bIns="0">
+            <a:spAutoFit/>
+          </a:bodyPr>
+          <a:lstStyle/>
+          <a:p>
+            <a:pPr algn="l">
+              <a:lnSpc>
+                <a:spcPct val="125000"/>
+              </a:lnSpc>
+              <a:spcAft>
+                <a:spcPts val="600"/>
+              </a:spcAft>
+            </a:pPr>
+            <a:r>
+              <a:rPr sz="3000" b="1">
+                <a:solidFill>
+                  <a:srgbClr val="0B2A5B"/>
+                </a:solidFill>
+                <a:latin typeface="Microsoft JhengHei"/>
+              </a:rPr>
+              <a:t>Q3</a:t>
+            </a:r>
+          </a:p>
+        </p:txBody>
+      </p:sp>
+      <p:sp>
+        <p:nvSpPr>
+          <p:cNvPr id="10" name="TextBox 9"/>
+          <p:cNvSpPr txBox="1"/>
+          <p:nvPr/>
+        </p:nvSpPr>
+        <p:spPr>
+          <a:xfrm>
+            <a:off x="1737360" y="4443984"/>
+            <a:ext cx="9784080" cy="1097280"/>
+          </a:xfrm>
+          <a:prstGeom prst="rect">
+            <a:avLst/>
+          </a:prstGeom>
+          <a:noFill/>
+        </p:spPr>
+        <p:txBody>
+          <a:bodyPr wrap="square" lIns="0" tIns="0" rIns="0" bIns="0">
+            <a:spAutoFit/>
+          </a:bodyPr>
+          <a:lstStyle/>
+          <a:p>
+            <a:pPr algn="l">
+              <a:lnSpc>
+                <a:spcPct val="125000"/>
+              </a:lnSpc>
+              <a:spcAft>
+                <a:spcPts val="0"/>
+              </a:spcAft>
+            </a:pPr>
+            <a:r>
+              <a:rPr sz="1500" b="1">
+                <a:solidFill>
+                  <a:srgbClr val="1A1A1A"/>
+                </a:solidFill>
+                <a:latin typeface="Microsoft JhengHei"/>
+              </a:rPr>
+              <a:t>相對固定門檻有效嗎？它的界線在哪？</a:t>
+            </a:r>
+            <a:r>
+              <a:rPr sz="1500" b="0">
+                <a:solidFill>
+                  <a:srgbClr val="1A1A1A"/>
+                </a:solidFill>
+                <a:latin typeface="Microsoft JhengHei"/>
+              </a:rPr>
+              <a:t>　門檻選擇式相對固定門檻是否有穩健優勢；而該優勢在哪種報酬口徑下成立、哪種口徑下不足以宣稱可交易？</a:t>
+            </a:r>
+          </a:p>
+        </p:txBody>
+      </p:sp>
+      <p:sp>
+        <p:nvSpPr>
+          <p:cNvPr id="11" name="TextBox 10"/>
+          <p:cNvSpPr txBox="1"/>
+          <p:nvPr/>
+        </p:nvSpPr>
+        <p:spPr>
+          <a:xfrm>
+            <a:off x="640080" y="5760720"/>
+            <a:ext cx="10881360" cy="457200"/>
+          </a:xfrm>
+          <a:prstGeom prst="rect">
+            <a:avLst/>
+          </a:prstGeom>
+          <a:noFill/>
+        </p:spPr>
+        <p:txBody>
+          <a:bodyPr wrap="square" lIns="0" tIns="0" rIns="0" bIns="0">
+            <a:spAutoFit/>
+          </a:bodyPr>
+          <a:lstStyle/>
+          <a:p>
+            <a:pPr algn="l">
+              <a:lnSpc>
+                <a:spcPct val="125000"/>
+              </a:lnSpc>
+              <a:spcAft>
+                <a:spcPts val="600"/>
+              </a:spcAft>
+            </a:pPr>
+            <a:r>
+              <a:rPr sz="1500" b="1">
+                <a:solidFill>
+                  <a:srgbClr val="C4553B"/>
+                </a:solidFill>
+                <a:latin typeface="Microsoft JhengHei"/>
+              </a:rPr>
+              <a:t>三個問題會得到三個不一致的答案——而這個不一致本身就是本研究的發現。</a:t>
+            </a:r>
+          </a:p>
+        </p:txBody>
+      </p:sp>
+    </p:spTree>
+  </p:cSld>
+  <p:clrMapOvr>
+    <a:masterClrMapping/>
+  </p:clrMapOvr>
+</p:sld>
+</file>
+
+<file path=ppt/slides/slide7.xml><?xml version="1.0" encoding="utf-8"?>
 <p:sld xmlns:a="http://schemas.openxmlformats.org/drawingml/2006/main" xmlns:r="http://schemas.openxmlformats.org/officeDocument/2006/relationships" xmlns:p="http://schemas.openxmlformats.org/presentationml/2006/main">
   <p:cSld>
     <p:spTree>
@@ -28562,7 +29121,7 @@
 </p:sld>
 </file>
 
-<file path=ppt/slides/slide7.xml><?xml version="1.0" encoding="utf-8"?>
+<file path=ppt/slides/slide8.xml><?xml version="1.0" encoding="utf-8"?>
 <p:sld xmlns:a="http://schemas.openxmlformats.org/drawingml/2006/main" xmlns:r="http://schemas.openxmlformats.org/officeDocument/2006/relationships" xmlns:p="http://schemas.openxmlformats.org/presentationml/2006/main">
   <p:cSld>
     <p:spTree>
@@ -28980,478 +29539,6 @@
                 <a:latin typeface="Microsoft JhengHei"/>
               </a:rPr>
               <a:t>這是一個可以用實驗回答的問題。本研究就是去做這個實驗。</a:t>
-            </a:r>
-          </a:p>
-        </p:txBody>
-      </p:sp>
-    </p:spTree>
-  </p:cSld>
-  <p:clrMapOvr>
-    <a:masterClrMapping/>
-  </p:clrMapOvr>
-</p:sld>
-</file>
-
-<file path=ppt/slides/slide8.xml><?xml version="1.0" encoding="utf-8"?>
-<p:sld xmlns:a="http://schemas.openxmlformats.org/drawingml/2006/main" xmlns:r="http://schemas.openxmlformats.org/officeDocument/2006/relationships" xmlns:p="http://schemas.openxmlformats.org/presentationml/2006/main">
-  <p:cSld>
-    <p:spTree>
-      <p:nvGrpSpPr>
-        <p:cNvPr id="1" name=""/>
-        <p:cNvGrpSpPr/>
-        <p:nvPr/>
-      </p:nvGrpSpPr>
-      <p:grpSpPr>
-        <a:xfrm>
-          <a:off x="0" y="0"/>
-          <a:ext cx="0" cy="0"/>
-          <a:chOff x="0" y="0"/>
-          <a:chExt cx="0" cy="0"/>
-        </a:xfrm>
-      </p:grpSpPr>
-      <p:sp>
-        <p:nvSpPr>
-          <p:cNvPr id="2" name="TextBox 1"/>
-          <p:cNvSpPr txBox="1"/>
-          <p:nvPr/>
-        </p:nvSpPr>
-        <p:spPr>
-          <a:xfrm>
-            <a:off x="640080" y="384048"/>
-            <a:ext cx="10881360" cy="274320"/>
-          </a:xfrm>
-          <a:prstGeom prst="rect">
-            <a:avLst/>
-          </a:prstGeom>
-          <a:noFill/>
-        </p:spPr>
-        <p:txBody>
-          <a:bodyPr wrap="square" lIns="0" tIns="0" rIns="0" bIns="0">
-            <a:spAutoFit/>
-          </a:bodyPr>
-          <a:lstStyle/>
-          <a:p>
-            <a:pPr algn="l">
-              <a:lnSpc>
-                <a:spcPct val="125000"/>
-              </a:lnSpc>
-              <a:spcAft>
-                <a:spcPts val="200"/>
-              </a:spcAft>
-            </a:pPr>
-            <a:r>
-              <a:rPr sz="1200" b="1">
-                <a:solidFill>
-                  <a:srgbClr val="6B7280"/>
-                </a:solidFill>
-                <a:latin typeface="Microsoft JhengHei"/>
-              </a:rPr>
-              <a:t>研究問題　｜　§1.2.3 研究問題</a:t>
-            </a:r>
-          </a:p>
-        </p:txBody>
-      </p:sp>
-      <p:sp>
-        <p:nvSpPr>
-          <p:cNvPr id="3" name="TextBox 2"/>
-          <p:cNvSpPr txBox="1"/>
-          <p:nvPr/>
-        </p:nvSpPr>
-        <p:spPr>
-          <a:xfrm>
-            <a:off x="640080" y="658368"/>
-            <a:ext cx="10881360" cy="822960"/>
-          </a:xfrm>
-          <a:prstGeom prst="rect">
-            <a:avLst/>
-          </a:prstGeom>
-          <a:noFill/>
-        </p:spPr>
-        <p:txBody>
-          <a:bodyPr wrap="square" lIns="0" tIns="0" rIns="0" bIns="0">
-            <a:spAutoFit/>
-          </a:bodyPr>
-          <a:lstStyle/>
-          <a:p>
-            <a:pPr algn="l">
-              <a:lnSpc>
-                <a:spcPct val="125000"/>
-              </a:lnSpc>
-              <a:spcAft>
-                <a:spcPts val="0"/>
-              </a:spcAft>
-            </a:pPr>
-            <a:r>
-              <a:rPr sz="3000" b="1">
-                <a:solidFill>
-                  <a:srgbClr val="0B2A5B"/>
-                </a:solidFill>
-                <a:latin typeface="Microsoft JhengHei"/>
-              </a:rPr>
-              <a:t>三個研究問題</a:t>
-            </a:r>
-          </a:p>
-        </p:txBody>
-      </p:sp>
-      <p:sp>
-        <p:nvSpPr>
-          <p:cNvPr id="4" name="TextBox 3"/>
-          <p:cNvSpPr txBox="1"/>
-          <p:nvPr/>
-        </p:nvSpPr>
-        <p:spPr>
-          <a:xfrm>
-            <a:off x="11247120" y="6355080"/>
-            <a:ext cx="457200" cy="274320"/>
-          </a:xfrm>
-          <a:prstGeom prst="rect">
-            <a:avLst/>
-          </a:prstGeom>
-          <a:noFill/>
-        </p:spPr>
-        <p:txBody>
-          <a:bodyPr wrap="square" lIns="0" tIns="0" rIns="0" bIns="0">
-            <a:spAutoFit/>
-          </a:bodyPr>
-          <a:lstStyle/>
-          <a:p>
-            <a:pPr algn="r">
-              <a:lnSpc>
-                <a:spcPct val="125000"/>
-              </a:lnSpc>
-              <a:spcAft>
-                <a:spcPts val="600"/>
-              </a:spcAft>
-            </a:pPr>
-            <a:r>
-              <a:rPr sz="1000" b="0">
-                <a:solidFill>
-                  <a:srgbClr val="6B7280"/>
-                </a:solidFill>
-                <a:latin typeface="Microsoft JhengHei"/>
-              </a:rPr>
-              <a:t>6</a:t>
-            </a:r>
-          </a:p>
-        </p:txBody>
-      </p:sp>
-      <p:sp>
-        <p:nvSpPr>
-          <p:cNvPr id="5" name="TextBox 4"/>
-          <p:cNvSpPr txBox="1"/>
-          <p:nvPr/>
-        </p:nvSpPr>
-        <p:spPr>
-          <a:xfrm>
-            <a:off x="640080" y="1737360"/>
-            <a:ext cx="1005840" cy="731520"/>
-          </a:xfrm>
-          <a:prstGeom prst="rect">
-            <a:avLst/>
-          </a:prstGeom>
-          <a:noFill/>
-        </p:spPr>
-        <p:txBody>
-          <a:bodyPr wrap="square" lIns="0" tIns="0" rIns="0" bIns="0">
-            <a:spAutoFit/>
-          </a:bodyPr>
-          <a:lstStyle/>
-          <a:p>
-            <a:pPr algn="l">
-              <a:lnSpc>
-                <a:spcPct val="125000"/>
-              </a:lnSpc>
-              <a:spcAft>
-                <a:spcPts val="600"/>
-              </a:spcAft>
-            </a:pPr>
-            <a:r>
-              <a:rPr sz="3000" b="1">
-                <a:solidFill>
-                  <a:srgbClr val="C4553B"/>
-                </a:solidFill>
-                <a:latin typeface="Microsoft JhengHei"/>
-              </a:rPr>
-              <a:t>Q1</a:t>
-            </a:r>
-          </a:p>
-        </p:txBody>
-      </p:sp>
-      <p:sp>
-        <p:nvSpPr>
-          <p:cNvPr id="6" name="TextBox 5"/>
-          <p:cNvSpPr txBox="1"/>
-          <p:nvPr/>
-        </p:nvSpPr>
-        <p:spPr>
-          <a:xfrm>
-            <a:off x="1737360" y="1792224"/>
-            <a:ext cx="9784080" cy="1097280"/>
-          </a:xfrm>
-          <a:prstGeom prst="rect">
-            <a:avLst/>
-          </a:prstGeom>
-          <a:noFill/>
-        </p:spPr>
-        <p:txBody>
-          <a:bodyPr wrap="square" lIns="0" tIns="0" rIns="0" bIns="0">
-            <a:spAutoFit/>
-          </a:bodyPr>
-          <a:lstStyle/>
-          <a:p>
-            <a:pPr algn="l">
-              <a:lnSpc>
-                <a:spcPct val="125000"/>
-              </a:lnSpc>
-              <a:spcAft>
-                <a:spcPts val="0"/>
-              </a:spcAft>
-            </a:pPr>
-            <a:r>
-              <a:rPr sz="1500" b="1">
-                <a:solidFill>
-                  <a:srgbClr val="1A1A1A"/>
-                </a:solidFill>
-                <a:latin typeface="Microsoft JhengHei"/>
-              </a:rPr>
-              <a:t>動作空間是不是關鍵約束？</a:t>
-            </a:r>
-            <a:r>
-              <a:rPr sz="1500" b="0">
-                <a:solidFill>
-                  <a:srgbClr val="1A1A1A"/>
-                </a:solidFill>
-                <a:latin typeface="Microsoft JhengHei"/>
-              </a:rPr>
-              <a:t>　在其餘一切完全相同的條件下，把每期決策次數從 0、1 放大到 126，會不會系統性造成過度交易與績效劣化？</a:t>
-            </a:r>
-          </a:p>
-        </p:txBody>
-      </p:sp>
-      <p:sp>
-        <p:nvSpPr>
-          <p:cNvPr id="7" name="TextBox 6"/>
-          <p:cNvSpPr txBox="1"/>
-          <p:nvPr/>
-        </p:nvSpPr>
-        <p:spPr>
-          <a:xfrm>
-            <a:off x="640080" y="3063240"/>
-            <a:ext cx="1005840" cy="731520"/>
-          </a:xfrm>
-          <a:prstGeom prst="rect">
-            <a:avLst/>
-          </a:prstGeom>
-          <a:noFill/>
-        </p:spPr>
-        <p:txBody>
-          <a:bodyPr wrap="square" lIns="0" tIns="0" rIns="0" bIns="0">
-            <a:spAutoFit/>
-          </a:bodyPr>
-          <a:lstStyle/>
-          <a:p>
-            <a:pPr algn="l">
-              <a:lnSpc>
-                <a:spcPct val="125000"/>
-              </a:lnSpc>
-              <a:spcAft>
-                <a:spcPts val="600"/>
-              </a:spcAft>
-            </a:pPr>
-            <a:r>
-              <a:rPr sz="3000" b="1">
-                <a:solidFill>
-                  <a:srgbClr val="0B2A5B"/>
-                </a:solidFill>
-                <a:latin typeface="Microsoft JhengHei"/>
-              </a:rPr>
-              <a:t>Q2</a:t>
-            </a:r>
-          </a:p>
-        </p:txBody>
-      </p:sp>
-      <p:sp>
-        <p:nvSpPr>
-          <p:cNvPr id="8" name="TextBox 7"/>
-          <p:cNvSpPr txBox="1"/>
-          <p:nvPr/>
-        </p:nvSpPr>
-        <p:spPr>
-          <a:xfrm>
-            <a:off x="1737360" y="3118104"/>
-            <a:ext cx="9784080" cy="1097280"/>
-          </a:xfrm>
-          <a:prstGeom prst="rect">
-            <a:avLst/>
-          </a:prstGeom>
-          <a:noFill/>
-        </p:spPr>
-        <p:txBody>
-          <a:bodyPr wrap="square" lIns="0" tIns="0" rIns="0" bIns="0">
-            <a:spAutoFit/>
-          </a:bodyPr>
-          <a:lstStyle/>
-          <a:p>
-            <a:pPr algn="l">
-              <a:lnSpc>
-                <a:spcPct val="125000"/>
-              </a:lnSpc>
-              <a:spcAft>
-                <a:spcPts val="0"/>
-              </a:spcAft>
-            </a:pPr>
-            <a:r>
-              <a:rPr sz="1500" b="1">
-                <a:solidFill>
-                  <a:srgbClr val="1A1A1A"/>
-                </a:solidFill>
-                <a:latin typeface="Microsoft JhengHei"/>
-              </a:rPr>
-              <a:t>逐對辨識能力存在嗎？</a:t>
-            </a:r>
-            <a:r>
-              <a:rPr sz="1500" b="0">
-                <a:solidFill>
-                  <a:srgbClr val="1A1A1A"/>
-                </a:solidFill>
-                <a:latin typeface="Microsoft JhengHei"/>
-              </a:rPr>
-              <a:t>　把動作空間縮到每期選一組門檻之後，模型能不能辨識出「這一組配對該用哪個門檻」——也就是贏過一個完全不辨識的常數？</a:t>
-            </a:r>
-          </a:p>
-        </p:txBody>
-      </p:sp>
-      <p:sp>
-        <p:nvSpPr>
-          <p:cNvPr id="9" name="TextBox 8"/>
-          <p:cNvSpPr txBox="1"/>
-          <p:nvPr/>
-        </p:nvSpPr>
-        <p:spPr>
-          <a:xfrm>
-            <a:off x="640080" y="4389120"/>
-            <a:ext cx="1005840" cy="731520"/>
-          </a:xfrm>
-          <a:prstGeom prst="rect">
-            <a:avLst/>
-          </a:prstGeom>
-          <a:noFill/>
-        </p:spPr>
-        <p:txBody>
-          <a:bodyPr wrap="square" lIns="0" tIns="0" rIns="0" bIns="0">
-            <a:spAutoFit/>
-          </a:bodyPr>
-          <a:lstStyle/>
-          <a:p>
-            <a:pPr algn="l">
-              <a:lnSpc>
-                <a:spcPct val="125000"/>
-              </a:lnSpc>
-              <a:spcAft>
-                <a:spcPts val="600"/>
-              </a:spcAft>
-            </a:pPr>
-            <a:r>
-              <a:rPr sz="3000" b="1">
-                <a:solidFill>
-                  <a:srgbClr val="0B2A5B"/>
-                </a:solidFill>
-                <a:latin typeface="Microsoft JhengHei"/>
-              </a:rPr>
-              <a:t>Q3</a:t>
-            </a:r>
-          </a:p>
-        </p:txBody>
-      </p:sp>
-      <p:sp>
-        <p:nvSpPr>
-          <p:cNvPr id="10" name="TextBox 9"/>
-          <p:cNvSpPr txBox="1"/>
-          <p:nvPr/>
-        </p:nvSpPr>
-        <p:spPr>
-          <a:xfrm>
-            <a:off x="1737360" y="4443984"/>
-            <a:ext cx="9784080" cy="1097280"/>
-          </a:xfrm>
-          <a:prstGeom prst="rect">
-            <a:avLst/>
-          </a:prstGeom>
-          <a:noFill/>
-        </p:spPr>
-        <p:txBody>
-          <a:bodyPr wrap="square" lIns="0" tIns="0" rIns="0" bIns="0">
-            <a:spAutoFit/>
-          </a:bodyPr>
-          <a:lstStyle/>
-          <a:p>
-            <a:pPr algn="l">
-              <a:lnSpc>
-                <a:spcPct val="125000"/>
-              </a:lnSpc>
-              <a:spcAft>
-                <a:spcPts val="0"/>
-              </a:spcAft>
-            </a:pPr>
-            <a:r>
-              <a:rPr sz="1500" b="1">
-                <a:solidFill>
-                  <a:srgbClr val="1A1A1A"/>
-                </a:solidFill>
-                <a:latin typeface="Microsoft JhengHei"/>
-              </a:rPr>
-              <a:t>相對固定門檻有效嗎？它的界線在哪？</a:t>
-            </a:r>
-            <a:r>
-              <a:rPr sz="1500" b="0">
-                <a:solidFill>
-                  <a:srgbClr val="1A1A1A"/>
-                </a:solidFill>
-                <a:latin typeface="Microsoft JhengHei"/>
-              </a:rPr>
-              <a:t>　門檻選擇式相對固定門檻是否有穩健優勢；而該優勢在哪種報酬口徑下成立、哪種口徑下不足以宣稱可交易？</a:t>
-            </a:r>
-          </a:p>
-        </p:txBody>
-      </p:sp>
-      <p:sp>
-        <p:nvSpPr>
-          <p:cNvPr id="11" name="TextBox 10"/>
-          <p:cNvSpPr txBox="1"/>
-          <p:nvPr/>
-        </p:nvSpPr>
-        <p:spPr>
-          <a:xfrm>
-            <a:off x="640080" y="5760720"/>
-            <a:ext cx="10881360" cy="457200"/>
-          </a:xfrm>
-          <a:prstGeom prst="rect">
-            <a:avLst/>
-          </a:prstGeom>
-          <a:noFill/>
-        </p:spPr>
-        <p:txBody>
-          <a:bodyPr wrap="square" lIns="0" tIns="0" rIns="0" bIns="0">
-            <a:spAutoFit/>
-          </a:bodyPr>
-          <a:lstStyle/>
-          <a:p>
-            <a:pPr algn="l">
-              <a:lnSpc>
-                <a:spcPct val="125000"/>
-              </a:lnSpc>
-              <a:spcAft>
-                <a:spcPts val="600"/>
-              </a:spcAft>
-            </a:pPr>
-            <a:r>
-              <a:rPr sz="1500" b="1">
-                <a:solidFill>
-                  <a:srgbClr val="C4553B"/>
-                </a:solidFill>
-                <a:latin typeface="Microsoft JhengHei"/>
-              </a:rPr>
-              <a:t>三個問題會得到三個不一致的答案——而這個不一致本身就是本研究的發現。</a:t>
             </a:r>
           </a:p>
         </p:txBody>

--- a/thesis/1150922.pptx
+++ b/thesis/1150922.pptx
@@ -2096,74 +2096,147 @@
           <a:lstStyle/>
           <a:p>
             <a:r>
-              <a:t>統計設計三個重點，加一個。</a:t>
-            </a:r>
-          </a:p>
-          <a:p>
-            <a:endParaRPr/>
-          </a:p>
-          <a:p>
-            <a:r>
-              <a:t>第一，抽樣單位。我不以 15 個參數配置當觀測單位，因為那是偽重複——它們共用</a:t>
-            </a:r>
-          </a:p>
-          <a:p>
-            <a:r>
+              <a:rPr dirty="0" err="1"/>
+              <a:t>統計設計三個重點</a:t>
+            </a:r>
+            <a:r>
+              <a:rPr dirty="0"/>
+              <a:t>。</a:t>
+            </a:r>
+          </a:p>
+          <a:p>
+            <a:endParaRPr dirty="0"/>
+          </a:p>
+          <a:p>
+            <a:r>
+              <a:rPr dirty="0" err="1"/>
+              <a:t>第一，抽樣單位。我不以</a:t>
+            </a:r>
+            <a:r>
+              <a:rPr dirty="0"/>
+              <a:t> 15 </a:t>
+            </a:r>
+            <a:r>
+              <a:rPr dirty="0" err="1"/>
+              <a:t>個參數配置當觀測單位，因為那是偽重複</a:t>
+            </a:r>
+            <a:r>
+              <a:rPr dirty="0"/>
+              <a:t>——</a:t>
+            </a:r>
+            <a:r>
+              <a:rPr dirty="0" err="1"/>
+              <a:t>它們共用</a:t>
+            </a:r>
+            <a:endParaRPr dirty="0"/>
+          </a:p>
+          <a:p>
+            <a:r>
+              <a:rPr dirty="0" err="1"/>
               <a:t>同一份資料、同一段期間、同一批配對，有效樣本數其實接近一條回測路徑。我改以</a:t>
             </a:r>
-          </a:p>
-          <a:p>
-            <a:r>
-              <a:t>時間為抽樣單位。</a:t>
-            </a:r>
-          </a:p>
-          <a:p>
-            <a:endParaRPr/>
-          </a:p>
-          <a:p>
-            <a:r>
-              <a:t>第二，主檢定用循環區塊拔靴，逐日報酬差，一萬次重抽。區塊長度取一個完整交易期，</a:t>
-            </a:r>
-          </a:p>
-          <a:p>
-            <a:r>
+            <a:endParaRPr dirty="0"/>
+          </a:p>
+          <a:p>
+            <a:r>
+              <a:rPr dirty="0" err="1"/>
+              <a:t>時間為抽樣單位</a:t>
+            </a:r>
+            <a:r>
+              <a:rPr dirty="0"/>
+              <a:t>。</a:t>
+            </a:r>
+          </a:p>
+          <a:p>
+            <a:endParaRPr dirty="0"/>
+          </a:p>
+          <a:p>
+            <a:r>
+              <a:rPr dirty="0" err="1"/>
+              <a:t>第二，主檢定用循環區塊拔靴，逐日報酬差，一萬次重抽。區塊長度取一個完整交易期</a:t>
+            </a:r>
+            <a:r>
+              <a:rPr dirty="0"/>
+              <a:t>，</a:t>
+            </a:r>
+          </a:p>
+          <a:p>
+            <a:r>
+              <a:rPr dirty="0" err="1"/>
               <a:t>因為剛才說過有六個交易期同時運行，逐期報酬序列有結構性自相關。多重比較用</a:t>
             </a:r>
-          </a:p>
-          <a:p>
-            <a:r>
-              <a:t>BH-FDR 校正。</a:t>
-            </a:r>
-          </a:p>
-          <a:p>
-            <a:endParaRPr/>
-          </a:p>
-          <a:p>
-            <a:r>
-              <a:t>第三，報告口徑是 15 個配置的等權組合，不是最佳配置。因為等權組合沒有東西可挑，</a:t>
-            </a:r>
-          </a:p>
-          <a:p>
-            <a:r>
-              <a:t>選擇偏誤從源頭就消失了。代價是報告的絕對績效比較難看，這是誠實的代價。</a:t>
-            </a:r>
-          </a:p>
-          <a:p>
-            <a:endParaRPr/>
-          </a:p>
-          <a:p>
-            <a:r>
+            <a:endParaRPr dirty="0"/>
+          </a:p>
+          <a:p>
+            <a:r>
+              <a:rPr dirty="0"/>
+              <a:t>BH-FDR </a:t>
+            </a:r>
+            <a:r>
+              <a:rPr dirty="0" err="1"/>
+              <a:t>校正</a:t>
+            </a:r>
+            <a:r>
+              <a:rPr dirty="0"/>
+              <a:t>。</a:t>
+            </a:r>
+          </a:p>
+          <a:p>
+            <a:endParaRPr dirty="0"/>
+          </a:p>
+          <a:p>
+            <a:r>
+              <a:rPr dirty="0" err="1"/>
+              <a:t>第三，報告口徑是</a:t>
+            </a:r>
+            <a:r>
+              <a:rPr dirty="0"/>
+              <a:t> 15 </a:t>
+            </a:r>
+            <a:r>
+              <a:rPr dirty="0" err="1"/>
+              <a:t>個配置的等權組合，不是最佳配置。因為等權組合沒有東西可挑</a:t>
+            </a:r>
+            <a:r>
+              <a:rPr dirty="0"/>
+              <a:t>，</a:t>
+            </a:r>
+          </a:p>
+          <a:p>
+            <a:r>
+              <a:rPr dirty="0" err="1"/>
+              <a:t>選擇偏誤從源頭就消失了。代價是報告的絕對績效比較難看，這是誠實的代價</a:t>
+            </a:r>
+            <a:r>
+              <a:rPr dirty="0"/>
+              <a:t>。</a:t>
+            </a:r>
+          </a:p>
+          <a:p>
+            <a:endParaRPr dirty="0"/>
+          </a:p>
+          <a:p>
+            <a:r>
+              <a:rPr dirty="0" err="1"/>
               <a:t>最後一點很重要：消融這部分是完整預先登記的，假說、門檻、比較族、七項核對程序</a:t>
             </a:r>
-          </a:p>
-          <a:p>
-            <a:r>
+            <a:endParaRPr dirty="0"/>
+          </a:p>
+          <a:p>
+            <a:r>
+              <a:rPr dirty="0" err="1"/>
               <a:t>全部在回測啟動前就提交版本庫了。但我研究的其餘部分不是，那些是依文獻慣例在</a:t>
             </a:r>
-          </a:p>
-          <a:p>
-            <a:r>
-              <a:t>分析時採用的判準。兩者證據強度不同，我等一下報結果時會分開講。</a:t>
+            <a:endParaRPr dirty="0"/>
+          </a:p>
+          <a:p>
+            <a:r>
+              <a:rPr dirty="0" err="1"/>
+              <a:t>分析時採用的判準。兩者證據強度不同，我等一下報結果時會分開講</a:t>
+            </a:r>
+            <a:r>
+              <a:rPr dirty="0"/>
+              <a:t>。</a:t>
             </a:r>
           </a:p>
         </p:txBody>
@@ -10033,7 +10106,7 @@
                     <a:p>
                       <a:pPr algn="l"/>
                       <a:r>
-                        <a:rPr sz="1250" b="0">
+                        <a:rPr sz="1250" b="0" dirty="0">
                           <a:solidFill>
                             <a:srgbClr val="1A1A1A"/>
                           </a:solidFill>
@@ -10300,7 +10373,7 @@
                     <a:p>
                       <a:pPr algn="l"/>
                       <a:r>
-                        <a:rPr sz="1250" b="0">
+                        <a:rPr sz="1250" b="0" dirty="0" err="1">
                           <a:solidFill>
                             <a:srgbClr val="1A1A1A"/>
                           </a:solidFill>
@@ -10308,6 +10381,12 @@
                         </a:rPr>
                         <a:t>處理組</a:t>
                       </a:r>
+                      <a:endParaRPr sz="1250" b="0" dirty="0">
+                        <a:solidFill>
+                          <a:srgbClr val="1A1A1A"/>
+                        </a:solidFill>
+                        <a:latin typeface="Microsoft JhengHei"/>
+                      </a:endParaRPr>
                     </a:p>
                   </a:txBody>
                   <a:tcPr marT="27432" marB="27432">
@@ -17219,7 +17298,7 @@
                 </a:solidFill>
                 <a:latin typeface="Microsoft JhengHei"/>
               </a:rPr>
-              <a:t>買進落後的、放空領先的</a:t>
+              <a:t>買進相對低估的、放空相對高估的</a:t>
             </a:r>
             <a:r>
               <a:rPr sz="1700" b="0">

--- a/thesis/1150922.pptx
+++ b/thesis/1150922.pptx
@@ -3426,7 +3426,7 @@
           </a:p>
           <a:p>
             <a:r>
-              <a:t>第二道是 Deflated Sharpe Ratio。41 條策略無一通過 0.95。最高的那條 DSR 0.885，</a:t>
+              <a:t>第二道是 Deflated Sharpe Ratio。55 條策略無一通過 0.95。最高的那條 DSR 0.681，</a:t>
             </a:r>
           </a:p>
           <a:p>
@@ -19216,7 +19216,7 @@
                           </a:solidFill>
                           <a:latin typeface="Microsoft JhengHei"/>
                         </a:rPr>
-                        <a:t>41 條策略</a:t>
+                        <a:t>55 條策略</a:t>
                       </a:r>
                       <a:r>
                         <a:rPr sz="1300" b="1">
@@ -19234,7 +19234,7 @@
                           </a:solidFill>
                           <a:latin typeface="Microsoft JhengHei"/>
                         </a:rPr>
-                        <a:t>。最高者 DSR 0.885，而它的後半期 Sharpe 為 −0.389——高值全來自前半期</a:t>
+                        <a:t>。最高者 DSR 0.681（兩年形成期版本），而它的後半期 Sharpe 為 −0.389——高值全來自前半期</a:t>
                       </a:r>
                     </a:p>
                   </a:txBody>

--- a/thesis/1150922.pptx
+++ b/thesis/1150922.pptx
@@ -23703,7 +23703,7 @@
                           </a:solidFill>
                           <a:latin typeface="Microsoft JhengHei"/>
                         </a:rPr>
-                        <a:t>GICS-SSD（DRL − ZS）+1.080 pp</a:t>
+                        <a:t>GICS-SSD（DL-THR − ZS）+1.080 pp</a:t>
                       </a:r>
                     </a:p>
                   </a:txBody>
@@ -23779,7 +23779,7 @@
                           </a:solidFill>
                           <a:latin typeface="Microsoft JhengHei"/>
                         </a:rPr>
-                        <a:t>GICS-SDP（DRL − ZS）+0.861 pp</a:t>
+                        <a:t>GICS-SDP（DL-THR − ZS）+0.861 pp</a:t>
                       </a:r>
                     </a:p>
                   </a:txBody>

--- a/thesis/1150922.pptx
+++ b/thesis/1150922.pptx
@@ -2824,7 +2824,7 @@
           </a:p>
           <a:p>
             <a:r>
-              <a:t>五個配對來源，年化增益從 0.239 到 0.798 個百分點，方向全部為正，BH 校正後</a:t>
+              <a:t>五個配對來源，年化增益從 0.239 到 0.798%，方向全部為正，BH 校正後</a:t>
             </a:r>
           </a:p>
           <a:p>
@@ -3294,7 +3294,7 @@
           </a:p>
           <a:p>
             <a:r>
-              <a:t>結果是 15 格無一為正。最高的不分組 DTW 只有 0.009 個百分點，實質等於零。最低的</a:t>
+              <a:t>結果是 15 格無一為正。最高的不分組 DTW 只有 0.009%，實質等於零。最低的</a:t>
             </a:r>
           </a:p>
           <a:p>
@@ -3315,12 +3315,12 @@
           </a:p>
           <a:p>
             <a:r>
-              <a:t>唯二為正的是疊加 DL-THR 的兩條 GICS 臂，0.375 跟 0.390 個百分點。但我要自己</a:t>
-            </a:r>
-          </a:p>
-          <a:p>
-            <a:r>
-              <a:t>拆穿一件事：其中 0.282 個百分點純粹來自「少動用資本、閒置現金多收利息」</a:t>
+              <a:t>唯二為正的是疊加 DL-THR 的兩條 GICS 臂，0.375 跟 0.390%。但我要自己</a:t>
+            </a:r>
+          </a:p>
+          <a:p>
+            <a:r>
+              <a:t>拆穿一件事：其中 0.282%純粹來自「少動用資本、閒置現金多收利息」</a:t>
             </a:r>
           </a:p>
           <a:p>
@@ -3408,7 +3408,7 @@
           </a:p>
           <a:p>
             <a:r>
-              <a:t>第一道是絕對績效。以 15 格等權的口徑，最佳的策略帳面年化 1.026%，rf 超額只有 0.375 個百分點，Sharpe</a:t>
+              <a:t>第一道是絕對績效。以 15 格等權的口徑，最佳的策略帳面年化 1.026%，rf 超額只有 0.375%，Sharpe</a:t>
             </a:r>
           </a:p>
           <a:p>
@@ -3576,12 +3576,12 @@
           </a:p>
           <a:p>
             <a:r>
-              <a:t>第三這一條我要特別說。形成期層的比較，最小可偵測效果是 1.14 個百分點，而參照臂</a:t>
-            </a:r>
-          </a:p>
-          <a:p>
-            <a:r>
-              <a:t>自身的年化績效只有 0.461 個百分點。也就是說這個設計連參照臂自己那麼大的效果</a:t>
+              <a:t>第三這一條我要特別說。形成期層的比較，最小可偵測效果是 1.14%，而參照臂</a:t>
+            </a:r>
+          </a:p>
+          <a:p>
+            <a:r>
+              <a:t>自身的年化績效只有 0.461%。也就是說這個設計連參照臂自己那麼大的效果</a:t>
             </a:r>
           </a:p>
           <a:p>
@@ -4276,7 +4276,7 @@
           </a:p>
           <a:p>
             <a:r>
-              <a:t>無風險的部分）。等權口徑下最佳的策略分別是 1.026%、2.793%、0.375%。若只看網格裡最好的單一格，不分組 DTW 的 Top1 可到帳面 3.6%、rf 超額 4.6 個百分點，但那是 15 選 1 之後的數字，DSR 扣回後沒有通過，見 5.1.2 節。</a:t>
+              <a:t>無風險的部分）。等權口徑下最佳的策略分別是 1.026%、2.793%、0.375%。若只看網格裡最好的單一格，不分組 DTW 的 Top1 可到帳面 3.6%、rf 超額 4.6%，但那是 15 選 1 之後的數字，DSR 扣回後沒有通過，見 5.1.2 節。</a:t>
             </a:r>
           </a:p>
           <a:p>
@@ -4297,7 +4297,7 @@
           </a:p>
           <a:p>
             <a:r>
-              <a:t>下面那張表是我把 DL-THR 的 rf 超額優勢拆開：1.080 個百分點裡面，0.798 是真實</a:t>
+              <a:t>下面那張表是我把 DL-THR 的 rf 超額優勢拆開：1.080%裡面，0.798 是真實</a:t>
             </a:r>
           </a:p>
           <a:p>
@@ -15814,7 +15814,7 @@
                           </a:solidFill>
                           <a:latin typeface="Microsoft JhengHei"/>
                         </a:rPr>
-                        <a:t>年化Δ（pp）</a:t>
+                        <a:t>年化Δ（%）</a:t>
                       </a:r>
                     </a:p>
                   </a:txBody>
@@ -15860,7 +15860,7 @@
                           </a:solidFill>
                           <a:latin typeface="Microsoft JhengHei"/>
                         </a:rPr>
-                        <a:t>95% CI（pp）</a:t>
+                        <a:t>95% CI（%）</a:t>
                       </a:r>
                     </a:p>
                   </a:txBody>
@@ -18713,7 +18713,7 @@
                 </a:solidFill>
                 <a:latin typeface="Microsoft JhengHei"/>
               </a:rPr>
-              <a:t>+0.009 個百分點</a:t>
+              <a:t>+0.009%</a:t>
             </a:r>
             <a:r>
               <a:rPr sz="1350" b="0">
@@ -18803,7 +18803,7 @@
                 </a:solidFill>
                 <a:latin typeface="Microsoft JhengHei"/>
               </a:rPr>
-              <a:t>+0.375、+0.390 個百分點。但其中 </a:t>
+              <a:t>+0.375、+0.390%。但其中 </a:t>
             </a:r>
             <a:r>
               <a:rPr sz="1300" b="1">
@@ -18812,7 +18812,7 @@
                 </a:solidFill>
                 <a:latin typeface="Microsoft JhengHei"/>
               </a:rPr>
-              <a:t>+0.282 pp 純粹來自少動用資本、閒置現金多收的利息</a:t>
+              <a:t>+0.282% 純粹來自少動用資本、閒置現金多收的利息</a:t>
             </a:r>
             <a:r>
               <a:rPr sz="1300" b="0">
@@ -19131,7 +19131,7 @@
                           </a:solidFill>
                           <a:latin typeface="Microsoft JhengHei"/>
                         </a:rPr>
-                        <a:t>等權口徑最佳策略帳面年化 1.026%；rf 超額僅 +0.375 pp、Sharpe 0.276；「日均報酬是否為零」檢定 </a:t>
+                        <a:t>等權口徑最佳策略帳面年化 1.026%；rf 超額僅 +0.375%、Sharpe 0.276；「日均報酬是否為零」檢定 </a:t>
                       </a:r>
                       <a:r>
                         <a:rPr sz="1300" b="1">
@@ -19969,7 +19969,7 @@
                           </a:solidFill>
                           <a:latin typeface="Microsoft JhengHei"/>
                         </a:rPr>
-                        <a:t>：最小可偵測效果 1.14 pp ＞ 參照臂自身績效 0.461 pp</a:t>
+                        <a:t>：最小可偵測效果 1.14% ＞ 參照臂自身績效 0.461%</a:t>
                       </a:r>
                     </a:p>
                   </a:txBody>
@@ -23703,7 +23703,7 @@
                           </a:solidFill>
                           <a:latin typeface="Microsoft JhengHei"/>
                         </a:rPr>
-                        <a:t>GICS-SSD（DL-THR − ZS）+1.080 pp</a:t>
+                        <a:t>GICS-SSD（DL-THR − ZS）+1.080%</a:t>
                       </a:r>
                     </a:p>
                   </a:txBody>
@@ -23726,7 +23726,7 @@
                           </a:solidFill>
                           <a:latin typeface="Microsoft JhengHei"/>
                         </a:rPr>
-                        <a:t>+0.798 pp</a:t>
+                        <a:t>+0.798%</a:t>
                       </a:r>
                     </a:p>
                   </a:txBody>
@@ -23749,7 +23749,7 @@
                           </a:solidFill>
                           <a:latin typeface="Microsoft JhengHei"/>
                         </a:rPr>
-                        <a:t>+0.282 pp</a:t>
+                        <a:t>+0.282%</a:t>
                       </a:r>
                     </a:p>
                   </a:txBody>
@@ -23779,7 +23779,7 @@
                           </a:solidFill>
                           <a:latin typeface="Microsoft JhengHei"/>
                         </a:rPr>
-                        <a:t>GICS-SDP（DL-THR − ZS）+0.861 pp</a:t>
+                        <a:t>GICS-SDP（DL-THR − ZS）+0.861%</a:t>
                       </a:r>
                     </a:p>
                   </a:txBody>
@@ -23802,7 +23802,7 @@
                           </a:solidFill>
                           <a:latin typeface="Microsoft JhengHei"/>
                         </a:rPr>
-                        <a:t>+0.579 pp</a:t>
+                        <a:t>+0.579%</a:t>
                       </a:r>
                     </a:p>
                   </a:txBody>
@@ -23825,7 +23825,7 @@
                           </a:solidFill>
                           <a:latin typeface="Microsoft JhengHei"/>
                         </a:rPr>
-                        <a:t>+0.282 pp</a:t>
+                        <a:t>+0.282%</a:t>
                       </a:r>
                     </a:p>
                   </a:txBody>
@@ -23977,7 +23977,7 @@
                 </a:solidFill>
                 <a:latin typeface="Microsoft JhengHei"/>
               </a:rPr>
-              <a:t>那 +0.282 pp 不應計為技巧</a:t>
+              <a:t>那 +0.282% 不應計為技巧</a:t>
             </a:r>
             <a:r>
               <a:rPr sz="1300" b="0">

--- a/thesis/1150922.pptx
+++ b/thesis/1150922.pptx
@@ -1718,7 +1718,7 @@
           </a:p>
           <a:p>
             <a:r>
-              <a:t>凝聚層次聚類、K-means。每一期都重新估計。</a:t>
+              <a:t>Agglomerative、K-means。每一期都重新估計。</a:t>
             </a:r>
           </a:p>
           <a:p>
@@ -4175,12 +4175,7 @@
           </a:p>
           <a:p>
             <a:r>
-              <a:t>跨輪 Sharpe 的標準差中位數是 0.031，而修正造成的位移中位數是 0.236，差了將近</a:t>
-            </a:r>
-          </a:p>
-          <a:p>
-            <a:r>
-              <a:t>八倍。</a:t>
+              <a:t>反過來、修正後反而更差的只有 1 組。跨輪 Sharpe 的標準差中位數只有 0.031。</a:t>
             </a:r>
           </a:p>
           <a:p>
@@ -4411,12 +4406,7 @@
           </a:p>
           <a:p>
             <a:r>
-              <a:t>下降；2012 那篇更狠，把真實交易成本算進去之後，多數策略的淨報酬已經不顯著，</a:t>
-            </a:r>
-          </a:p>
-          <a:p>
-            <a:r>
-              <a:t>2002 年之後基本無利可圖。</a:t>
+              <a:t>下降；2012 那篇更狠，把真實交易成本算進去之後，多數策略的淨報酬已經不顯著。</a:t>
             </a:r>
           </a:p>
           <a:p>
@@ -20148,7 +20138,7 @@
                           </a:solidFill>
                           <a:latin typeface="Microsoft JhengHei"/>
                         </a:rPr>
-                        <a:t>`entry_z` 的下界 </a:t>
+                        <a:t>entry_z 的下界 </a:t>
                       </a:r>
                       <a:r>
                         <a:rPr sz="1200" b="1">
@@ -22954,7 +22944,7 @@
                 </a:solidFill>
                 <a:latin typeface="Microsoft JhengHei"/>
               </a:rPr>
-              <a:t>位移（ΔSharpe 中位 +0.236）</a:t>
+              <a:t>修正後反而更差的只有 </a:t>
             </a:r>
             <a:r>
               <a:rPr sz="1300" b="1">
@@ -22963,7 +22953,7 @@
                 </a:solidFill>
                 <a:latin typeface="Microsoft JhengHei"/>
               </a:rPr>
-              <a:t>遠大於</a:t>
+              <a:t>1 / 120</a:t>
             </a:r>
             <a:r>
               <a:rPr sz="1300" b="0">
@@ -22972,7 +22962,7 @@
                 </a:solidFill>
                 <a:latin typeface="Microsoft JhengHei"/>
               </a:rPr>
-              <a:t>跨輪雜訊（標準差 0.031）。</a:t>
+              <a:t>；跨輪 Sharpe 標準差中位僅 0.031。</a:t>
             </a:r>
           </a:p>
           <a:p>
@@ -22991,7 +22981,7 @@
                 </a:solidFill>
                 <a:latin typeface="Microsoft JhengHei"/>
               </a:rPr>
-              <a:t>唯一例外：`KM-SSD-DRL` 為 6/15（p = 0.061），該臂不可單獨宣稱。</a:t>
+              <a:t>唯一例外：KM-SSD-DRL 為 6/15（p = 0.061），該臂不可單獨宣稱。</a:t>
             </a:r>
           </a:p>
         </p:txBody>
@@ -24179,7 +24169,7 @@
                 </a:solidFill>
                 <a:latin typeface="Microsoft JhengHei"/>
               </a:rPr>
-              <a:t>GGR 在 1962–2002 年報告年化超額報酬最高可達 11%。但後續研究一致發現：</a:t>
+              <a:t>GGR 以 1962–2002 年資料報告：計入交易成本後，年化超額報酬仍約 11%。但後續研究一致發現：</a:t>
             </a:r>
             <a:r>
               <a:rPr sz="1700" b="1">
@@ -24359,7 +24349,7 @@
                 </a:solidFill>
                 <a:latin typeface="Microsoft JhengHei"/>
               </a:rPr>
-              <a:t>納入佣金、買賣價差與放空費用後，獲利</a:t>
+              <a:t>納入佣金、買賣價差與市場衝擊（單邊約 30 個基點）後，多數策略的淨報酬</a:t>
             </a:r>
             <a:r>
               <a:rPr sz="1300" b="1">
@@ -24368,25 +24358,7 @@
                 </a:solidFill>
                 <a:latin typeface="Microsoft JhengHei"/>
               </a:rPr>
-              <a:t>大幅縮水</a:t>
-            </a:r>
-            <a:r>
-              <a:rPr sz="1300" b="0">
-                <a:solidFill>
-                  <a:srgbClr val="1A1A1A"/>
-                </a:solidFill>
-                <a:latin typeface="Microsoft JhengHei"/>
-              </a:rPr>
-              <a:t>；且該文明確指出</a:t>
-            </a:r>
-            <a:r>
-              <a:rPr sz="1300" b="1">
-                <a:solidFill>
-                  <a:srgbClr val="1A1A1A"/>
-                </a:solidFill>
-                <a:latin typeface="Microsoft JhengHei"/>
-              </a:rPr>
-              <a:t>2002 年後基本無利可圖</a:t>
+              <a:t>已不再顯著</a:t>
             </a:r>
             <a:r>
               <a:rPr sz="1300" b="0">

--- a/thesis/1150922.pptx
+++ b/thesis/1150922.pptx
@@ -19874,7 +19874,7 @@
                           </a:solidFill>
                           <a:latin typeface="Microsoft JhengHei"/>
                         </a:rPr>
-                        <a:t>母體為 S&amp;P 500 大型股，而報酬衰減在流動性高的大型股上更明顯</a:t>
+                        <a:t>母體為 S&amp;P 500 大型股，而報酬衰減在流動性高的大型股上更明顯；且 2010 年前因價格資料缺口，每期可用標的僅約 237 檔（其後約 447）</a:t>
                       </a:r>
                     </a:p>
                   </a:txBody>
@@ -29923,7 +29923,7 @@
                 </a:solidFill>
                 <a:latin typeface="Microsoft JhengHei"/>
               </a:rPr>
-              <a:t>每期中位成分股數</a:t>
+              <a:t>每期中位可用標的數</a:t>
             </a:r>
           </a:p>
         </p:txBody>

--- a/thesis/1150922.pptx
+++ b/thesis/1150922.pptx
@@ -2816,7 +2816,7 @@
           </a:p>
           <a:p>
             <a:r>
-              <a:t>這一段的判準不是事前登記的，是依文獻慣例在分析時採用。</a:t>
+              <a:t>這一段的判準不是預先登記的，是依文獻慣例在分析時採用。</a:t>
             </a:r>
           </a:p>
           <a:p>
